--- a/materials/Week4_教學簡報.pptx
+++ b/materials/Week4_教學簡報.pptx
@@ -30,6 +30,7 @@
     <p:sldId xmlns:ns0="http://schemas.openxmlformats.org/officeDocument/2006/relationships" id="300" ns0:id="rId50"/>
     <p:sldId xmlns:ns0="http://schemas.openxmlformats.org/officeDocument/2006/relationships" id="301" ns0:id="rId51"/>
     <p:sldId xmlns:ns0="http://schemas.openxmlformats.org/officeDocument/2006/relationships" id="302" ns0:id="rId52"/>
+    <p:sldId xmlns:ns0="http://schemas.openxmlformats.org/officeDocument/2006/relationships" id="303" ns0:id="rId53"/>
   </p:sldIdLst>
   <p:sldSz cx="12192000" cy="6858000"/>
   <p:notesSz cx="6858000" cy="9144000"/>
@@ -1208,7 +1209,7 @@
                 <a:ea typeface="PingFang TC"/>
                 <a:cs typeface="PingFang TC"/>
               </a:rPr>
-              <a:t>01 / 22</a:t>
+              <a:t>01 / 23</a:t>
             </a:r>
           </a:p>
         </p:txBody>
@@ -1921,7 +1922,7 @@
                 <a:ea typeface="PingFang TC"/>
                 <a:cs typeface="PingFang TC"/>
               </a:rPr>
-              <a:t>02 / 22</a:t>
+              <a:t>02 / 23</a:t>
             </a:r>
           </a:p>
         </p:txBody>
@@ -3097,7 +3098,7 @@
                 <a:ea typeface="PingFang TC"/>
                 <a:cs typeface="PingFang TC"/>
               </a:rPr>
-              <a:t>03 / 22</a:t>
+              <a:t>03 / 23</a:t>
             </a:r>
           </a:p>
         </p:txBody>
@@ -3977,7 +3978,7 @@
                 <a:ea typeface="PingFang TC"/>
                 <a:cs typeface="PingFang TC"/>
               </a:rPr>
-              <a:t>04 / 22</a:t>
+              <a:t>04 / 23</a:t>
             </a:r>
           </a:p>
         </p:txBody>
@@ -5320,7 +5321,7 @@
                 <a:ea typeface="PingFang TC"/>
                 <a:cs typeface="PingFang TC"/>
               </a:rPr>
-              <a:t>05 / 22</a:t>
+              <a:t>05 / 23</a:t>
             </a:r>
           </a:p>
         </p:txBody>
@@ -6869,7 +6870,7 @@
                 <a:ea typeface="PingFang TC"/>
                 <a:cs typeface="PingFang TC"/>
               </a:rPr>
-              <a:t>06 / 22</a:t>
+              <a:t>06 / 23</a:t>
             </a:r>
           </a:p>
         </p:txBody>
@@ -8449,7 +8450,7 @@
                 <a:ea typeface="PingFang TC"/>
                 <a:cs typeface="PingFang TC"/>
               </a:rPr>
-              <a:t>07 / 22</a:t>
+              <a:t>07 / 23</a:t>
             </a:r>
           </a:p>
         </p:txBody>
@@ -9180,7 +9181,7 @@
                 <a:ea typeface="PingFang TC"/>
                 <a:cs typeface="PingFang TC"/>
               </a:rPr>
-              <a:t>08 / 22</a:t>
+              <a:t>08 / 23</a:t>
             </a:r>
           </a:p>
         </p:txBody>
@@ -10729,7 +10730,7 @@
                 <a:ea typeface="PingFang TC"/>
                 <a:cs typeface="PingFang TC"/>
               </a:rPr>
-              <a:t>09 / 22</a:t>
+              <a:t>09 / 23</a:t>
             </a:r>
           </a:p>
         </p:txBody>
@@ -11722,7 +11723,7 @@
                 <a:ea typeface="PingFang TC"/>
                 <a:cs typeface="PingFang TC"/>
               </a:rPr>
-              <a:t>10 / 22</a:t>
+              <a:t>10 / 23</a:t>
             </a:r>
           </a:p>
         </p:txBody>
@@ -13271,7 +13272,7 @@
                 <a:ea typeface="PingFang TC"/>
                 <a:cs typeface="PingFang TC"/>
               </a:rPr>
-              <a:t>11 / 22</a:t>
+              <a:t>11 / 23</a:t>
             </a:r>
           </a:p>
         </p:txBody>
@@ -14506,7 +14507,7 @@
                 <a:ea typeface="PingFang TC"/>
                 <a:cs typeface="PingFang TC"/>
               </a:rPr>
-              <a:t>12 / 22</a:t>
+              <a:t>12 / 23</a:t>
             </a:r>
           </a:p>
         </p:txBody>
@@ -15499,7 +15500,7 @@
                 <a:ea typeface="PingFang TC"/>
                 <a:cs typeface="PingFang TC"/>
               </a:rPr>
-              <a:t>13 / 22</a:t>
+              <a:t>13 / 23</a:t>
             </a:r>
           </a:p>
         </p:txBody>
@@ -16077,10 +16078,10 @@
       <p:grpSpPr/>
       <p:sp>
         <p:nvSpPr>
-          <p:cNvPr id="16" name="">
-            <a:extLst>
-              <a:ext uri="{FF2B5EF4-FFF2-40B4-BE49-F238E27FC236}">
-                <a16:creationId xmlns:a16="http://schemas.microsoft.com/office/drawing/2014/main" id="{5BB8D3BC-6F9C-4FF6-9408-22B5502B82D8}"/>
+          <p:cNvPr id="24" name="">
+            <a:extLst>
+              <a:ext uri="{FF2B5EF4-FFF2-40B4-BE49-F238E27FC236}">
+                <a16:creationId xmlns:a16="http://schemas.microsoft.com/office/drawing/2014/main" id="{894198F7-83D4-49B9-B014-ED1938DE842A}"/>
               </a:ext>
             </a:extLst>
           </p:cNvPr>
@@ -16138,7 +16139,7 @@
           <p:cNvPr id="2" name="">
             <a:extLst>
               <a:ext uri="{FF2B5EF4-FFF2-40B4-BE49-F238E27FC236}">
-                <a16:creationId xmlns:a16="http://schemas.microsoft.com/office/drawing/2014/main" id="{ECDE94B8-638C-45EE-88C9-E792C8FC43C7}"/>
+                <a16:creationId xmlns:a16="http://schemas.microsoft.com/office/drawing/2014/main" id="{377D4656-B699-4AD3-93C2-8029CD16F4A6}"/>
               </a:ext>
             </a:extLst>
           </p:cNvPr>
@@ -16186,7 +16187,7 @@
                 <a:ea typeface="PingFang TC"/>
                 <a:cs typeface="PingFang TC"/>
               </a:rPr>
-              <a:t>卡 1 問 AI：這一行的錢流與困難</a:t>
+              <a:t>問 AI 卡怎麼用：按鈕做兩件事，你做三件事</a:t>
             </a:r>
           </a:p>
         </p:txBody>
@@ -16196,7 +16197,7 @@
           <p:cNvPr id="3" name="">
             <a:extLst>
               <a:ext uri="{FF2B5EF4-FFF2-40B4-BE49-F238E27FC236}">
-                <a16:creationId xmlns:a16="http://schemas.microsoft.com/office/drawing/2014/main" id="{DACACF9F-5FEB-48CE-B65C-931C79168A18}"/>
+                <a16:creationId xmlns:a16="http://schemas.microsoft.com/office/drawing/2014/main" id="{0594E1D1-B418-4737-B5F9-AECD926DA88B}"/>
               </a:ext>
             </a:extLst>
           </p:cNvPr>
@@ -16244,7 +16245,7 @@
                 <a:ea typeface="PingFang TC"/>
                 <a:cs typeface="PingFang TC"/>
               </a:rPr>
-              <a:t>按「複製問題、開我的 AI 工具」，貼上送出；Gemini、ChatGPT、Claude、Copilot 都行</a:t>
+              <a:t>三張卡都一樣。按鈕只會「複製問題＋開工具」，貼上、送出、貼回是你自己的動作</a:t>
             </a:r>
           </a:p>
         </p:txBody>
@@ -16254,7 +16255,7 @@
           <p:cNvPr id="4" name="">
             <a:extLst>
               <a:ext uri="{FF2B5EF4-FFF2-40B4-BE49-F238E27FC236}">
-                <a16:creationId xmlns:a16="http://schemas.microsoft.com/office/drawing/2014/main" id="{6B18BBCC-0F37-4529-8B9C-0F6B5ADCE388}"/>
+                <a16:creationId xmlns:a16="http://schemas.microsoft.com/office/drawing/2014/main" id="{B30CD637-8467-4304-A625-2AEECA5B0D85}"/>
               </a:ext>
             </a:extLst>
           </p:cNvPr>
@@ -16288,7 +16289,7 @@
           <p:cNvPr id="5" name="">
             <a:extLst>
               <a:ext uri="{FF2B5EF4-FFF2-40B4-BE49-F238E27FC236}">
-                <a16:creationId xmlns:a16="http://schemas.microsoft.com/office/drawing/2014/main" id="{87DC4C18-141E-42C6-965D-54526F9A5CB3}"/>
+                <a16:creationId xmlns:a16="http://schemas.microsoft.com/office/drawing/2014/main" id="{98C4DF5D-D4B6-4E69-BC4A-E5C5908A2BED}"/>
               </a:ext>
             </a:extLst>
           </p:cNvPr>
@@ -16346,7 +16347,7 @@
           <p:cNvPr id="6" name="">
             <a:extLst>
               <a:ext uri="{FF2B5EF4-FFF2-40B4-BE49-F238E27FC236}">
-                <a16:creationId xmlns:a16="http://schemas.microsoft.com/office/drawing/2014/main" id="{B279D397-E385-497D-A18F-C21B86E8D38A}"/>
+                <a16:creationId xmlns:a16="http://schemas.microsoft.com/office/drawing/2014/main" id="{16930E8F-383A-4F8D-A549-AC52ED848497}"/>
               </a:ext>
             </a:extLst>
           </p:cNvPr>
@@ -16394,7 +16395,7 @@
                 <a:ea typeface="PingFang TC"/>
                 <a:cs typeface="PingFang TC"/>
               </a:rPr>
-              <a:t>14 / 22</a:t>
+              <a:t>14 / 23</a:t>
             </a:r>
           </a:p>
         </p:txBody>
@@ -16404,25 +16405,25 @@
           <p:cNvPr id="7" name="">
             <a:extLst>
               <a:ext uri="{FF2B5EF4-FFF2-40B4-BE49-F238E27FC236}">
-                <a16:creationId xmlns:a16="http://schemas.microsoft.com/office/drawing/2014/main" id="{9BFE61CC-952C-4C65-A7AE-3F920868120B}"/>
-              </a:ext>
-            </a:extLst>
-          </p:cNvPr>
-          <p:cNvSpPr>
-            <a:spLocks noGrp="1"/>
-          </p:cNvSpPr>
-          <p:nvPr/>
-        </p:nvSpPr>
-        <p:spPr>
-          <a:xfrm>
-            <a:off x="609600" y="2390775"/>
-            <a:ext cx="6429375" cy="3019425"/>
-          </a:xfrm>
-          <a:prstGeom prst="rect">
+                <a16:creationId xmlns:a16="http://schemas.microsoft.com/office/drawing/2014/main" id="{DE9E04D7-6B3D-4F5C-A3A9-6A8A9E4572BB}"/>
+              </a:ext>
+            </a:extLst>
+          </p:cNvPr>
+          <p:cNvSpPr>
+            <a:spLocks noGrp="1"/>
+          </p:cNvSpPr>
+          <p:nvPr/>
+        </p:nvSpPr>
+        <p:spPr>
+          <a:xfrm>
+            <a:off x="609600" y="2533650"/>
+            <a:ext cx="457200" cy="457200"/>
+          </a:xfrm>
+          <a:prstGeom prst="ellipse">
             <a:avLst/>
           </a:prstGeom>
           <a:solidFill>
-            <a:srgbClr val="FFFFFF"/>
+            <a:srgbClr val="1D3A5F"/>
           </a:solidFill>
           <a:ln w="0">
             <a:noFill/>
@@ -16438,21 +16439,587 @@
           <p:cNvPr id="8" name="">
             <a:extLst>
               <a:ext uri="{FF2B5EF4-FFF2-40B4-BE49-F238E27FC236}">
-                <a16:creationId xmlns:a16="http://schemas.microsoft.com/office/drawing/2014/main" id="{487147BF-0043-4F18-8B38-7B983C2F57C9}"/>
-              </a:ext>
-            </a:extLst>
-          </p:cNvPr>
-          <p:cNvSpPr>
-            <a:spLocks noGrp="1"/>
-          </p:cNvSpPr>
-          <p:nvPr/>
-        </p:nvSpPr>
-        <p:spPr>
-          <a:xfrm>
-            <a:off x="609600" y="2390775"/>
-            <a:ext cx="66675" cy="3019425"/>
-          </a:xfrm>
-          <a:prstGeom prst="rect">
+                <a16:creationId xmlns:a16="http://schemas.microsoft.com/office/drawing/2014/main" id="{2EC9061A-3CF6-412B-9BE4-5AEB8ACEC2B4}"/>
+              </a:ext>
+            </a:extLst>
+          </p:cNvPr>
+          <p:cNvSpPr>
+            <a:spLocks noGrp="1"/>
+          </p:cNvSpPr>
+          <p:nvPr/>
+        </p:nvSpPr>
+        <p:spPr>
+          <a:xfrm>
+            <a:off x="704850" y="2571750"/>
+            <a:ext cx="381000" cy="400050"/>
+          </a:xfrm>
+          <a:prstGeom prst="rect">
+            <a:avLst/>
+          </a:prstGeom>
+          <a:noFill/>
+          <a:ln w="0">
+            <a:noFill/>
+          </a:ln>
+        </p:spPr>
+        <p:txBody>
+          <a:bodyPr>
+            <a:noAutofit/>
+          </a:bodyPr>
+          <a:lstStyle/>
+          <a:p>
+            <a:pPr>
+              <a:buNone/>
+              <a:defRPr sz="2025" b="1">
+                <a:solidFill>
+                  <a:srgbClr val="FFFFFF"/>
+                </a:solidFill>
+                <a:latin typeface="PingFang TC"/>
+                <a:ea typeface="PingFang TC"/>
+                <a:cs typeface="PingFang TC"/>
+              </a:defRPr>
+            </a:pPr>
+            <a:r>
+              <a:rPr sz="2025" b="1">
+                <a:solidFill>
+                  <a:srgbClr val="FFFFFF"/>
+                </a:solidFill>
+                <a:latin typeface="PingFang TC"/>
+                <a:ea typeface="PingFang TC"/>
+                <a:cs typeface="PingFang TC"/>
+              </a:rPr>
+              <a:t>1</a:t>
+            </a:r>
+          </a:p>
+        </p:txBody>
+      </p:sp>
+      <p:sp>
+        <p:nvSpPr>
+          <p:cNvPr id="9" name="">
+            <a:extLst>
+              <a:ext uri="{FF2B5EF4-FFF2-40B4-BE49-F238E27FC236}">
+                <a16:creationId xmlns:a16="http://schemas.microsoft.com/office/drawing/2014/main" id="{0599EA4C-FF67-4BCA-A109-6A5B6DE43B0A}"/>
+              </a:ext>
+            </a:extLst>
+          </p:cNvPr>
+          <p:cNvSpPr>
+            <a:spLocks noGrp="1"/>
+          </p:cNvSpPr>
+          <p:nvPr/>
+        </p:nvSpPr>
+        <p:spPr>
+          <a:xfrm>
+            <a:off x="1381125" y="2476500"/>
+            <a:ext cx="3000375" cy="523875"/>
+          </a:xfrm>
+          <a:prstGeom prst="rect">
+            <a:avLst/>
+          </a:prstGeom>
+          <a:noFill/>
+          <a:ln w="0">
+            <a:noFill/>
+          </a:ln>
+        </p:spPr>
+        <p:txBody>
+          <a:bodyPr>
+            <a:noAutofit/>
+          </a:bodyPr>
+          <a:lstStyle/>
+          <a:p>
+            <a:pPr>
+              <a:buNone/>
+              <a:defRPr sz="2550" b="1">
+                <a:solidFill>
+                  <a:srgbClr val="121212"/>
+                </a:solidFill>
+                <a:latin typeface="PingFang TC"/>
+                <a:ea typeface="PingFang TC"/>
+                <a:cs typeface="PingFang TC"/>
+              </a:defRPr>
+            </a:pPr>
+            <a:r>
+              <a:rPr sz="2550" b="1">
+                <a:solidFill>
+                  <a:srgbClr val="121212"/>
+                </a:solidFill>
+                <a:latin typeface="PingFang TC"/>
+                <a:ea typeface="PingFang TC"/>
+                <a:cs typeface="PingFang TC"/>
+              </a:rPr>
+              <a:t>按按鈕</a:t>
+            </a:r>
+          </a:p>
+        </p:txBody>
+      </p:sp>
+      <p:sp>
+        <p:nvSpPr>
+          <p:cNvPr id="10" name="">
+            <a:extLst>
+              <a:ext uri="{FF2B5EF4-FFF2-40B4-BE49-F238E27FC236}">
+                <a16:creationId xmlns:a16="http://schemas.microsoft.com/office/drawing/2014/main" id="{33F4DD03-9A6F-467F-A735-75DA093A6128}"/>
+              </a:ext>
+            </a:extLst>
+          </p:cNvPr>
+          <p:cNvSpPr>
+            <a:spLocks noGrp="1"/>
+          </p:cNvSpPr>
+          <p:nvPr/>
+        </p:nvSpPr>
+        <p:spPr>
+          <a:xfrm>
+            <a:off x="4695825" y="2381250"/>
+            <a:ext cx="6715125" cy="485775"/>
+          </a:xfrm>
+          <a:prstGeom prst="rect">
+            <a:avLst/>
+          </a:prstGeom>
+          <a:noFill/>
+          <a:ln w="0">
+            <a:noFill/>
+          </a:ln>
+        </p:spPr>
+        <p:txBody>
+          <a:bodyPr>
+            <a:noAutofit/>
+          </a:bodyPr>
+          <a:lstStyle/>
+          <a:p>
+            <a:pPr>
+              <a:buNone/>
+              <a:defRPr sz="2175" b="0">
+                <a:solidFill>
+                  <a:srgbClr val="121212"/>
+                </a:solidFill>
+                <a:latin typeface="PingFang TC"/>
+                <a:ea typeface="PingFang TC"/>
+                <a:cs typeface="PingFang TC"/>
+              </a:defRPr>
+            </a:pPr>
+            <a:r>
+              <a:rPr sz="2175" b="0">
+                <a:solidFill>
+                  <a:srgbClr val="121212"/>
+                </a:solidFill>
+                <a:latin typeface="PingFang TC"/>
+                <a:ea typeface="PingFang TC"/>
+                <a:cs typeface="PingFang TC"/>
+              </a:rPr>
+              <a:t>問題已複製到剪貼簿，AI 工具自動打開</a:t>
+            </a:r>
+          </a:p>
+        </p:txBody>
+      </p:sp>
+      <p:sp>
+        <p:nvSpPr>
+          <p:cNvPr id="11" name="">
+            <a:extLst>
+              <a:ext uri="{FF2B5EF4-FFF2-40B4-BE49-F238E27FC236}">
+                <a16:creationId xmlns:a16="http://schemas.microsoft.com/office/drawing/2014/main" id="{D0ABE812-9CCE-4771-B793-DEEF63DB334E}"/>
+              </a:ext>
+            </a:extLst>
+          </p:cNvPr>
+          <p:cNvSpPr>
+            <a:spLocks noGrp="1"/>
+          </p:cNvSpPr>
+          <p:nvPr/>
+        </p:nvSpPr>
+        <p:spPr>
+          <a:xfrm>
+            <a:off x="4695825" y="2857500"/>
+            <a:ext cx="6715125" cy="428625"/>
+          </a:xfrm>
+          <a:prstGeom prst="rect">
+            <a:avLst/>
+          </a:prstGeom>
+          <a:noFill/>
+          <a:ln w="0">
+            <a:noFill/>
+          </a:ln>
+        </p:spPr>
+        <p:txBody>
+          <a:bodyPr>
+            <a:noAutofit/>
+          </a:bodyPr>
+          <a:lstStyle/>
+          <a:p>
+            <a:pPr>
+              <a:buNone/>
+              <a:defRPr sz="1875" b="0">
+                <a:solidFill>
+                  <a:srgbClr val="626262"/>
+                </a:solidFill>
+                <a:latin typeface="PingFang TC"/>
+                <a:ea typeface="PingFang TC"/>
+                <a:cs typeface="PingFang TC"/>
+              </a:defRPr>
+            </a:pPr>
+            <a:r>
+              <a:rPr sz="1875" b="0">
+                <a:solidFill>
+                  <a:srgbClr val="626262"/>
+                </a:solidFill>
+                <a:latin typeface="PingFang TC"/>
+                <a:ea typeface="PingFang TC"/>
+                <a:cs typeface="PingFang TC"/>
+              </a:rPr>
+              <a:t>Gemini／Copilot 打開是空的——正常；ChatGPT／Claude 會自動帶入</a:t>
+            </a:r>
+          </a:p>
+        </p:txBody>
+      </p:sp>
+      <p:sp>
+        <p:nvSpPr>
+          <p:cNvPr id="12" name="">
+            <a:extLst>
+              <a:ext uri="{FF2B5EF4-FFF2-40B4-BE49-F238E27FC236}">
+                <a16:creationId xmlns:a16="http://schemas.microsoft.com/office/drawing/2014/main" id="{6CFEF638-4578-4E18-A983-2CD7BBECE664}"/>
+              </a:ext>
+            </a:extLst>
+          </p:cNvPr>
+          <p:cNvSpPr>
+            <a:spLocks noGrp="1"/>
+          </p:cNvSpPr>
+          <p:nvPr/>
+        </p:nvSpPr>
+        <p:spPr>
+          <a:xfrm>
+            <a:off x="1381125" y="3390900"/>
+            <a:ext cx="10201275" cy="19050"/>
+          </a:xfrm>
+          <a:prstGeom prst="rect">
+            <a:avLst/>
+          </a:prstGeom>
+          <a:solidFill>
+            <a:srgbClr val="D9D5CF"/>
+          </a:solidFill>
+          <a:ln w="0">
+            <a:noFill/>
+          </a:ln>
+        </p:spPr>
+        <p:txBody>
+          <a:bodyPr/>
+          <a:p/>
+        </p:txBody>
+      </p:sp>
+      <p:sp>
+        <p:nvSpPr>
+          <p:cNvPr id="13" name="">
+            <a:extLst>
+              <a:ext uri="{FF2B5EF4-FFF2-40B4-BE49-F238E27FC236}">
+                <a16:creationId xmlns:a16="http://schemas.microsoft.com/office/drawing/2014/main" id="{88DEDAB4-3410-4DFB-B45E-21093285DC29}"/>
+              </a:ext>
+            </a:extLst>
+          </p:cNvPr>
+          <p:cNvSpPr>
+            <a:spLocks noGrp="1"/>
+          </p:cNvSpPr>
+          <p:nvPr/>
+        </p:nvSpPr>
+        <p:spPr>
+          <a:xfrm>
+            <a:off x="609600" y="3733800"/>
+            <a:ext cx="457200" cy="457200"/>
+          </a:xfrm>
+          <a:prstGeom prst="ellipse">
+            <a:avLst/>
+          </a:prstGeom>
+          <a:solidFill>
+            <a:srgbClr val="1D3A5F"/>
+          </a:solidFill>
+          <a:ln w="0">
+            <a:noFill/>
+          </a:ln>
+        </p:spPr>
+        <p:txBody>
+          <a:bodyPr/>
+          <a:p/>
+        </p:txBody>
+      </p:sp>
+      <p:sp>
+        <p:nvSpPr>
+          <p:cNvPr id="14" name="">
+            <a:extLst>
+              <a:ext uri="{FF2B5EF4-FFF2-40B4-BE49-F238E27FC236}">
+                <a16:creationId xmlns:a16="http://schemas.microsoft.com/office/drawing/2014/main" id="{E2F55AD4-312E-40BE-8405-29F4DBF3C7CD}"/>
+              </a:ext>
+            </a:extLst>
+          </p:cNvPr>
+          <p:cNvSpPr>
+            <a:spLocks noGrp="1"/>
+          </p:cNvSpPr>
+          <p:nvPr/>
+        </p:nvSpPr>
+        <p:spPr>
+          <a:xfrm>
+            <a:off x="704850" y="3771900"/>
+            <a:ext cx="381000" cy="400050"/>
+          </a:xfrm>
+          <a:prstGeom prst="rect">
+            <a:avLst/>
+          </a:prstGeom>
+          <a:noFill/>
+          <a:ln w="0">
+            <a:noFill/>
+          </a:ln>
+        </p:spPr>
+        <p:txBody>
+          <a:bodyPr>
+            <a:noAutofit/>
+          </a:bodyPr>
+          <a:lstStyle/>
+          <a:p>
+            <a:pPr>
+              <a:buNone/>
+              <a:defRPr sz="2025" b="1">
+                <a:solidFill>
+                  <a:srgbClr val="FFFFFF"/>
+                </a:solidFill>
+                <a:latin typeface="PingFang TC"/>
+                <a:ea typeface="PingFang TC"/>
+                <a:cs typeface="PingFang TC"/>
+              </a:defRPr>
+            </a:pPr>
+            <a:r>
+              <a:rPr sz="2025" b="1">
+                <a:solidFill>
+                  <a:srgbClr val="FFFFFF"/>
+                </a:solidFill>
+                <a:latin typeface="PingFang TC"/>
+                <a:ea typeface="PingFang TC"/>
+                <a:cs typeface="PingFang TC"/>
+              </a:rPr>
+              <a:t>2</a:t>
+            </a:r>
+          </a:p>
+        </p:txBody>
+      </p:sp>
+      <p:sp>
+        <p:nvSpPr>
+          <p:cNvPr id="15" name="">
+            <a:extLst>
+              <a:ext uri="{FF2B5EF4-FFF2-40B4-BE49-F238E27FC236}">
+                <a16:creationId xmlns:a16="http://schemas.microsoft.com/office/drawing/2014/main" id="{1CF083D0-1400-4ADC-BBBB-D83170A93F53}"/>
+              </a:ext>
+            </a:extLst>
+          </p:cNvPr>
+          <p:cNvSpPr>
+            <a:spLocks noGrp="1"/>
+          </p:cNvSpPr>
+          <p:nvPr/>
+        </p:nvSpPr>
+        <p:spPr>
+          <a:xfrm>
+            <a:off x="1381125" y="3676650"/>
+            <a:ext cx="3000375" cy="523875"/>
+          </a:xfrm>
+          <a:prstGeom prst="rect">
+            <a:avLst/>
+          </a:prstGeom>
+          <a:noFill/>
+          <a:ln w="0">
+            <a:noFill/>
+          </a:ln>
+        </p:spPr>
+        <p:txBody>
+          <a:bodyPr>
+            <a:noAutofit/>
+          </a:bodyPr>
+          <a:lstStyle/>
+          <a:p>
+            <a:pPr>
+              <a:buNone/>
+              <a:defRPr sz="2550" b="1">
+                <a:solidFill>
+                  <a:srgbClr val="121212"/>
+                </a:solidFill>
+                <a:latin typeface="PingFang TC"/>
+                <a:ea typeface="PingFang TC"/>
+                <a:cs typeface="PingFang TC"/>
+              </a:defRPr>
+            </a:pPr>
+            <a:r>
+              <a:rPr sz="2550" b="1">
+                <a:solidFill>
+                  <a:srgbClr val="121212"/>
+                </a:solidFill>
+                <a:latin typeface="PingFang TC"/>
+                <a:ea typeface="PingFang TC"/>
+                <a:cs typeface="PingFang TC"/>
+              </a:rPr>
+              <a:t>⌘V 貼上、送出</a:t>
+            </a:r>
+          </a:p>
+        </p:txBody>
+      </p:sp>
+      <p:sp>
+        <p:nvSpPr>
+          <p:cNvPr id="16" name="">
+            <a:extLst>
+              <a:ext uri="{FF2B5EF4-FFF2-40B4-BE49-F238E27FC236}">
+                <a16:creationId xmlns:a16="http://schemas.microsoft.com/office/drawing/2014/main" id="{5FF9CB42-8351-4870-83D3-39F83544CE1A}"/>
+              </a:ext>
+            </a:extLst>
+          </p:cNvPr>
+          <p:cNvSpPr>
+            <a:spLocks noGrp="1"/>
+          </p:cNvSpPr>
+          <p:nvPr/>
+        </p:nvSpPr>
+        <p:spPr>
+          <a:xfrm>
+            <a:off x="4695825" y="3581400"/>
+            <a:ext cx="6715125" cy="485775"/>
+          </a:xfrm>
+          <a:prstGeom prst="rect">
+            <a:avLst/>
+          </a:prstGeom>
+          <a:noFill/>
+          <a:ln w="0">
+            <a:noFill/>
+          </a:ln>
+        </p:spPr>
+        <p:txBody>
+          <a:bodyPr>
+            <a:noAutofit/>
+          </a:bodyPr>
+          <a:lstStyle/>
+          <a:p>
+            <a:pPr>
+              <a:buNone/>
+              <a:defRPr sz="2175" b="0">
+                <a:solidFill>
+                  <a:srgbClr val="121212"/>
+                </a:solidFill>
+                <a:latin typeface="PingFang TC"/>
+                <a:ea typeface="PingFang TC"/>
+                <a:cs typeface="PingFang TC"/>
+              </a:defRPr>
+            </a:pPr>
+            <a:r>
+              <a:rPr sz="2175" b="0">
+                <a:solidFill>
+                  <a:srgbClr val="121212"/>
+                </a:solidFill>
+                <a:latin typeface="PingFang TC"/>
+                <a:ea typeface="PingFang TC"/>
+                <a:cs typeface="PingFang TC"/>
+              </a:rPr>
+              <a:t>在工具的輸入框按 ⌘V（Windows：Ctrl+V）</a:t>
+            </a:r>
+          </a:p>
+        </p:txBody>
+      </p:sp>
+      <p:sp>
+        <p:nvSpPr>
+          <p:cNvPr id="17" name="">
+            <a:extLst>
+              <a:ext uri="{FF2B5EF4-FFF2-40B4-BE49-F238E27FC236}">
+                <a16:creationId xmlns:a16="http://schemas.microsoft.com/office/drawing/2014/main" id="{E0780AF1-E146-481C-BBA1-1B66A161CC86}"/>
+              </a:ext>
+            </a:extLst>
+          </p:cNvPr>
+          <p:cNvSpPr>
+            <a:spLocks noGrp="1"/>
+          </p:cNvSpPr>
+          <p:nvPr/>
+        </p:nvSpPr>
+        <p:spPr>
+          <a:xfrm>
+            <a:off x="4695825" y="4057650"/>
+            <a:ext cx="6715125" cy="428625"/>
+          </a:xfrm>
+          <a:prstGeom prst="rect">
+            <a:avLst/>
+          </a:prstGeom>
+          <a:noFill/>
+          <a:ln w="0">
+            <a:noFill/>
+          </a:ln>
+        </p:spPr>
+        <p:txBody>
+          <a:bodyPr>
+            <a:noAutofit/>
+          </a:bodyPr>
+          <a:lstStyle/>
+          <a:p>
+            <a:pPr>
+              <a:buNone/>
+              <a:defRPr sz="1875" b="0">
+                <a:solidFill>
+                  <a:srgbClr val="626262"/>
+                </a:solidFill>
+                <a:latin typeface="PingFang TC"/>
+                <a:ea typeface="PingFang TC"/>
+                <a:cs typeface="PingFang TC"/>
+              </a:defRPr>
+            </a:pPr>
+            <a:r>
+              <a:rPr sz="1875" b="0">
+                <a:solidFill>
+                  <a:srgbClr val="626262"/>
+                </a:solidFill>
+                <a:latin typeface="PingFang TC"/>
+                <a:ea typeface="PingFang TC"/>
+                <a:cs typeface="PingFang TC"/>
+              </a:rPr>
+              <a:t>手機：長按輸入框 → 貼上</a:t>
+            </a:r>
+          </a:p>
+        </p:txBody>
+      </p:sp>
+      <p:sp>
+        <p:nvSpPr>
+          <p:cNvPr id="18" name="">
+            <a:extLst>
+              <a:ext uri="{FF2B5EF4-FFF2-40B4-BE49-F238E27FC236}">
+                <a16:creationId xmlns:a16="http://schemas.microsoft.com/office/drawing/2014/main" id="{65F52A88-2729-4AA8-969A-05036BD3EC9D}"/>
+              </a:ext>
+            </a:extLst>
+          </p:cNvPr>
+          <p:cNvSpPr>
+            <a:spLocks noGrp="1"/>
+          </p:cNvSpPr>
+          <p:nvPr/>
+        </p:nvSpPr>
+        <p:spPr>
+          <a:xfrm>
+            <a:off x="1381125" y="4591050"/>
+            <a:ext cx="10201275" cy="19050"/>
+          </a:xfrm>
+          <a:prstGeom prst="rect">
+            <a:avLst/>
+          </a:prstGeom>
+          <a:solidFill>
+            <a:srgbClr val="D9D5CF"/>
+          </a:solidFill>
+          <a:ln w="0">
+            <a:noFill/>
+          </a:ln>
+        </p:spPr>
+        <p:txBody>
+          <a:bodyPr/>
+          <a:p/>
+        </p:txBody>
+      </p:sp>
+      <p:sp>
+        <p:nvSpPr>
+          <p:cNvPr id="19" name="">
+            <a:extLst>
+              <a:ext uri="{FF2B5EF4-FFF2-40B4-BE49-F238E27FC236}">
+                <a16:creationId xmlns:a16="http://schemas.microsoft.com/office/drawing/2014/main" id="{22A1850A-3AA6-4697-82D3-07C737CCAC4E}"/>
+              </a:ext>
+            </a:extLst>
+          </p:cNvPr>
+          <p:cNvSpPr>
+            <a:spLocks noGrp="1"/>
+          </p:cNvSpPr>
+          <p:nvPr/>
+        </p:nvSpPr>
+        <p:spPr>
+          <a:xfrm>
+            <a:off x="609600" y="4933950"/>
+            <a:ext cx="457200" cy="457200"/>
+          </a:xfrm>
+          <a:prstGeom prst="ellipse">
             <a:avLst/>
           </a:prstGeom>
           <a:solidFill>
@@ -16469,22 +17036,22 @@
       </p:sp>
       <p:sp>
         <p:nvSpPr>
-          <p:cNvPr id="9" name="">
-            <a:extLst>
-              <a:ext uri="{FF2B5EF4-FFF2-40B4-BE49-F238E27FC236}">
-                <a16:creationId xmlns:a16="http://schemas.microsoft.com/office/drawing/2014/main" id="{78612AE4-051D-4B58-90C9-DD2C0CD26416}"/>
-              </a:ext>
-            </a:extLst>
-          </p:cNvPr>
-          <p:cNvSpPr>
-            <a:spLocks noGrp="1"/>
-          </p:cNvSpPr>
-          <p:nvPr/>
-        </p:nvSpPr>
-        <p:spPr>
-          <a:xfrm>
-            <a:off x="904875" y="2590800"/>
-            <a:ext cx="5810250" cy="342900"/>
+          <p:cNvPr id="20" name="">
+            <a:extLst>
+              <a:ext uri="{FF2B5EF4-FFF2-40B4-BE49-F238E27FC236}">
+                <a16:creationId xmlns:a16="http://schemas.microsoft.com/office/drawing/2014/main" id="{6D381400-56EE-4745-832F-98B10DA7CE86}"/>
+              </a:ext>
+            </a:extLst>
+          </p:cNvPr>
+          <p:cNvSpPr>
+            <a:spLocks noGrp="1"/>
+          </p:cNvSpPr>
+          <p:nvPr/>
+        </p:nvSpPr>
+        <p:spPr>
+          <a:xfrm>
+            <a:off x="704850" y="4972050"/>
+            <a:ext cx="381000" cy="400050"/>
           </a:xfrm>
           <a:prstGeom prst="rect">
             <a:avLst/>
@@ -16502,47 +17069,47 @@
           <a:p>
             <a:pPr>
               <a:buNone/>
-              <a:defRPr sz="1500" b="1">
-                <a:solidFill>
-                  <a:srgbClr val="E63946"/>
-                </a:solidFill>
-                <a:latin typeface="PingFang TC"/>
-                <a:ea typeface="PingFang TC"/>
-                <a:cs typeface="PingFang TC"/>
-              </a:defRPr>
-            </a:pPr>
-            <a:r>
-              <a:rPr sz="1500" b="1">
-                <a:solidFill>
-                  <a:srgbClr val="E63946"/>
-                </a:solidFill>
-                <a:latin typeface="PingFang TC"/>
-                <a:ea typeface="PingFang TC"/>
-                <a:cs typeface="PingFang TC"/>
-              </a:rPr>
-              <a:t>問題長這樣（app 已填好，不用打字）</a:t>
-            </a:r>
-          </a:p>
-        </p:txBody>
-      </p:sp>
-      <p:sp>
-        <p:nvSpPr>
-          <p:cNvPr id="10" name="">
-            <a:extLst>
-              <a:ext uri="{FF2B5EF4-FFF2-40B4-BE49-F238E27FC236}">
-                <a16:creationId xmlns:a16="http://schemas.microsoft.com/office/drawing/2014/main" id="{CE7E2415-B7F2-46A0-ABCC-812EFEFB1908}"/>
-              </a:ext>
-            </a:extLst>
-          </p:cNvPr>
-          <p:cNvSpPr>
-            <a:spLocks noGrp="1"/>
-          </p:cNvSpPr>
-          <p:nvPr/>
-        </p:nvSpPr>
-        <p:spPr>
-          <a:xfrm>
-            <a:off x="904875" y="3162300"/>
-            <a:ext cx="5857875" cy="1962150"/>
+              <a:defRPr sz="2025" b="1">
+                <a:solidFill>
+                  <a:srgbClr val="FFFFFF"/>
+                </a:solidFill>
+                <a:latin typeface="PingFang TC"/>
+                <a:ea typeface="PingFang TC"/>
+                <a:cs typeface="PingFang TC"/>
+              </a:defRPr>
+            </a:pPr>
+            <a:r>
+              <a:rPr sz="2025" b="1">
+                <a:solidFill>
+                  <a:srgbClr val="FFFFFF"/>
+                </a:solidFill>
+                <a:latin typeface="PingFang TC"/>
+                <a:ea typeface="PingFang TC"/>
+                <a:cs typeface="PingFang TC"/>
+              </a:rPr>
+              <a:t>3</a:t>
+            </a:r>
+          </a:p>
+        </p:txBody>
+      </p:sp>
+      <p:sp>
+        <p:nvSpPr>
+          <p:cNvPr id="21" name="">
+            <a:extLst>
+              <a:ext uri="{FF2B5EF4-FFF2-40B4-BE49-F238E27FC236}">
+                <a16:creationId xmlns:a16="http://schemas.microsoft.com/office/drawing/2014/main" id="{DFE1E411-0E18-47D7-B903-0FC5796953C8}"/>
+              </a:ext>
+            </a:extLst>
+          </p:cNvPr>
+          <p:cNvSpPr>
+            <a:spLocks noGrp="1"/>
+          </p:cNvSpPr>
+          <p:nvPr/>
+        </p:nvSpPr>
+        <p:spPr>
+          <a:xfrm>
+            <a:off x="1381125" y="4876800"/>
+            <a:ext cx="3000375" cy="523875"/>
           </a:xfrm>
           <a:prstGeom prst="rect">
             <a:avLst/>
@@ -16558,21 +17125,19 @@
           </a:bodyPr>
           <a:lstStyle/>
           <a:p>
-            <a:r>
-              <a:rPr sz="2700" b="1">
+            <a:pPr>
+              <a:buNone/>
+              <a:defRPr sz="2550" b="1">
                 <a:solidFill>
                   <a:srgbClr val="121212"/>
                 </a:solidFill>
                 <a:latin typeface="PingFang TC"/>
                 <a:ea typeface="PingFang TC"/>
                 <a:cs typeface="PingFang TC"/>
-              </a:rPr>
-              <a:t>〔產業〕顧問，我觀察到〔那一句〕</a:t>
-            </a:r>
-          </a:p>
-          <a:p>
-            <a:r>
-              <a:rPr sz="2700" b="1">
+              </a:defRPr>
+            </a:pPr>
+            <a:r>
+              <a:rPr sz="2550" b="1">
                 <a:solidFill>
                   <a:srgbClr val="121212"/>
                 </a:solidFill>
@@ -16580,55 +17145,29 @@
                 <a:ea typeface="PingFang TC"/>
                 <a:cs typeface="PingFang TC"/>
               </a:rPr>
-              <a:t>(1) 誰付錢給誰、多久、多少</a:t>
-            </a:r>
-          </a:p>
-          <a:p>
-            <a:r>
-              <a:rPr sz="2700" b="1">
-                <a:solidFill>
-                  <a:srgbClr val="121212"/>
-                </a:solidFill>
-                <a:latin typeface="PingFang TC"/>
-                <a:ea typeface="PingFang TC"/>
-                <a:cs typeface="PingFang TC"/>
-              </a:rPr>
-              <a:t>(2) 業者最常說的三到五個困難</a:t>
-            </a:r>
-          </a:p>
-          <a:p>
-            <a:r>
-              <a:rPr sz="2700" b="1">
-                <a:solidFill>
-                  <a:srgbClr val="121212"/>
-                </a:solidFill>
-                <a:latin typeface="PingFang TC"/>
-                <a:ea typeface="PingFang TC"/>
-                <a:cs typeface="PingFang TC"/>
-              </a:rPr>
-              <a:t>(3) 現在用什麼撐著、花多少</a:t>
-            </a:r>
-          </a:p>
-        </p:txBody>
-      </p:sp>
-      <p:sp>
-        <p:nvSpPr>
-          <p:cNvPr id="11" name="">
-            <a:extLst>
-              <a:ext uri="{FF2B5EF4-FFF2-40B4-BE49-F238E27FC236}">
-                <a16:creationId xmlns:a16="http://schemas.microsoft.com/office/drawing/2014/main" id="{24799F11-198E-4930-97B7-EF417B4A782E}"/>
-              </a:ext>
-            </a:extLst>
-          </p:cNvPr>
-          <p:cNvSpPr>
-            <a:spLocks noGrp="1"/>
-          </p:cNvSpPr>
-          <p:nvPr/>
-        </p:nvSpPr>
-        <p:spPr>
-          <a:xfrm>
-            <a:off x="7620000" y="2428875"/>
-            <a:ext cx="3790950" cy="438150"/>
+              <a:t>貼回 app</a:t>
+            </a:r>
+          </a:p>
+        </p:txBody>
+      </p:sp>
+      <p:sp>
+        <p:nvSpPr>
+          <p:cNvPr id="22" name="">
+            <a:extLst>
+              <a:ext uri="{FF2B5EF4-FFF2-40B4-BE49-F238E27FC236}">
+                <a16:creationId xmlns:a16="http://schemas.microsoft.com/office/drawing/2014/main" id="{B0C933AB-3307-4C37-8E26-A9F979169F9A}"/>
+              </a:ext>
+            </a:extLst>
+          </p:cNvPr>
+          <p:cNvSpPr>
+            <a:spLocks noGrp="1"/>
+          </p:cNvSpPr>
+          <p:nvPr/>
+        </p:nvSpPr>
+        <p:spPr>
+          <a:xfrm>
+            <a:off x="4695825" y="4781550"/>
+            <a:ext cx="6715125" cy="485775"/>
           </a:xfrm>
           <a:prstGeom prst="rect">
             <a:avLst/>
@@ -16646,47 +17185,47 @@
           <a:p>
             <a:pPr>
               <a:buNone/>
-              <a:defRPr sz="1800" b="1">
-                <a:solidFill>
-                  <a:srgbClr val="E63946"/>
-                </a:solidFill>
-                <a:latin typeface="PingFang TC"/>
-                <a:ea typeface="PingFang TC"/>
-                <a:cs typeface="PingFang TC"/>
-              </a:defRPr>
-            </a:pPr>
-            <a:r>
-              <a:rPr sz="1800" b="1">
-                <a:solidFill>
-                  <a:srgbClr val="E63946"/>
-                </a:solidFill>
-                <a:latin typeface="PingFang TC"/>
-                <a:ea typeface="PingFang TC"/>
-                <a:cs typeface="PingFang TC"/>
-              </a:rPr>
-              <a:t>追問一次</a:t>
-            </a:r>
-          </a:p>
-        </p:txBody>
-      </p:sp>
-      <p:sp>
-        <p:nvSpPr>
-          <p:cNvPr id="12" name="">
-            <a:extLst>
-              <a:ext uri="{FF2B5EF4-FFF2-40B4-BE49-F238E27FC236}">
-                <a16:creationId xmlns:a16="http://schemas.microsoft.com/office/drawing/2014/main" id="{E5A198EC-FC68-4F5C-B41F-E58C672D19AA}"/>
-              </a:ext>
-            </a:extLst>
-          </p:cNvPr>
-          <p:cNvSpPr>
-            <a:spLocks noGrp="1"/>
-          </p:cNvSpPr>
-          <p:nvPr/>
-        </p:nvSpPr>
-        <p:spPr>
-          <a:xfrm>
-            <a:off x="7620000" y="3019425"/>
-            <a:ext cx="3771900" cy="571500"/>
+              <a:defRPr sz="2175" b="0">
+                <a:solidFill>
+                  <a:srgbClr val="121212"/>
+                </a:solidFill>
+                <a:latin typeface="PingFang TC"/>
+                <a:ea typeface="PingFang TC"/>
+                <a:cs typeface="PingFang TC"/>
+              </a:defRPr>
+            </a:pPr>
+            <a:r>
+              <a:rPr sz="2175" b="0">
+                <a:solidFill>
+                  <a:srgbClr val="121212"/>
+                </a:solidFill>
+                <a:latin typeface="PingFang TC"/>
+                <a:ea typeface="PingFang TC"/>
+                <a:cs typeface="PingFang TC"/>
+              </a:rPr>
+              <a:t>把回答貼回卡片下面的框，選來源</a:t>
+            </a:r>
+          </a:p>
+        </p:txBody>
+      </p:sp>
+      <p:sp>
+        <p:nvSpPr>
+          <p:cNvPr id="23" name="">
+            <a:extLst>
+              <a:ext uri="{FF2B5EF4-FFF2-40B4-BE49-F238E27FC236}">
+                <a16:creationId xmlns:a16="http://schemas.microsoft.com/office/drawing/2014/main" id="{E1963D10-9201-4BF7-9F5D-46E0BE45C085}"/>
+              </a:ext>
+            </a:extLst>
+          </p:cNvPr>
+          <p:cNvSpPr>
+            <a:spLocks noGrp="1"/>
+          </p:cNvSpPr>
+          <p:nvPr/>
+        </p:nvSpPr>
+        <p:spPr>
+          <a:xfrm>
+            <a:off x="4695825" y="5257800"/>
+            <a:ext cx="6715125" cy="428625"/>
           </a:xfrm>
           <a:prstGeom prst="rect">
             <a:avLst/>
@@ -16704,159 +17243,9 @@
           <a:p>
             <a:pPr>
               <a:buNone/>
-              <a:defRPr sz="2100" b="1">
-                <a:solidFill>
-                  <a:srgbClr val="121212"/>
-                </a:solidFill>
-                <a:latin typeface="PingFang TC"/>
-                <a:ea typeface="PingFang TC"/>
-                <a:cs typeface="PingFang TC"/>
-              </a:defRPr>
-            </a:pPr>
-            <a:r>
-              <a:rPr sz="2100" b="1">
-                <a:solidFill>
-                  <a:srgbClr val="121212"/>
-                </a:solidFill>
-                <a:latin typeface="PingFang TC"/>
-                <a:ea typeface="PingFang TC"/>
-                <a:cs typeface="PingFang TC"/>
-              </a:rPr>
-              <a:t>哪一個困難是業者最常花錢想解決的？</a:t>
-            </a:r>
-          </a:p>
-        </p:txBody>
-      </p:sp>
-      <p:sp>
-        <p:nvSpPr>
-          <p:cNvPr id="13" name="">
-            <a:extLst>
-              <a:ext uri="{FF2B5EF4-FFF2-40B4-BE49-F238E27FC236}">
-                <a16:creationId xmlns:a16="http://schemas.microsoft.com/office/drawing/2014/main" id="{5964E6F1-EA1D-4F56-BAA8-5C25D5B60944}"/>
-              </a:ext>
-            </a:extLst>
-          </p:cNvPr>
-          <p:cNvSpPr>
-            <a:spLocks noGrp="1"/>
-          </p:cNvSpPr>
-          <p:nvPr/>
-        </p:nvSpPr>
-        <p:spPr>
-          <a:xfrm>
-            <a:off x="7620000" y="3695700"/>
-            <a:ext cx="3810000" cy="19050"/>
-          </a:xfrm>
-          <a:prstGeom prst="rect">
-            <a:avLst/>
-          </a:prstGeom>
-          <a:solidFill>
-            <a:srgbClr val="D9D5CF"/>
-          </a:solidFill>
-          <a:ln w="0">
-            <a:noFill/>
-          </a:ln>
-        </p:spPr>
-        <p:txBody>
-          <a:bodyPr/>
-          <a:p/>
-        </p:txBody>
-      </p:sp>
-      <p:sp>
-        <p:nvSpPr>
-          <p:cNvPr id="14" name="">
-            <a:extLst>
-              <a:ext uri="{FF2B5EF4-FFF2-40B4-BE49-F238E27FC236}">
-                <a16:creationId xmlns:a16="http://schemas.microsoft.com/office/drawing/2014/main" id="{B1313E54-D23D-4157-9535-75F603A09CB7}"/>
-              </a:ext>
-            </a:extLst>
-          </p:cNvPr>
-          <p:cNvSpPr>
-            <a:spLocks noGrp="1"/>
-          </p:cNvSpPr>
-          <p:nvPr/>
-        </p:nvSpPr>
-        <p:spPr>
-          <a:xfrm>
-            <a:off x="7620000" y="3990975"/>
-            <a:ext cx="3781425" cy="1104900"/>
-          </a:xfrm>
-          <a:prstGeom prst="rect">
-            <a:avLst/>
-          </a:prstGeom>
-          <a:noFill/>
-          <a:ln w="0">
-            <a:noFill/>
-          </a:ln>
-        </p:spPr>
-        <p:txBody>
-          <a:bodyPr>
-            <a:noAutofit/>
-          </a:bodyPr>
-          <a:lstStyle/>
-          <a:p>
-            <a:pPr>
-              <a:buNone/>
-              <a:defRPr sz="2100" b="0">
-                <a:solidFill>
-                  <a:srgbClr val="121212"/>
-                </a:solidFill>
-                <a:latin typeface="PingFang TC"/>
-                <a:ea typeface="PingFang TC"/>
-                <a:cs typeface="PingFang TC"/>
-              </a:defRPr>
-            </a:pPr>
-            <a:r>
-              <a:rPr sz="2100" b="0">
-                <a:solidFill>
-                  <a:srgbClr val="121212"/>
-                </a:solidFill>
-                <a:latin typeface="PingFang TC"/>
-                <a:ea typeface="PingFang TC"/>
-                <a:cs typeface="PingFang TC"/>
-              </a:rPr>
-              <a:t>數字寫出處或標「估計」</a:t>
-            </a:r>
-          </a:p>
-        </p:txBody>
-      </p:sp>
-      <p:sp>
-        <p:nvSpPr>
-          <p:cNvPr id="15" name="">
-            <a:extLst>
-              <a:ext uri="{FF2B5EF4-FFF2-40B4-BE49-F238E27FC236}">
-                <a16:creationId xmlns:a16="http://schemas.microsoft.com/office/drawing/2014/main" id="{4E31BAE5-9506-44AE-9F47-956A8D560815}"/>
-              </a:ext>
-            </a:extLst>
-          </p:cNvPr>
-          <p:cNvSpPr>
-            <a:spLocks noGrp="1"/>
-          </p:cNvSpPr>
-          <p:nvPr/>
-        </p:nvSpPr>
-        <p:spPr>
-          <a:xfrm>
-            <a:off x="609600" y="5638800"/>
-            <a:ext cx="10715625" cy="495300"/>
-          </a:xfrm>
-          <a:prstGeom prst="rect">
-            <a:avLst/>
-          </a:prstGeom>
-          <a:noFill/>
-          <a:ln w="0">
-            <a:noFill/>
-          </a:ln>
-        </p:spPr>
-        <p:txBody>
-          <a:bodyPr>
-            <a:noAutofit/>
-          </a:bodyPr>
-          <a:lstStyle/>
-          <a:p>
-            <a:pPr>
-              <a:buNone/>
               <a:defRPr sz="1875" b="0">
                 <a:solidFill>
-                  <a:srgbClr val="1D3A5F"/>
+                  <a:srgbClr val="626262"/>
                 </a:solidFill>
                 <a:latin typeface="PingFang TC"/>
                 <a:ea typeface="PingFang TC"/>
@@ -16866,13 +17255,13 @@
             <a:r>
               <a:rPr sz="1875" b="0">
                 <a:solidFill>
-                  <a:srgbClr val="1D3A5F"/>
-                </a:solidFill>
-                <a:latin typeface="PingFang TC"/>
-                <a:ea typeface="PingFang TC"/>
-                <a:cs typeface="PingFang TC"/>
-              </a:rPr>
-              <a:t>貼回卡 1，來源選「Gemini 說」或「GPT 說」。先存，再做卡 2。</a:t>
+                  <a:srgbClr val="626262"/>
+                </a:solidFill>
+                <a:latin typeface="PingFang TC"/>
+                <a:ea typeface="PingFang TC"/>
+                <a:cs typeface="PingFang TC"/>
+              </a:rPr>
+              <a:t>有數字的句子寫出處或「估計」</a:t>
             </a:r>
           </a:p>
         </p:txBody>
@@ -16904,10 +17293,10 @@
       <p:grpSpPr/>
       <p:sp>
         <p:nvSpPr>
-          <p:cNvPr id="24" name="">
-            <a:extLst>
-              <a:ext uri="{FF2B5EF4-FFF2-40B4-BE49-F238E27FC236}">
-                <a16:creationId xmlns:a16="http://schemas.microsoft.com/office/drawing/2014/main" id="{894198F7-83D4-49B9-B014-ED1938DE842A}"/>
+          <p:cNvPr id="16" name="">
+            <a:extLst>
+              <a:ext uri="{FF2B5EF4-FFF2-40B4-BE49-F238E27FC236}">
+                <a16:creationId xmlns:a16="http://schemas.microsoft.com/office/drawing/2014/main" id="{5BB8D3BC-6F9C-4FF6-9408-22B5502B82D8}"/>
               </a:ext>
             </a:extLst>
           </p:cNvPr>
@@ -16965,7 +17354,7 @@
           <p:cNvPr id="2" name="">
             <a:extLst>
               <a:ext uri="{FF2B5EF4-FFF2-40B4-BE49-F238E27FC236}">
-                <a16:creationId xmlns:a16="http://schemas.microsoft.com/office/drawing/2014/main" id="{377D4656-B699-4AD3-93C2-8029CD16F4A6}"/>
+                <a16:creationId xmlns:a16="http://schemas.microsoft.com/office/drawing/2014/main" id="{ECDE94B8-638C-45EE-88C9-E792C8FC43C7}"/>
               </a:ext>
             </a:extLst>
           </p:cNvPr>
@@ -17013,7 +17402,7 @@
                 <a:ea typeface="PingFang TC"/>
                 <a:cs typeface="PingFang TC"/>
               </a:rPr>
-              <a:t>卡 2 NotebookLM 查證：老師帶著做一次</a:t>
+              <a:t>卡 1 問 AI：這一行的錢流與困難</a:t>
             </a:r>
           </a:p>
         </p:txBody>
@@ -17023,7 +17412,7 @@
           <p:cNvPr id="3" name="">
             <a:extLst>
               <a:ext uri="{FF2B5EF4-FFF2-40B4-BE49-F238E27FC236}">
-                <a16:creationId xmlns:a16="http://schemas.microsoft.com/office/drawing/2014/main" id="{0594E1D1-B418-4737-B5F9-AECD926DA88B}"/>
+                <a16:creationId xmlns:a16="http://schemas.microsoft.com/office/drawing/2014/main" id="{DACACF9F-5FEB-48CE-B65C-931C79168A18}"/>
               </a:ext>
             </a:extLst>
           </p:cNvPr>
@@ -17071,7 +17460,7 @@
                 <a:ea typeface="PingFang TC"/>
                 <a:cs typeface="PingFang TC"/>
               </a:rPr>
-              <a:t>這張卡只能用 NotebookLM；每一點後面留（來源：XX）</a:t>
+              <a:t>按「複製問題、開我的 AI 工具」，貼上送出；Gemini、ChatGPT、Claude、Copilot 都行</a:t>
             </a:r>
           </a:p>
         </p:txBody>
@@ -17081,7 +17470,7 @@
           <p:cNvPr id="4" name="">
             <a:extLst>
               <a:ext uri="{FF2B5EF4-FFF2-40B4-BE49-F238E27FC236}">
-                <a16:creationId xmlns:a16="http://schemas.microsoft.com/office/drawing/2014/main" id="{B30CD637-8467-4304-A625-2AEECA5B0D85}"/>
+                <a16:creationId xmlns:a16="http://schemas.microsoft.com/office/drawing/2014/main" id="{6B18BBCC-0F37-4529-8B9C-0F6B5ADCE388}"/>
               </a:ext>
             </a:extLst>
           </p:cNvPr>
@@ -17115,7 +17504,7 @@
           <p:cNvPr id="5" name="">
             <a:extLst>
               <a:ext uri="{FF2B5EF4-FFF2-40B4-BE49-F238E27FC236}">
-                <a16:creationId xmlns:a16="http://schemas.microsoft.com/office/drawing/2014/main" id="{98C4DF5D-D4B6-4E69-BC4A-E5C5908A2BED}"/>
+                <a16:creationId xmlns:a16="http://schemas.microsoft.com/office/drawing/2014/main" id="{87DC4C18-141E-42C6-965D-54526F9A5CB3}"/>
               </a:ext>
             </a:extLst>
           </p:cNvPr>
@@ -17173,7 +17562,7 @@
           <p:cNvPr id="6" name="">
             <a:extLst>
               <a:ext uri="{FF2B5EF4-FFF2-40B4-BE49-F238E27FC236}">
-                <a16:creationId xmlns:a16="http://schemas.microsoft.com/office/drawing/2014/main" id="{16930E8F-383A-4F8D-A549-AC52ED848497}"/>
+                <a16:creationId xmlns:a16="http://schemas.microsoft.com/office/drawing/2014/main" id="{B279D397-E385-497D-A18F-C21B86E8D38A}"/>
               </a:ext>
             </a:extLst>
           </p:cNvPr>
@@ -17221,7 +17610,7 @@
                 <a:ea typeface="PingFang TC"/>
                 <a:cs typeface="PingFang TC"/>
               </a:rPr>
-              <a:t>15 / 22</a:t>
+              <a:t>15 / 23</a:t>
             </a:r>
           </a:p>
         </p:txBody>
@@ -17231,25 +17620,25 @@
           <p:cNvPr id="7" name="">
             <a:extLst>
               <a:ext uri="{FF2B5EF4-FFF2-40B4-BE49-F238E27FC236}">
-                <a16:creationId xmlns:a16="http://schemas.microsoft.com/office/drawing/2014/main" id="{DE9E04D7-6B3D-4F5C-A3A9-6A8A9E4572BB}"/>
-              </a:ext>
-            </a:extLst>
-          </p:cNvPr>
-          <p:cNvSpPr>
-            <a:spLocks noGrp="1"/>
-          </p:cNvSpPr>
-          <p:nvPr/>
-        </p:nvSpPr>
-        <p:spPr>
-          <a:xfrm>
-            <a:off x="609600" y="2533650"/>
-            <a:ext cx="457200" cy="457200"/>
-          </a:xfrm>
-          <a:prstGeom prst="ellipse">
+                <a16:creationId xmlns:a16="http://schemas.microsoft.com/office/drawing/2014/main" id="{9BFE61CC-952C-4C65-A7AE-3F920868120B}"/>
+              </a:ext>
+            </a:extLst>
+          </p:cNvPr>
+          <p:cNvSpPr>
+            <a:spLocks noGrp="1"/>
+          </p:cNvSpPr>
+          <p:nvPr/>
+        </p:nvSpPr>
+        <p:spPr>
+          <a:xfrm>
+            <a:off x="609600" y="2390775"/>
+            <a:ext cx="6429375" cy="3019425"/>
+          </a:xfrm>
+          <a:prstGeom prst="rect">
             <a:avLst/>
           </a:prstGeom>
           <a:solidFill>
-            <a:srgbClr val="1D3A5F"/>
+            <a:srgbClr val="FFFFFF"/>
           </a:solidFill>
           <a:ln w="0">
             <a:noFill/>
@@ -17265,19 +17654,53 @@
           <p:cNvPr id="8" name="">
             <a:extLst>
               <a:ext uri="{FF2B5EF4-FFF2-40B4-BE49-F238E27FC236}">
-                <a16:creationId xmlns:a16="http://schemas.microsoft.com/office/drawing/2014/main" id="{2EC9061A-3CF6-412B-9BE4-5AEB8ACEC2B4}"/>
-              </a:ext>
-            </a:extLst>
-          </p:cNvPr>
-          <p:cNvSpPr>
-            <a:spLocks noGrp="1"/>
-          </p:cNvSpPr>
-          <p:nvPr/>
-        </p:nvSpPr>
-        <p:spPr>
-          <a:xfrm>
-            <a:off x="704850" y="2571750"/>
-            <a:ext cx="381000" cy="400050"/>
+                <a16:creationId xmlns:a16="http://schemas.microsoft.com/office/drawing/2014/main" id="{487147BF-0043-4F18-8B38-7B983C2F57C9}"/>
+              </a:ext>
+            </a:extLst>
+          </p:cNvPr>
+          <p:cNvSpPr>
+            <a:spLocks noGrp="1"/>
+          </p:cNvSpPr>
+          <p:nvPr/>
+        </p:nvSpPr>
+        <p:spPr>
+          <a:xfrm>
+            <a:off x="609600" y="2390775"/>
+            <a:ext cx="66675" cy="3019425"/>
+          </a:xfrm>
+          <a:prstGeom prst="rect">
+            <a:avLst/>
+          </a:prstGeom>
+          <a:solidFill>
+            <a:srgbClr val="E63946"/>
+          </a:solidFill>
+          <a:ln w="0">
+            <a:noFill/>
+          </a:ln>
+        </p:spPr>
+        <p:txBody>
+          <a:bodyPr/>
+          <a:p/>
+        </p:txBody>
+      </p:sp>
+      <p:sp>
+        <p:nvSpPr>
+          <p:cNvPr id="9" name="">
+            <a:extLst>
+              <a:ext uri="{FF2B5EF4-FFF2-40B4-BE49-F238E27FC236}">
+                <a16:creationId xmlns:a16="http://schemas.microsoft.com/office/drawing/2014/main" id="{78612AE4-051D-4B58-90C9-DD2C0CD26416}"/>
+              </a:ext>
+            </a:extLst>
+          </p:cNvPr>
+          <p:cNvSpPr>
+            <a:spLocks noGrp="1"/>
+          </p:cNvSpPr>
+          <p:nvPr/>
+        </p:nvSpPr>
+        <p:spPr>
+          <a:xfrm>
+            <a:off x="904875" y="2590800"/>
+            <a:ext cx="5810250" cy="342900"/>
           </a:xfrm>
           <a:prstGeom prst="rect">
             <a:avLst/>
@@ -17295,47 +17718,47 @@
           <a:p>
             <a:pPr>
               <a:buNone/>
-              <a:defRPr sz="2025" b="1">
-                <a:solidFill>
-                  <a:srgbClr val="FFFFFF"/>
-                </a:solidFill>
-                <a:latin typeface="PingFang TC"/>
-                <a:ea typeface="PingFang TC"/>
-                <a:cs typeface="PingFang TC"/>
-              </a:defRPr>
-            </a:pPr>
-            <a:r>
-              <a:rPr sz="2025" b="1">
-                <a:solidFill>
-                  <a:srgbClr val="FFFFFF"/>
-                </a:solidFill>
-                <a:latin typeface="PingFang TC"/>
-                <a:ea typeface="PingFang TC"/>
-                <a:cs typeface="PingFang TC"/>
-              </a:rPr>
-              <a:t>1</a:t>
-            </a:r>
-          </a:p>
-        </p:txBody>
-      </p:sp>
-      <p:sp>
-        <p:nvSpPr>
-          <p:cNvPr id="9" name="">
-            <a:extLst>
-              <a:ext uri="{FF2B5EF4-FFF2-40B4-BE49-F238E27FC236}">
-                <a16:creationId xmlns:a16="http://schemas.microsoft.com/office/drawing/2014/main" id="{0599EA4C-FF67-4BCA-A109-6A5B6DE43B0A}"/>
-              </a:ext>
-            </a:extLst>
-          </p:cNvPr>
-          <p:cNvSpPr>
-            <a:spLocks noGrp="1"/>
-          </p:cNvSpPr>
-          <p:nvPr/>
-        </p:nvSpPr>
-        <p:spPr>
-          <a:xfrm>
-            <a:off x="1381125" y="2476500"/>
-            <a:ext cx="3000375" cy="523875"/>
+              <a:defRPr sz="1500" b="1">
+                <a:solidFill>
+                  <a:srgbClr val="E63946"/>
+                </a:solidFill>
+                <a:latin typeface="PingFang TC"/>
+                <a:ea typeface="PingFang TC"/>
+                <a:cs typeface="PingFang TC"/>
+              </a:defRPr>
+            </a:pPr>
+            <a:r>
+              <a:rPr sz="1500" b="1">
+                <a:solidFill>
+                  <a:srgbClr val="E63946"/>
+                </a:solidFill>
+                <a:latin typeface="PingFang TC"/>
+                <a:ea typeface="PingFang TC"/>
+                <a:cs typeface="PingFang TC"/>
+              </a:rPr>
+              <a:t>問題長這樣（app 已填好，不用打字）</a:t>
+            </a:r>
+          </a:p>
+        </p:txBody>
+      </p:sp>
+      <p:sp>
+        <p:nvSpPr>
+          <p:cNvPr id="10" name="">
+            <a:extLst>
+              <a:ext uri="{FF2B5EF4-FFF2-40B4-BE49-F238E27FC236}">
+                <a16:creationId xmlns:a16="http://schemas.microsoft.com/office/drawing/2014/main" id="{CE7E2415-B7F2-46A0-ABCC-812EFEFB1908}"/>
+              </a:ext>
+            </a:extLst>
+          </p:cNvPr>
+          <p:cNvSpPr>
+            <a:spLocks noGrp="1"/>
+          </p:cNvSpPr>
+          <p:nvPr/>
+        </p:nvSpPr>
+        <p:spPr>
+          <a:xfrm>
+            <a:off x="904875" y="3162300"/>
+            <a:ext cx="5857875" cy="1962150"/>
           </a:xfrm>
           <a:prstGeom prst="rect">
             <a:avLst/>
@@ -17351,19 +17774,21 @@
           </a:bodyPr>
           <a:lstStyle/>
           <a:p>
-            <a:pPr>
-              <a:buNone/>
-              <a:defRPr sz="2550" b="1">
+            <a:r>
+              <a:rPr sz="2700" b="1">
                 <a:solidFill>
                   <a:srgbClr val="121212"/>
                 </a:solidFill>
                 <a:latin typeface="PingFang TC"/>
                 <a:ea typeface="PingFang TC"/>
                 <a:cs typeface="PingFang TC"/>
-              </a:defRPr>
-            </a:pPr>
-            <a:r>
-              <a:rPr sz="2550" b="1">
+              </a:rPr>
+              <a:t>〔產業〕顧問，我觀察到〔那一句〕</a:t>
+            </a:r>
+          </a:p>
+          <a:p>
+            <a:r>
+              <a:rPr sz="2700" b="1">
                 <a:solidFill>
                   <a:srgbClr val="121212"/>
                 </a:solidFill>
@@ -17371,29 +17796,55 @@
                 <a:ea typeface="PingFang TC"/>
                 <a:cs typeface="PingFang TC"/>
               </a:rPr>
-              <a:t>新建筆記本</a:t>
-            </a:r>
-          </a:p>
-        </p:txBody>
-      </p:sp>
-      <p:sp>
-        <p:nvSpPr>
-          <p:cNvPr id="10" name="">
-            <a:extLst>
-              <a:ext uri="{FF2B5EF4-FFF2-40B4-BE49-F238E27FC236}">
-                <a16:creationId xmlns:a16="http://schemas.microsoft.com/office/drawing/2014/main" id="{33F4DD03-9A6F-467F-A735-75DA093A6128}"/>
-              </a:ext>
-            </a:extLst>
-          </p:cNvPr>
-          <p:cNvSpPr>
-            <a:spLocks noGrp="1"/>
-          </p:cNvSpPr>
-          <p:nvPr/>
-        </p:nvSpPr>
-        <p:spPr>
-          <a:xfrm>
-            <a:off x="4695825" y="2381250"/>
-            <a:ext cx="6715125" cy="485775"/>
+              <a:t>(1) 誰付錢給誰、多久、多少</a:t>
+            </a:r>
+          </a:p>
+          <a:p>
+            <a:r>
+              <a:rPr sz="2700" b="1">
+                <a:solidFill>
+                  <a:srgbClr val="121212"/>
+                </a:solidFill>
+                <a:latin typeface="PingFang TC"/>
+                <a:ea typeface="PingFang TC"/>
+                <a:cs typeface="PingFang TC"/>
+              </a:rPr>
+              <a:t>(2) 業者最常說的三到五個困難</a:t>
+            </a:r>
+          </a:p>
+          <a:p>
+            <a:r>
+              <a:rPr sz="2700" b="1">
+                <a:solidFill>
+                  <a:srgbClr val="121212"/>
+                </a:solidFill>
+                <a:latin typeface="PingFang TC"/>
+                <a:ea typeface="PingFang TC"/>
+                <a:cs typeface="PingFang TC"/>
+              </a:rPr>
+              <a:t>(3) 現在用什麼撐著、花多少</a:t>
+            </a:r>
+          </a:p>
+        </p:txBody>
+      </p:sp>
+      <p:sp>
+        <p:nvSpPr>
+          <p:cNvPr id="11" name="">
+            <a:extLst>
+              <a:ext uri="{FF2B5EF4-FFF2-40B4-BE49-F238E27FC236}">
+                <a16:creationId xmlns:a16="http://schemas.microsoft.com/office/drawing/2014/main" id="{24799F11-198E-4930-97B7-EF417B4A782E}"/>
+              </a:ext>
+            </a:extLst>
+          </p:cNvPr>
+          <p:cNvSpPr>
+            <a:spLocks noGrp="1"/>
+          </p:cNvSpPr>
+          <p:nvPr/>
+        </p:nvSpPr>
+        <p:spPr>
+          <a:xfrm>
+            <a:off x="7620000" y="2428875"/>
+            <a:ext cx="3790950" cy="438150"/>
           </a:xfrm>
           <a:prstGeom prst="rect">
             <a:avLst/>
@@ -17411,47 +17862,47 @@
           <a:p>
             <a:pPr>
               <a:buNone/>
-              <a:defRPr sz="2175" b="0">
-                <a:solidFill>
-                  <a:srgbClr val="121212"/>
-                </a:solidFill>
-                <a:latin typeface="PingFang TC"/>
-                <a:ea typeface="PingFang TC"/>
-                <a:cs typeface="PingFang TC"/>
-              </a:defRPr>
-            </a:pPr>
-            <a:r>
-              <a:rPr sz="2175" b="0">
-                <a:solidFill>
-                  <a:srgbClr val="121212"/>
-                </a:solidFill>
-                <a:latin typeface="PingFang TC"/>
-                <a:ea typeface="PingFang TC"/>
-                <a:cs typeface="PingFang TC"/>
-              </a:rPr>
-              <a:t>notebooklm.google.com → 新建</a:t>
-            </a:r>
-          </a:p>
-        </p:txBody>
-      </p:sp>
-      <p:sp>
-        <p:nvSpPr>
-          <p:cNvPr id="11" name="">
-            <a:extLst>
-              <a:ext uri="{FF2B5EF4-FFF2-40B4-BE49-F238E27FC236}">
-                <a16:creationId xmlns:a16="http://schemas.microsoft.com/office/drawing/2014/main" id="{D0ABE812-9CCE-4771-B793-DEEF63DB334E}"/>
-              </a:ext>
-            </a:extLst>
-          </p:cNvPr>
-          <p:cNvSpPr>
-            <a:spLocks noGrp="1"/>
-          </p:cNvSpPr>
-          <p:nvPr/>
-        </p:nvSpPr>
-        <p:spPr>
-          <a:xfrm>
-            <a:off x="4695825" y="2857500"/>
-            <a:ext cx="6715125" cy="428625"/>
+              <a:defRPr sz="1800" b="1">
+                <a:solidFill>
+                  <a:srgbClr val="E63946"/>
+                </a:solidFill>
+                <a:latin typeface="PingFang TC"/>
+                <a:ea typeface="PingFang TC"/>
+                <a:cs typeface="PingFang TC"/>
+              </a:defRPr>
+            </a:pPr>
+            <a:r>
+              <a:rPr sz="1800" b="1">
+                <a:solidFill>
+                  <a:srgbClr val="E63946"/>
+                </a:solidFill>
+                <a:latin typeface="PingFang TC"/>
+                <a:ea typeface="PingFang TC"/>
+                <a:cs typeface="PingFang TC"/>
+              </a:rPr>
+              <a:t>追問一次（也是 ⌘V 貼上）</a:t>
+            </a:r>
+          </a:p>
+        </p:txBody>
+      </p:sp>
+      <p:sp>
+        <p:nvSpPr>
+          <p:cNvPr id="12" name="">
+            <a:extLst>
+              <a:ext uri="{FF2B5EF4-FFF2-40B4-BE49-F238E27FC236}">
+                <a16:creationId xmlns:a16="http://schemas.microsoft.com/office/drawing/2014/main" id="{E5A198EC-FC68-4F5C-B41F-E58C672D19AA}"/>
+              </a:ext>
+            </a:extLst>
+          </p:cNvPr>
+          <p:cNvSpPr>
+            <a:spLocks noGrp="1"/>
+          </p:cNvSpPr>
+          <p:nvPr/>
+        </p:nvSpPr>
+        <p:spPr>
+          <a:xfrm>
+            <a:off x="7620000" y="3019425"/>
+            <a:ext cx="3771900" cy="571500"/>
           </a:xfrm>
           <a:prstGeom prst="rect">
             <a:avLst/>
@@ -17469,47 +17920,47 @@
           <a:p>
             <a:pPr>
               <a:buNone/>
-              <a:defRPr sz="1875" b="0">
-                <a:solidFill>
-                  <a:srgbClr val="626262"/>
-                </a:solidFill>
-                <a:latin typeface="PingFang TC"/>
-                <a:ea typeface="PingFang TC"/>
-                <a:cs typeface="PingFang TC"/>
-              </a:defRPr>
-            </a:pPr>
-            <a:r>
-              <a:rPr sz="1875" b="0">
-                <a:solidFill>
-                  <a:srgbClr val="626262"/>
-                </a:solidFill>
-                <a:latin typeface="PingFang TC"/>
-                <a:ea typeface="PingFang TC"/>
-                <a:cs typeface="PingFang TC"/>
-              </a:rPr>
-              <a:t>取名「〔產業〕研究」</a:t>
-            </a:r>
-          </a:p>
-        </p:txBody>
-      </p:sp>
-      <p:sp>
-        <p:nvSpPr>
-          <p:cNvPr id="12" name="">
-            <a:extLst>
-              <a:ext uri="{FF2B5EF4-FFF2-40B4-BE49-F238E27FC236}">
-                <a16:creationId xmlns:a16="http://schemas.microsoft.com/office/drawing/2014/main" id="{6CFEF638-4578-4E18-A983-2CD7BBECE664}"/>
-              </a:ext>
-            </a:extLst>
-          </p:cNvPr>
-          <p:cNvSpPr>
-            <a:spLocks noGrp="1"/>
-          </p:cNvSpPr>
-          <p:nvPr/>
-        </p:nvSpPr>
-        <p:spPr>
-          <a:xfrm>
-            <a:off x="1381125" y="3390900"/>
-            <a:ext cx="10201275" cy="19050"/>
+              <a:defRPr sz="2100" b="1">
+                <a:solidFill>
+                  <a:srgbClr val="121212"/>
+                </a:solidFill>
+                <a:latin typeface="PingFang TC"/>
+                <a:ea typeface="PingFang TC"/>
+                <a:cs typeface="PingFang TC"/>
+              </a:defRPr>
+            </a:pPr>
+            <a:r>
+              <a:rPr sz="2100" b="1">
+                <a:solidFill>
+                  <a:srgbClr val="121212"/>
+                </a:solidFill>
+                <a:latin typeface="PingFang TC"/>
+                <a:ea typeface="PingFang TC"/>
+                <a:cs typeface="PingFang TC"/>
+              </a:rPr>
+              <a:t>哪一個困難是業者最常花錢想解決的？</a:t>
+            </a:r>
+          </a:p>
+        </p:txBody>
+      </p:sp>
+      <p:sp>
+        <p:nvSpPr>
+          <p:cNvPr id="13" name="">
+            <a:extLst>
+              <a:ext uri="{FF2B5EF4-FFF2-40B4-BE49-F238E27FC236}">
+                <a16:creationId xmlns:a16="http://schemas.microsoft.com/office/drawing/2014/main" id="{5964E6F1-EA1D-4F56-BAA8-5C25D5B60944}"/>
+              </a:ext>
+            </a:extLst>
+          </p:cNvPr>
+          <p:cNvSpPr>
+            <a:spLocks noGrp="1"/>
+          </p:cNvSpPr>
+          <p:nvPr/>
+        </p:nvSpPr>
+        <p:spPr>
+          <a:xfrm>
+            <a:off x="7620000" y="3695700"/>
+            <a:ext cx="3810000" cy="19050"/>
           </a:xfrm>
           <a:prstGeom prst="rect">
             <a:avLst/>
@@ -17528,56 +17979,22 @@
       </p:sp>
       <p:sp>
         <p:nvSpPr>
-          <p:cNvPr id="13" name="">
-            <a:extLst>
-              <a:ext uri="{FF2B5EF4-FFF2-40B4-BE49-F238E27FC236}">
-                <a16:creationId xmlns:a16="http://schemas.microsoft.com/office/drawing/2014/main" id="{88DEDAB4-3410-4DFB-B45E-21093285DC29}"/>
-              </a:ext>
-            </a:extLst>
-          </p:cNvPr>
-          <p:cNvSpPr>
-            <a:spLocks noGrp="1"/>
-          </p:cNvSpPr>
-          <p:nvPr/>
-        </p:nvSpPr>
-        <p:spPr>
-          <a:xfrm>
-            <a:off x="609600" y="3733800"/>
-            <a:ext cx="457200" cy="457200"/>
-          </a:xfrm>
-          <a:prstGeom prst="ellipse">
-            <a:avLst/>
-          </a:prstGeom>
-          <a:solidFill>
-            <a:srgbClr val="1D3A5F"/>
-          </a:solidFill>
-          <a:ln w="0">
-            <a:noFill/>
-          </a:ln>
-        </p:spPr>
-        <p:txBody>
-          <a:bodyPr/>
-          <a:p/>
-        </p:txBody>
-      </p:sp>
-      <p:sp>
-        <p:nvSpPr>
           <p:cNvPr id="14" name="">
             <a:extLst>
               <a:ext uri="{FF2B5EF4-FFF2-40B4-BE49-F238E27FC236}">
-                <a16:creationId xmlns:a16="http://schemas.microsoft.com/office/drawing/2014/main" id="{E2F55AD4-312E-40BE-8405-29F4DBF3C7CD}"/>
-              </a:ext>
-            </a:extLst>
-          </p:cNvPr>
-          <p:cNvSpPr>
-            <a:spLocks noGrp="1"/>
-          </p:cNvSpPr>
-          <p:nvPr/>
-        </p:nvSpPr>
-        <p:spPr>
-          <a:xfrm>
-            <a:off x="704850" y="3771900"/>
-            <a:ext cx="381000" cy="400050"/>
+                <a16:creationId xmlns:a16="http://schemas.microsoft.com/office/drawing/2014/main" id="{B1313E54-D23D-4157-9535-75F603A09CB7}"/>
+              </a:ext>
+            </a:extLst>
+          </p:cNvPr>
+          <p:cNvSpPr>
+            <a:spLocks noGrp="1"/>
+          </p:cNvSpPr>
+          <p:nvPr/>
+        </p:nvSpPr>
+        <p:spPr>
+          <a:xfrm>
+            <a:off x="7620000" y="3990975"/>
+            <a:ext cx="3781425" cy="1104900"/>
           </a:xfrm>
           <a:prstGeom prst="rect">
             <a:avLst/>
@@ -17595,25 +18012,25 @@
           <a:p>
             <a:pPr>
               <a:buNone/>
-              <a:defRPr sz="2025" b="1">
-                <a:solidFill>
-                  <a:srgbClr val="FFFFFF"/>
-                </a:solidFill>
-                <a:latin typeface="PingFang TC"/>
-                <a:ea typeface="PingFang TC"/>
-                <a:cs typeface="PingFang TC"/>
-              </a:defRPr>
-            </a:pPr>
-            <a:r>
-              <a:rPr sz="2025" b="1">
-                <a:solidFill>
-                  <a:srgbClr val="FFFFFF"/>
-                </a:solidFill>
-                <a:latin typeface="PingFang TC"/>
-                <a:ea typeface="PingFang TC"/>
-                <a:cs typeface="PingFang TC"/>
-              </a:rPr>
-              <a:t>2</a:t>
+              <a:defRPr sz="2100" b="0">
+                <a:solidFill>
+                  <a:srgbClr val="121212"/>
+                </a:solidFill>
+                <a:latin typeface="PingFang TC"/>
+                <a:ea typeface="PingFang TC"/>
+                <a:cs typeface="PingFang TC"/>
+              </a:defRPr>
+            </a:pPr>
+            <a:r>
+              <a:rPr sz="2100" b="0">
+                <a:solidFill>
+                  <a:srgbClr val="121212"/>
+                </a:solidFill>
+                <a:latin typeface="PingFang TC"/>
+                <a:ea typeface="PingFang TC"/>
+                <a:cs typeface="PingFang TC"/>
+              </a:rPr>
+              <a:t>數字寫出處或標「估計」</a:t>
             </a:r>
           </a:p>
         </p:txBody>
@@ -17623,19 +18040,19 @@
           <p:cNvPr id="15" name="">
             <a:extLst>
               <a:ext uri="{FF2B5EF4-FFF2-40B4-BE49-F238E27FC236}">
-                <a16:creationId xmlns:a16="http://schemas.microsoft.com/office/drawing/2014/main" id="{1CF083D0-1400-4ADC-BBBB-D83170A93F53}"/>
-              </a:ext>
-            </a:extLst>
-          </p:cNvPr>
-          <p:cNvSpPr>
-            <a:spLocks noGrp="1"/>
-          </p:cNvSpPr>
-          <p:nvPr/>
-        </p:nvSpPr>
-        <p:spPr>
-          <a:xfrm>
-            <a:off x="1381125" y="3676650"/>
-            <a:ext cx="3000375" cy="523875"/>
+                <a16:creationId xmlns:a16="http://schemas.microsoft.com/office/drawing/2014/main" id="{4E31BAE5-9506-44AE-9F47-956A8D560815}"/>
+              </a:ext>
+            </a:extLst>
+          </p:cNvPr>
+          <p:cNvSpPr>
+            <a:spLocks noGrp="1"/>
+          </p:cNvSpPr>
+          <p:nvPr/>
+        </p:nvSpPr>
+        <p:spPr>
+          <a:xfrm>
+            <a:off x="609600" y="5638800"/>
+            <a:ext cx="10715625" cy="495300"/>
           </a:xfrm>
           <a:prstGeom prst="rect">
             <a:avLst/>
@@ -17653,125 +18070,9 @@
           <a:p>
             <a:pPr>
               <a:buNone/>
-              <a:defRPr sz="2550" b="1">
-                <a:solidFill>
-                  <a:srgbClr val="121212"/>
-                </a:solidFill>
-                <a:latin typeface="PingFang TC"/>
-                <a:ea typeface="PingFang TC"/>
-                <a:cs typeface="PingFang TC"/>
-              </a:defRPr>
-            </a:pPr>
-            <a:r>
-              <a:rPr sz="2550" b="1">
-                <a:solidFill>
-                  <a:srgbClr val="121212"/>
-                </a:solidFill>
-                <a:latin typeface="PingFang TC"/>
-                <a:ea typeface="PingFang TC"/>
-                <a:cs typeface="PingFang TC"/>
-              </a:rPr>
-              <a:t>加 5–8 個來源</a:t>
-            </a:r>
-          </a:p>
-        </p:txBody>
-      </p:sp>
-      <p:sp>
-        <p:nvSpPr>
-          <p:cNvPr id="16" name="">
-            <a:extLst>
-              <a:ext uri="{FF2B5EF4-FFF2-40B4-BE49-F238E27FC236}">
-                <a16:creationId xmlns:a16="http://schemas.microsoft.com/office/drawing/2014/main" id="{5FF9CB42-8351-4870-83D3-39F83544CE1A}"/>
-              </a:ext>
-            </a:extLst>
-          </p:cNvPr>
-          <p:cNvSpPr>
-            <a:spLocks noGrp="1"/>
-          </p:cNvSpPr>
-          <p:nvPr/>
-        </p:nvSpPr>
-        <p:spPr>
-          <a:xfrm>
-            <a:off x="4695825" y="3581400"/>
-            <a:ext cx="6715125" cy="485775"/>
-          </a:xfrm>
-          <a:prstGeom prst="rect">
-            <a:avLst/>
-          </a:prstGeom>
-          <a:noFill/>
-          <a:ln w="0">
-            <a:noFill/>
-          </a:ln>
-        </p:spPr>
-        <p:txBody>
-          <a:bodyPr>
-            <a:noAutofit/>
-          </a:bodyPr>
-          <a:lstStyle/>
-          <a:p>
-            <a:pPr>
-              <a:buNone/>
-              <a:defRPr sz="2175" b="0">
-                <a:solidFill>
-                  <a:srgbClr val="121212"/>
-                </a:solidFill>
-                <a:latin typeface="PingFang TC"/>
-                <a:ea typeface="PingFang TC"/>
-                <a:cs typeface="PingFang TC"/>
-              </a:defRPr>
-            </a:pPr>
-            <a:r>
-              <a:rPr sz="2175" b="0">
-                <a:solidFill>
-                  <a:srgbClr val="121212"/>
-                </a:solidFill>
-                <a:latin typeface="PingFang TC"/>
-                <a:ea typeface="PingFang TC"/>
-                <a:cs typeface="PingFang TC"/>
-              </a:rPr>
-              <a:t>五層各至少一個</a:t>
-            </a:r>
-          </a:p>
-        </p:txBody>
-      </p:sp>
-      <p:sp>
-        <p:nvSpPr>
-          <p:cNvPr id="17" name="">
-            <a:extLst>
-              <a:ext uri="{FF2B5EF4-FFF2-40B4-BE49-F238E27FC236}">
-                <a16:creationId xmlns:a16="http://schemas.microsoft.com/office/drawing/2014/main" id="{E0780AF1-E146-481C-BBA1-1B66A161CC86}"/>
-              </a:ext>
-            </a:extLst>
-          </p:cNvPr>
-          <p:cNvSpPr>
-            <a:spLocks noGrp="1"/>
-          </p:cNvSpPr>
-          <p:nvPr/>
-        </p:nvSpPr>
-        <p:spPr>
-          <a:xfrm>
-            <a:off x="4695825" y="4057650"/>
-            <a:ext cx="6715125" cy="428625"/>
-          </a:xfrm>
-          <a:prstGeom prst="rect">
-            <a:avLst/>
-          </a:prstGeom>
-          <a:noFill/>
-          <a:ln w="0">
-            <a:noFill/>
-          </a:ln>
-        </p:spPr>
-        <p:txBody>
-          <a:bodyPr>
-            <a:noAutofit/>
-          </a:bodyPr>
-          <a:lstStyle/>
-          <a:p>
-            <a:pPr>
-              <a:buNone/>
               <a:defRPr sz="1875" b="0">
                 <a:solidFill>
-                  <a:srgbClr val="626262"/>
+                  <a:srgbClr val="1D3A5F"/>
                 </a:solidFill>
                 <a:latin typeface="PingFang TC"/>
                 <a:ea typeface="PingFang TC"/>
@@ -17781,313 +18082,13 @@
             <a:r>
               <a:rPr sz="1875" b="0">
                 <a:solidFill>
-                  <a:srgbClr val="626262"/>
-                </a:solidFill>
-                <a:latin typeface="PingFang TC"/>
-                <a:ea typeface="PingFang TC"/>
-                <a:cs typeface="PingFang TC"/>
-              </a:rPr>
-              <a:t>貼網址、上傳 PDF、貼 YouTube 都行</a:t>
-            </a:r>
-          </a:p>
-        </p:txBody>
-      </p:sp>
-      <p:sp>
-        <p:nvSpPr>
-          <p:cNvPr id="18" name="">
-            <a:extLst>
-              <a:ext uri="{FF2B5EF4-FFF2-40B4-BE49-F238E27FC236}">
-                <a16:creationId xmlns:a16="http://schemas.microsoft.com/office/drawing/2014/main" id="{65F52A88-2729-4AA8-969A-05036BD3EC9D}"/>
-              </a:ext>
-            </a:extLst>
-          </p:cNvPr>
-          <p:cNvSpPr>
-            <a:spLocks noGrp="1"/>
-          </p:cNvSpPr>
-          <p:nvPr/>
-        </p:nvSpPr>
-        <p:spPr>
-          <a:xfrm>
-            <a:off x="1381125" y="4591050"/>
-            <a:ext cx="10201275" cy="19050"/>
-          </a:xfrm>
-          <a:prstGeom prst="rect">
-            <a:avLst/>
-          </a:prstGeom>
-          <a:solidFill>
-            <a:srgbClr val="D9D5CF"/>
-          </a:solidFill>
-          <a:ln w="0">
-            <a:noFill/>
-          </a:ln>
-        </p:spPr>
-        <p:txBody>
-          <a:bodyPr/>
-          <a:p/>
-        </p:txBody>
-      </p:sp>
-      <p:sp>
-        <p:nvSpPr>
-          <p:cNvPr id="19" name="">
-            <a:extLst>
-              <a:ext uri="{FF2B5EF4-FFF2-40B4-BE49-F238E27FC236}">
-                <a16:creationId xmlns:a16="http://schemas.microsoft.com/office/drawing/2014/main" id="{22A1850A-3AA6-4697-82D3-07C737CCAC4E}"/>
-              </a:ext>
-            </a:extLst>
-          </p:cNvPr>
-          <p:cNvSpPr>
-            <a:spLocks noGrp="1"/>
-          </p:cNvSpPr>
-          <p:nvPr/>
-        </p:nvSpPr>
-        <p:spPr>
-          <a:xfrm>
-            <a:off x="609600" y="4933950"/>
-            <a:ext cx="457200" cy="457200"/>
-          </a:xfrm>
-          <a:prstGeom prst="ellipse">
-            <a:avLst/>
-          </a:prstGeom>
-          <a:solidFill>
-            <a:srgbClr val="E63946"/>
-          </a:solidFill>
-          <a:ln w="0">
-            <a:noFill/>
-          </a:ln>
-        </p:spPr>
-        <p:txBody>
-          <a:bodyPr/>
-          <a:p/>
-        </p:txBody>
-      </p:sp>
-      <p:sp>
-        <p:nvSpPr>
-          <p:cNvPr id="20" name="">
-            <a:extLst>
-              <a:ext uri="{FF2B5EF4-FFF2-40B4-BE49-F238E27FC236}">
-                <a16:creationId xmlns:a16="http://schemas.microsoft.com/office/drawing/2014/main" id="{6D381400-56EE-4745-832F-98B10DA7CE86}"/>
-              </a:ext>
-            </a:extLst>
-          </p:cNvPr>
-          <p:cNvSpPr>
-            <a:spLocks noGrp="1"/>
-          </p:cNvSpPr>
-          <p:nvPr/>
-        </p:nvSpPr>
-        <p:spPr>
-          <a:xfrm>
-            <a:off x="704850" y="4972050"/>
-            <a:ext cx="381000" cy="400050"/>
-          </a:xfrm>
-          <a:prstGeom prst="rect">
-            <a:avLst/>
-          </a:prstGeom>
-          <a:noFill/>
-          <a:ln w="0">
-            <a:noFill/>
-          </a:ln>
-        </p:spPr>
-        <p:txBody>
-          <a:bodyPr>
-            <a:noAutofit/>
-          </a:bodyPr>
-          <a:lstStyle/>
-          <a:p>
-            <a:pPr>
-              <a:buNone/>
-              <a:defRPr sz="2025" b="1">
-                <a:solidFill>
-                  <a:srgbClr val="FFFFFF"/>
-                </a:solidFill>
-                <a:latin typeface="PingFang TC"/>
-                <a:ea typeface="PingFang TC"/>
-                <a:cs typeface="PingFang TC"/>
-              </a:defRPr>
-            </a:pPr>
-            <a:r>
-              <a:rPr sz="2025" b="1">
-                <a:solidFill>
-                  <a:srgbClr val="FFFFFF"/>
-                </a:solidFill>
-                <a:latin typeface="PingFang TC"/>
-                <a:ea typeface="PingFang TC"/>
-                <a:cs typeface="PingFang TC"/>
-              </a:rPr>
-              <a:t>3</a:t>
-            </a:r>
-          </a:p>
-        </p:txBody>
-      </p:sp>
-      <p:sp>
-        <p:nvSpPr>
-          <p:cNvPr id="21" name="">
-            <a:extLst>
-              <a:ext uri="{FF2B5EF4-FFF2-40B4-BE49-F238E27FC236}">
-                <a16:creationId xmlns:a16="http://schemas.microsoft.com/office/drawing/2014/main" id="{DFE1E411-0E18-47D7-B903-0FC5796953C8}"/>
-              </a:ext>
-            </a:extLst>
-          </p:cNvPr>
-          <p:cNvSpPr>
-            <a:spLocks noGrp="1"/>
-          </p:cNvSpPr>
-          <p:nvPr/>
-        </p:nvSpPr>
-        <p:spPr>
-          <a:xfrm>
-            <a:off x="1381125" y="4876800"/>
-            <a:ext cx="3000375" cy="523875"/>
-          </a:xfrm>
-          <a:prstGeom prst="rect">
-            <a:avLst/>
-          </a:prstGeom>
-          <a:noFill/>
-          <a:ln w="0">
-            <a:noFill/>
-          </a:ln>
-        </p:spPr>
-        <p:txBody>
-          <a:bodyPr>
-            <a:noAutofit/>
-          </a:bodyPr>
-          <a:lstStyle/>
-          <a:p>
-            <a:pPr>
-              <a:buNone/>
-              <a:defRPr sz="2550" b="1">
-                <a:solidFill>
-                  <a:srgbClr val="121212"/>
-                </a:solidFill>
-                <a:latin typeface="PingFang TC"/>
-                <a:ea typeface="PingFang TC"/>
-                <a:cs typeface="PingFang TC"/>
-              </a:defRPr>
-            </a:pPr>
-            <a:r>
-              <a:rPr sz="2550" b="1">
-                <a:solidFill>
-                  <a:srgbClr val="121212"/>
-                </a:solidFill>
-                <a:latin typeface="PingFang TC"/>
-                <a:ea typeface="PingFang TC"/>
-                <a:cs typeface="PingFang TC"/>
-              </a:rPr>
-              <a:t>貼六題、要引用</a:t>
-            </a:r>
-          </a:p>
-        </p:txBody>
-      </p:sp>
-      <p:sp>
-        <p:nvSpPr>
-          <p:cNvPr id="22" name="">
-            <a:extLst>
-              <a:ext uri="{FF2B5EF4-FFF2-40B4-BE49-F238E27FC236}">
-                <a16:creationId xmlns:a16="http://schemas.microsoft.com/office/drawing/2014/main" id="{B0C933AB-3307-4C37-8E26-A9F979169F9A}"/>
-              </a:ext>
-            </a:extLst>
-          </p:cNvPr>
-          <p:cNvSpPr>
-            <a:spLocks noGrp="1"/>
-          </p:cNvSpPr>
-          <p:nvPr/>
-        </p:nvSpPr>
-        <p:spPr>
-          <a:xfrm>
-            <a:off x="4695825" y="4781550"/>
-            <a:ext cx="6715125" cy="485775"/>
-          </a:xfrm>
-          <a:prstGeom prst="rect">
-            <a:avLst/>
-          </a:prstGeom>
-          <a:noFill/>
-          <a:ln w="0">
-            <a:noFill/>
-          </a:ln>
-        </p:spPr>
-        <p:txBody>
-          <a:bodyPr>
-            <a:noAutofit/>
-          </a:bodyPr>
-          <a:lstStyle/>
-          <a:p>
-            <a:pPr>
-              <a:buNone/>
-              <a:defRPr sz="2175" b="0">
-                <a:solidFill>
-                  <a:srgbClr val="121212"/>
-                </a:solidFill>
-                <a:latin typeface="PingFang TC"/>
-                <a:ea typeface="PingFang TC"/>
-                <a:cs typeface="PingFang TC"/>
-              </a:defRPr>
-            </a:pPr>
-            <a:r>
-              <a:rPr sz="2175" b="0">
-                <a:solidFill>
-                  <a:srgbClr val="121212"/>
-                </a:solidFill>
-                <a:latin typeface="PingFang TC"/>
-                <a:ea typeface="PingFang TC"/>
-                <a:cs typeface="PingFang TC"/>
-              </a:rPr>
-              <a:t>一題一題問，每個答案要有引用</a:t>
-            </a:r>
-          </a:p>
-        </p:txBody>
-      </p:sp>
-      <p:sp>
-        <p:nvSpPr>
-          <p:cNvPr id="23" name="">
-            <a:extLst>
-              <a:ext uri="{FF2B5EF4-FFF2-40B4-BE49-F238E27FC236}">
-                <a16:creationId xmlns:a16="http://schemas.microsoft.com/office/drawing/2014/main" id="{E1963D10-9201-4BF7-9F5D-46E0BE45C085}"/>
-              </a:ext>
-            </a:extLst>
-          </p:cNvPr>
-          <p:cNvSpPr>
-            <a:spLocks noGrp="1"/>
-          </p:cNvSpPr>
-          <p:nvPr/>
-        </p:nvSpPr>
-        <p:spPr>
-          <a:xfrm>
-            <a:off x="4695825" y="5257800"/>
-            <a:ext cx="6715125" cy="428625"/>
-          </a:xfrm>
-          <a:prstGeom prst="rect">
-            <a:avLst/>
-          </a:prstGeom>
-          <a:noFill/>
-          <a:ln w="0">
-            <a:noFill/>
-          </a:ln>
-        </p:spPr>
-        <p:txBody>
-          <a:bodyPr>
-            <a:noAutofit/>
-          </a:bodyPr>
-          <a:lstStyle/>
-          <a:p>
-            <a:pPr>
-              <a:buNone/>
-              <a:defRPr sz="1875" b="0">
-                <a:solidFill>
-                  <a:srgbClr val="626262"/>
-                </a:solidFill>
-                <a:latin typeface="PingFang TC"/>
-                <a:ea typeface="PingFang TC"/>
-                <a:cs typeface="PingFang TC"/>
-              </a:defRPr>
-            </a:pPr>
-            <a:r>
-              <a:rPr sz="1875" b="0">
-                <a:solidFill>
-                  <a:srgbClr val="626262"/>
-                </a:solidFill>
-                <a:latin typeface="PingFang TC"/>
-                <a:ea typeface="PingFang TC"/>
-                <a:cs typeface="PingFang TC"/>
-              </a:rPr>
-              <a:t>沒引用＝回去補來源，不是抄下來</a:t>
+                  <a:srgbClr val="1D3A5F"/>
+                </a:solidFill>
+                <a:latin typeface="PingFang TC"/>
+                <a:ea typeface="PingFang TC"/>
+                <a:cs typeface="PingFang TC"/>
+              </a:rPr>
+              <a:t>貼回卡 1，來源選「Gemini 說」或「GPT 說」。先存，再做卡 2。</a:t>
             </a:r>
           </a:p>
         </p:txBody>
@@ -18119,10 +18120,10 @@
       <p:grpSpPr/>
       <p:sp>
         <p:nvSpPr>
-          <p:cNvPr id="21" name="">
-            <a:extLst>
-              <a:ext uri="{FF2B5EF4-FFF2-40B4-BE49-F238E27FC236}">
-                <a16:creationId xmlns:a16="http://schemas.microsoft.com/office/drawing/2014/main" id="{8814B1AB-A708-463D-BCA9-62BBF766B05D}"/>
+          <p:cNvPr id="24" name="">
+            <a:extLst>
+              <a:ext uri="{FF2B5EF4-FFF2-40B4-BE49-F238E27FC236}">
+                <a16:creationId xmlns:a16="http://schemas.microsoft.com/office/drawing/2014/main" id="{894198F7-83D4-49B9-B014-ED1938DE842A}"/>
               </a:ext>
             </a:extLst>
           </p:cNvPr>
@@ -18180,7 +18181,7 @@
           <p:cNvPr id="2" name="">
             <a:extLst>
               <a:ext uri="{FF2B5EF4-FFF2-40B4-BE49-F238E27FC236}">
-                <a16:creationId xmlns:a16="http://schemas.microsoft.com/office/drawing/2014/main" id="{C0E469DC-8B6A-455A-8544-6038EB372150}"/>
+                <a16:creationId xmlns:a16="http://schemas.microsoft.com/office/drawing/2014/main" id="{377D4656-B699-4AD3-93C2-8029CD16F4A6}"/>
               </a:ext>
             </a:extLst>
           </p:cNvPr>
@@ -18228,7 +18229,7 @@
                 <a:ea typeface="PingFang TC"/>
                 <a:cs typeface="PingFang TC"/>
               </a:rPr>
-              <a:t>NotebookLM 的六題階梯</a:t>
+              <a:t>卡 2 NotebookLM 查證：老師帶著做一次</a:t>
             </a:r>
           </a:p>
         </p:txBody>
@@ -18238,7 +18239,7 @@
           <p:cNvPr id="3" name="">
             <a:extLst>
               <a:ext uri="{FF2B5EF4-FFF2-40B4-BE49-F238E27FC236}">
-                <a16:creationId xmlns:a16="http://schemas.microsoft.com/office/drawing/2014/main" id="{987ED678-6582-47CC-8ECE-D90184EAB855}"/>
+                <a16:creationId xmlns:a16="http://schemas.microsoft.com/office/drawing/2014/main" id="{0594E1D1-B418-4737-B5F9-AECD926DA88B}"/>
               </a:ext>
             </a:extLst>
           </p:cNvPr>
@@ -18286,7 +18287,7 @@
                 <a:ea typeface="PingFang TC"/>
                 <a:cs typeface="PingFang TC"/>
               </a:rPr>
-              <a:t>從大到小、從現況到變化；答案貼回卡 2 時每點留（來源：XX）</a:t>
+              <a:t>這張卡只能用 NotebookLM；每一點後面留（來源：XX）</a:t>
             </a:r>
           </a:p>
         </p:txBody>
@@ -18296,7 +18297,7 @@
           <p:cNvPr id="4" name="">
             <a:extLst>
               <a:ext uri="{FF2B5EF4-FFF2-40B4-BE49-F238E27FC236}">
-                <a16:creationId xmlns:a16="http://schemas.microsoft.com/office/drawing/2014/main" id="{53FB0A49-91F3-4CAC-A9A3-15D1937610B3}"/>
+                <a16:creationId xmlns:a16="http://schemas.microsoft.com/office/drawing/2014/main" id="{B30CD637-8467-4304-A625-2AEECA5B0D85}"/>
               </a:ext>
             </a:extLst>
           </p:cNvPr>
@@ -18330,7 +18331,7 @@
           <p:cNvPr id="5" name="">
             <a:extLst>
               <a:ext uri="{FF2B5EF4-FFF2-40B4-BE49-F238E27FC236}">
-                <a16:creationId xmlns:a16="http://schemas.microsoft.com/office/drawing/2014/main" id="{121EC846-19D4-4202-B8AD-BA33F7D1158E}"/>
+                <a16:creationId xmlns:a16="http://schemas.microsoft.com/office/drawing/2014/main" id="{98C4DF5D-D4B6-4E69-BC4A-E5C5908A2BED}"/>
               </a:ext>
             </a:extLst>
           </p:cNvPr>
@@ -18388,7 +18389,7 @@
           <p:cNvPr id="6" name="">
             <a:extLst>
               <a:ext uri="{FF2B5EF4-FFF2-40B4-BE49-F238E27FC236}">
-                <a16:creationId xmlns:a16="http://schemas.microsoft.com/office/drawing/2014/main" id="{7997F8E8-68FD-4DA3-8C4D-0FEE0D6A0C23}"/>
+                <a16:creationId xmlns:a16="http://schemas.microsoft.com/office/drawing/2014/main" id="{16930E8F-383A-4F8D-A549-AC52ED848497}"/>
               </a:ext>
             </a:extLst>
           </p:cNvPr>
@@ -18436,7 +18437,7 @@
                 <a:ea typeface="PingFang TC"/>
                 <a:cs typeface="PingFang TC"/>
               </a:rPr>
-              <a:t>16 / 22</a:t>
+              <a:t>16 / 23</a:t>
             </a:r>
           </a:p>
         </p:txBody>
@@ -18446,573 +18447,21 @@
           <p:cNvPr id="7" name="">
             <a:extLst>
               <a:ext uri="{FF2B5EF4-FFF2-40B4-BE49-F238E27FC236}">
-                <a16:creationId xmlns:a16="http://schemas.microsoft.com/office/drawing/2014/main" id="{DF09DED1-3E9E-4B14-904B-7645F2EF77A9}"/>
-              </a:ext>
-            </a:extLst>
-          </p:cNvPr>
-          <p:cNvSpPr>
-            <a:spLocks noGrp="1"/>
-          </p:cNvSpPr>
-          <p:nvPr/>
-        </p:nvSpPr>
-        <p:spPr>
-          <a:xfrm>
-            <a:off x="628650" y="2314575"/>
-            <a:ext cx="228600" cy="228600"/>
-          </a:xfrm>
-          <a:prstGeom prst="rect">
-            <a:avLst/>
-          </a:prstGeom>
-          <a:noFill/>
-          <a:ln w="19050">
-            <a:solidFill>
-              <a:srgbClr val="1D3A5F"/>
-            </a:solidFill>
-          </a:ln>
-        </p:spPr>
-        <p:txBody>
-          <a:bodyPr/>
-          <a:p/>
-        </p:txBody>
-      </p:sp>
-      <p:sp>
-        <p:nvSpPr>
-          <p:cNvPr id="8" name="">
-            <a:extLst>
-              <a:ext uri="{FF2B5EF4-FFF2-40B4-BE49-F238E27FC236}">
-                <a16:creationId xmlns:a16="http://schemas.microsoft.com/office/drawing/2014/main" id="{C9CCA19B-DA36-4E1C-AA16-5520D21E050D}"/>
-              </a:ext>
-            </a:extLst>
-          </p:cNvPr>
-          <p:cNvSpPr>
-            <a:spLocks noGrp="1"/>
-          </p:cNvSpPr>
-          <p:nvPr/>
-        </p:nvSpPr>
-        <p:spPr>
-          <a:xfrm>
-            <a:off x="1085850" y="2238375"/>
-            <a:ext cx="10382250" cy="485775"/>
-          </a:xfrm>
-          <a:prstGeom prst="rect">
-            <a:avLst/>
-          </a:prstGeom>
-          <a:noFill/>
-          <a:ln w="0">
-            <a:noFill/>
-          </a:ln>
-        </p:spPr>
-        <p:txBody>
-          <a:bodyPr>
-            <a:noAutofit/>
-          </a:bodyPr>
-          <a:lstStyle/>
-          <a:p>
-            <a:pPr>
-              <a:buNone/>
-              <a:defRPr sz="2100" b="0">
-                <a:solidFill>
-                  <a:srgbClr val="121212"/>
-                </a:solidFill>
-                <a:latin typeface="PingFang TC"/>
-                <a:ea typeface="PingFang TC"/>
-                <a:cs typeface="PingFang TC"/>
-              </a:defRPr>
-            </a:pPr>
-            <a:r>
-              <a:rPr sz="2100" b="0">
-                <a:solidFill>
-                  <a:srgbClr val="121212"/>
-                </a:solidFill>
-                <a:latin typeface="PingFang TC"/>
-                <a:ea typeface="PingFang TC"/>
-                <a:cs typeface="PingFang TC"/>
-              </a:rPr>
-              <a:t>① 這一行在台灣有多大？多少家、多少人、多少錢？</a:t>
-            </a:r>
-          </a:p>
-        </p:txBody>
-      </p:sp>
-      <p:sp>
-        <p:nvSpPr>
-          <p:cNvPr id="9" name="">
-            <a:extLst>
-              <a:ext uri="{FF2B5EF4-FFF2-40B4-BE49-F238E27FC236}">
-                <a16:creationId xmlns:a16="http://schemas.microsoft.com/office/drawing/2014/main" id="{003F9287-4810-43E9-B75B-F3D6F55FB1F1}"/>
-              </a:ext>
-            </a:extLst>
-          </p:cNvPr>
-          <p:cNvSpPr>
-            <a:spLocks noGrp="1"/>
-          </p:cNvSpPr>
-          <p:nvPr/>
-        </p:nvSpPr>
-        <p:spPr>
-          <a:xfrm>
-            <a:off x="628650" y="2857500"/>
-            <a:ext cx="228600" cy="228600"/>
-          </a:xfrm>
-          <a:prstGeom prst="rect">
-            <a:avLst/>
-          </a:prstGeom>
-          <a:noFill/>
-          <a:ln w="19050">
-            <a:solidFill>
-              <a:srgbClr val="1D3A5F"/>
-            </a:solidFill>
-          </a:ln>
-        </p:spPr>
-        <p:txBody>
-          <a:bodyPr/>
-          <a:p/>
-        </p:txBody>
-      </p:sp>
-      <p:sp>
-        <p:nvSpPr>
-          <p:cNvPr id="10" name="">
-            <a:extLst>
-              <a:ext uri="{FF2B5EF4-FFF2-40B4-BE49-F238E27FC236}">
-                <a16:creationId xmlns:a16="http://schemas.microsoft.com/office/drawing/2014/main" id="{D95D37CA-5A02-4321-BEC7-D57741D66A22}"/>
-              </a:ext>
-            </a:extLst>
-          </p:cNvPr>
-          <p:cNvSpPr>
-            <a:spLocks noGrp="1"/>
-          </p:cNvSpPr>
-          <p:nvPr/>
-        </p:nvSpPr>
-        <p:spPr>
-          <a:xfrm>
-            <a:off x="1085850" y="2781300"/>
-            <a:ext cx="10382250" cy="485775"/>
-          </a:xfrm>
-          <a:prstGeom prst="rect">
-            <a:avLst/>
-          </a:prstGeom>
-          <a:noFill/>
-          <a:ln w="0">
-            <a:noFill/>
-          </a:ln>
-        </p:spPr>
-        <p:txBody>
-          <a:bodyPr>
-            <a:noAutofit/>
-          </a:bodyPr>
-          <a:lstStyle/>
-          <a:p>
-            <a:pPr>
-              <a:buNone/>
-              <a:defRPr sz="2100" b="0">
-                <a:solidFill>
-                  <a:srgbClr val="121212"/>
-                </a:solidFill>
-                <a:latin typeface="PingFang TC"/>
-                <a:ea typeface="PingFang TC"/>
-                <a:cs typeface="PingFang TC"/>
-              </a:defRPr>
-            </a:pPr>
-            <a:r>
-              <a:rPr sz="2100" b="0">
-                <a:solidFill>
-                  <a:srgbClr val="121212"/>
-                </a:solidFill>
-                <a:latin typeface="PingFang TC"/>
-                <a:ea typeface="PingFang TC"/>
-                <a:cs typeface="PingFang TC"/>
-              </a:rPr>
-              <a:t>② 誰在賺錢？錢從誰手上流到誰手上？</a:t>
-            </a:r>
-          </a:p>
-        </p:txBody>
-      </p:sp>
-      <p:sp>
-        <p:nvSpPr>
-          <p:cNvPr id="11" name="">
-            <a:extLst>
-              <a:ext uri="{FF2B5EF4-FFF2-40B4-BE49-F238E27FC236}">
-                <a16:creationId xmlns:a16="http://schemas.microsoft.com/office/drawing/2014/main" id="{5977A7AB-2E6D-4A61-8127-FEBF350790E8}"/>
-              </a:ext>
-            </a:extLst>
-          </p:cNvPr>
-          <p:cNvSpPr>
-            <a:spLocks noGrp="1"/>
-          </p:cNvSpPr>
-          <p:nvPr/>
-        </p:nvSpPr>
-        <p:spPr>
-          <a:xfrm>
-            <a:off x="628650" y="3400425"/>
-            <a:ext cx="228600" cy="228600"/>
-          </a:xfrm>
-          <a:prstGeom prst="rect">
-            <a:avLst/>
-          </a:prstGeom>
-          <a:noFill/>
-          <a:ln w="19050">
-            <a:solidFill>
-              <a:srgbClr val="1D3A5F"/>
-            </a:solidFill>
-          </a:ln>
-        </p:spPr>
-        <p:txBody>
-          <a:bodyPr/>
-          <a:p/>
-        </p:txBody>
-      </p:sp>
-      <p:sp>
-        <p:nvSpPr>
-          <p:cNvPr id="12" name="">
-            <a:extLst>
-              <a:ext uri="{FF2B5EF4-FFF2-40B4-BE49-F238E27FC236}">
-                <a16:creationId xmlns:a16="http://schemas.microsoft.com/office/drawing/2014/main" id="{08A375F9-ED04-4364-B44C-40FCBDA24749}"/>
-              </a:ext>
-            </a:extLst>
-          </p:cNvPr>
-          <p:cNvSpPr>
-            <a:spLocks noGrp="1"/>
-          </p:cNvSpPr>
-          <p:nvPr/>
-        </p:nvSpPr>
-        <p:spPr>
-          <a:xfrm>
-            <a:off x="1085850" y="3324225"/>
-            <a:ext cx="10382250" cy="485775"/>
-          </a:xfrm>
-          <a:prstGeom prst="rect">
-            <a:avLst/>
-          </a:prstGeom>
-          <a:noFill/>
-          <a:ln w="0">
-            <a:noFill/>
-          </a:ln>
-        </p:spPr>
-        <p:txBody>
-          <a:bodyPr>
-            <a:noAutofit/>
-          </a:bodyPr>
-          <a:lstStyle/>
-          <a:p>
-            <a:pPr>
-              <a:buNone/>
-              <a:defRPr sz="2100" b="0">
-                <a:solidFill>
-                  <a:srgbClr val="121212"/>
-                </a:solidFill>
-                <a:latin typeface="PingFang TC"/>
-                <a:ea typeface="PingFang TC"/>
-                <a:cs typeface="PingFang TC"/>
-              </a:defRPr>
-            </a:pPr>
-            <a:r>
-              <a:rPr sz="2100" b="0">
-                <a:solidFill>
-                  <a:srgbClr val="121212"/>
-                </a:solidFill>
-                <a:latin typeface="PingFang TC"/>
-                <a:ea typeface="PingFang TC"/>
-                <a:cs typeface="PingFang TC"/>
-              </a:rPr>
-              <a:t>③ 業者最常被抱怨、自己最常抱怨的三件事？</a:t>
-            </a:r>
-          </a:p>
-        </p:txBody>
-      </p:sp>
-      <p:sp>
-        <p:nvSpPr>
-          <p:cNvPr id="13" name="">
-            <a:extLst>
-              <a:ext uri="{FF2B5EF4-FFF2-40B4-BE49-F238E27FC236}">
-                <a16:creationId xmlns:a16="http://schemas.microsoft.com/office/drawing/2014/main" id="{9A03FFED-24D3-4EA6-9F40-56F24BF5E4F0}"/>
-              </a:ext>
-            </a:extLst>
-          </p:cNvPr>
-          <p:cNvSpPr>
-            <a:spLocks noGrp="1"/>
-          </p:cNvSpPr>
-          <p:nvPr/>
-        </p:nvSpPr>
-        <p:spPr>
-          <a:xfrm>
-            <a:off x="628650" y="3943350"/>
-            <a:ext cx="228600" cy="228600"/>
-          </a:xfrm>
-          <a:prstGeom prst="rect">
-            <a:avLst/>
-          </a:prstGeom>
-          <a:noFill/>
-          <a:ln w="19050">
-            <a:solidFill>
-              <a:srgbClr val="1D3A5F"/>
-            </a:solidFill>
-          </a:ln>
-        </p:spPr>
-        <p:txBody>
-          <a:bodyPr/>
-          <a:p/>
-        </p:txBody>
-      </p:sp>
-      <p:sp>
-        <p:nvSpPr>
-          <p:cNvPr id="14" name="">
-            <a:extLst>
-              <a:ext uri="{FF2B5EF4-FFF2-40B4-BE49-F238E27FC236}">
-                <a16:creationId xmlns:a16="http://schemas.microsoft.com/office/drawing/2014/main" id="{E595014F-654E-4514-9F8B-AE80342684F5}"/>
-              </a:ext>
-            </a:extLst>
-          </p:cNvPr>
-          <p:cNvSpPr>
-            <a:spLocks noGrp="1"/>
-          </p:cNvSpPr>
-          <p:nvPr/>
-        </p:nvSpPr>
-        <p:spPr>
-          <a:xfrm>
-            <a:off x="1085850" y="3867150"/>
-            <a:ext cx="10382250" cy="485775"/>
-          </a:xfrm>
-          <a:prstGeom prst="rect">
-            <a:avLst/>
-          </a:prstGeom>
-          <a:noFill/>
-          <a:ln w="0">
-            <a:noFill/>
-          </a:ln>
-        </p:spPr>
-        <p:txBody>
-          <a:bodyPr>
-            <a:noAutofit/>
-          </a:bodyPr>
-          <a:lstStyle/>
-          <a:p>
-            <a:pPr>
-              <a:buNone/>
-              <a:defRPr sz="2100" b="0">
-                <a:solidFill>
-                  <a:srgbClr val="121212"/>
-                </a:solidFill>
-                <a:latin typeface="PingFang TC"/>
-                <a:ea typeface="PingFang TC"/>
-                <a:cs typeface="PingFang TC"/>
-              </a:defRPr>
-            </a:pPr>
-            <a:r>
-              <a:rPr sz="2100" b="0">
-                <a:solidFill>
-                  <a:srgbClr val="121212"/>
-                </a:solidFill>
-                <a:latin typeface="PingFang TC"/>
-                <a:ea typeface="PingFang TC"/>
-                <a:cs typeface="PingFang TC"/>
-              </a:rPr>
-              <a:t>④ 過去三年什麼變了？（缺工、平台、法規、AI）</a:t>
-            </a:r>
-          </a:p>
-        </p:txBody>
-      </p:sp>
-      <p:sp>
-        <p:nvSpPr>
-          <p:cNvPr id="15" name="">
-            <a:extLst>
-              <a:ext uri="{FF2B5EF4-FFF2-40B4-BE49-F238E27FC236}">
-                <a16:creationId xmlns:a16="http://schemas.microsoft.com/office/drawing/2014/main" id="{BA26016B-DE2B-4C47-9F38-B86019D4A583}"/>
-              </a:ext>
-            </a:extLst>
-          </p:cNvPr>
-          <p:cNvSpPr>
-            <a:spLocks noGrp="1"/>
-          </p:cNvSpPr>
-          <p:nvPr/>
-        </p:nvSpPr>
-        <p:spPr>
-          <a:xfrm>
-            <a:off x="628650" y="4486275"/>
-            <a:ext cx="228600" cy="228600"/>
-          </a:xfrm>
-          <a:prstGeom prst="rect">
-            <a:avLst/>
-          </a:prstGeom>
-          <a:noFill/>
-          <a:ln w="19050">
-            <a:solidFill>
-              <a:srgbClr val="E63946"/>
-            </a:solidFill>
-          </a:ln>
-        </p:spPr>
-        <p:txBody>
-          <a:bodyPr/>
-          <a:p/>
-        </p:txBody>
-      </p:sp>
-      <p:sp>
-        <p:nvSpPr>
-          <p:cNvPr id="16" name="">
-            <a:extLst>
-              <a:ext uri="{FF2B5EF4-FFF2-40B4-BE49-F238E27FC236}">
-                <a16:creationId xmlns:a16="http://schemas.microsoft.com/office/drawing/2014/main" id="{60A61946-1B30-4F82-8020-4EB887FFFF31}"/>
-              </a:ext>
-            </a:extLst>
-          </p:cNvPr>
-          <p:cNvSpPr>
-            <a:spLocks noGrp="1"/>
-          </p:cNvSpPr>
-          <p:nvPr/>
-        </p:nvSpPr>
-        <p:spPr>
-          <a:xfrm>
-            <a:off x="1085850" y="4410075"/>
-            <a:ext cx="10382250" cy="485775"/>
-          </a:xfrm>
-          <a:prstGeom prst="rect">
-            <a:avLst/>
-          </a:prstGeom>
-          <a:noFill/>
-          <a:ln w="0">
-            <a:noFill/>
-          </a:ln>
-        </p:spPr>
-        <p:txBody>
-          <a:bodyPr>
-            <a:noAutofit/>
-          </a:bodyPr>
-          <a:lstStyle/>
-          <a:p>
-            <a:pPr>
-              <a:buNone/>
-              <a:defRPr sz="2100" b="1">
-                <a:solidFill>
-                  <a:srgbClr val="121212"/>
-                </a:solidFill>
-                <a:latin typeface="PingFang TC"/>
-                <a:ea typeface="PingFang TC"/>
-                <a:cs typeface="PingFang TC"/>
-              </a:defRPr>
-            </a:pPr>
-            <a:r>
-              <a:rPr sz="2100" b="1">
-                <a:solidFill>
-                  <a:srgbClr val="121212"/>
-                </a:solidFill>
-                <a:latin typeface="PingFang TC"/>
-                <a:ea typeface="PingFang TC"/>
-                <a:cs typeface="PingFang TC"/>
-              </a:rPr>
-              <a:t>⑤ 有人試過解決嗎？結果如何？</a:t>
-            </a:r>
-          </a:p>
-        </p:txBody>
-      </p:sp>
-      <p:sp>
-        <p:nvSpPr>
-          <p:cNvPr id="17" name="">
-            <a:extLst>
-              <a:ext uri="{FF2B5EF4-FFF2-40B4-BE49-F238E27FC236}">
-                <a16:creationId xmlns:a16="http://schemas.microsoft.com/office/drawing/2014/main" id="{093DA355-6759-43A9-A95D-4361AA6A47BF}"/>
-              </a:ext>
-            </a:extLst>
-          </p:cNvPr>
-          <p:cNvSpPr>
-            <a:spLocks noGrp="1"/>
-          </p:cNvSpPr>
-          <p:nvPr/>
-        </p:nvSpPr>
-        <p:spPr>
-          <a:xfrm>
-            <a:off x="628650" y="5029200"/>
-            <a:ext cx="228600" cy="228600"/>
-          </a:xfrm>
-          <a:prstGeom prst="rect">
-            <a:avLst/>
-          </a:prstGeom>
-          <a:noFill/>
-          <a:ln w="19050">
-            <a:solidFill>
-              <a:srgbClr val="E63946"/>
-            </a:solidFill>
-          </a:ln>
-        </p:spPr>
-        <p:txBody>
-          <a:bodyPr/>
-          <a:p/>
-        </p:txBody>
-      </p:sp>
-      <p:sp>
-        <p:nvSpPr>
-          <p:cNvPr id="18" name="">
-            <a:extLst>
-              <a:ext uri="{FF2B5EF4-FFF2-40B4-BE49-F238E27FC236}">
-                <a16:creationId xmlns:a16="http://schemas.microsoft.com/office/drawing/2014/main" id="{7377CCEB-8EAD-44CB-B435-B378C176210E}"/>
-              </a:ext>
-            </a:extLst>
-          </p:cNvPr>
-          <p:cNvSpPr>
-            <a:spLocks noGrp="1"/>
-          </p:cNvSpPr>
-          <p:nvPr/>
-        </p:nvSpPr>
-        <p:spPr>
-          <a:xfrm>
-            <a:off x="1085850" y="4953000"/>
-            <a:ext cx="10382250" cy="485775"/>
-          </a:xfrm>
-          <a:prstGeom prst="rect">
-            <a:avLst/>
-          </a:prstGeom>
-          <a:noFill/>
-          <a:ln w="0">
-            <a:noFill/>
-          </a:ln>
-        </p:spPr>
-        <p:txBody>
-          <a:bodyPr>
-            <a:noAutofit/>
-          </a:bodyPr>
-          <a:lstStyle/>
-          <a:p>
-            <a:pPr>
-              <a:buNone/>
-              <a:defRPr sz="2100" b="1">
-                <a:solidFill>
-                  <a:srgbClr val="121212"/>
-                </a:solidFill>
-                <a:latin typeface="PingFang TC"/>
-                <a:ea typeface="PingFang TC"/>
-                <a:cs typeface="PingFang TC"/>
-              </a:defRPr>
-            </a:pPr>
-            <a:r>
-              <a:rPr sz="2100" b="1">
-                <a:solidFill>
-                  <a:srgbClr val="121212"/>
-                </a:solidFill>
-                <a:latin typeface="PingFang TC"/>
-                <a:ea typeface="PingFang TC"/>
-                <a:cs typeface="PingFang TC"/>
-              </a:rPr>
-              <a:t>⑥ 台灣跟國外差在哪？</a:t>
-            </a:r>
-          </a:p>
-        </p:txBody>
-      </p:sp>
-      <p:sp>
-        <p:nvSpPr>
-          <p:cNvPr id="19" name="">
-            <a:extLst>
-              <a:ext uri="{FF2B5EF4-FFF2-40B4-BE49-F238E27FC236}">
-                <a16:creationId xmlns:a16="http://schemas.microsoft.com/office/drawing/2014/main" id="{72DB212D-DCE9-4747-B435-0D67F2CC0D5D}"/>
-              </a:ext>
-            </a:extLst>
-          </p:cNvPr>
-          <p:cNvSpPr>
-            <a:spLocks noGrp="1"/>
-          </p:cNvSpPr>
-          <p:nvPr/>
-        </p:nvSpPr>
-        <p:spPr>
-          <a:xfrm>
-            <a:off x="609600" y="5648325"/>
-            <a:ext cx="10972800" cy="485775"/>
-          </a:xfrm>
-          <a:prstGeom prst="rect">
+                <a16:creationId xmlns:a16="http://schemas.microsoft.com/office/drawing/2014/main" id="{DE9E04D7-6B3D-4F5C-A3A9-6A8A9E4572BB}"/>
+              </a:ext>
+            </a:extLst>
+          </p:cNvPr>
+          <p:cNvSpPr>
+            <a:spLocks noGrp="1"/>
+          </p:cNvSpPr>
+          <p:nvPr/>
+        </p:nvSpPr>
+        <p:spPr>
+          <a:xfrm>
+            <a:off x="609600" y="2533650"/>
+            <a:ext cx="457200" cy="457200"/>
+          </a:xfrm>
+          <a:prstGeom prst="ellipse">
             <a:avLst/>
           </a:prstGeom>
           <a:solidFill>
@@ -19029,22 +18478,22 @@
       </p:sp>
       <p:sp>
         <p:nvSpPr>
-          <p:cNvPr id="20" name="">
-            <a:extLst>
-              <a:ext uri="{FF2B5EF4-FFF2-40B4-BE49-F238E27FC236}">
-                <a16:creationId xmlns:a16="http://schemas.microsoft.com/office/drawing/2014/main" id="{AFE6C6B1-030D-4F0E-8E52-EDA429C81544}"/>
-              </a:ext>
-            </a:extLst>
-          </p:cNvPr>
-          <p:cNvSpPr>
-            <a:spLocks noGrp="1"/>
-          </p:cNvSpPr>
-          <p:nvPr/>
-        </p:nvSpPr>
-        <p:spPr>
-          <a:xfrm>
-            <a:off x="800100" y="5715000"/>
-            <a:ext cx="10525125" cy="390525"/>
+          <p:cNvPr id="8" name="">
+            <a:extLst>
+              <a:ext uri="{FF2B5EF4-FFF2-40B4-BE49-F238E27FC236}">
+                <a16:creationId xmlns:a16="http://schemas.microsoft.com/office/drawing/2014/main" id="{2EC9061A-3CF6-412B-9BE4-5AEB8ACEC2B4}"/>
+              </a:ext>
+            </a:extLst>
+          </p:cNvPr>
+          <p:cNvSpPr>
+            <a:spLocks noGrp="1"/>
+          </p:cNvSpPr>
+          <p:nvPr/>
+        </p:nvSpPr>
+        <p:spPr>
+          <a:xfrm>
+            <a:off x="704850" y="2571750"/>
+            <a:ext cx="381000" cy="400050"/>
           </a:xfrm>
           <a:prstGeom prst="rect">
             <a:avLst/>
@@ -19080,7 +18529,781 @@
                 <a:ea typeface="PingFang TC"/>
                 <a:cs typeface="PingFang TC"/>
               </a:rPr>
-              <a:t>六題都有引用，卡 2 才算完成；卡 3 會自動把這些證據附在問題後面。</a:t>
+              <a:t>1</a:t>
+            </a:r>
+          </a:p>
+        </p:txBody>
+      </p:sp>
+      <p:sp>
+        <p:nvSpPr>
+          <p:cNvPr id="9" name="">
+            <a:extLst>
+              <a:ext uri="{FF2B5EF4-FFF2-40B4-BE49-F238E27FC236}">
+                <a16:creationId xmlns:a16="http://schemas.microsoft.com/office/drawing/2014/main" id="{0599EA4C-FF67-4BCA-A109-6A5B6DE43B0A}"/>
+              </a:ext>
+            </a:extLst>
+          </p:cNvPr>
+          <p:cNvSpPr>
+            <a:spLocks noGrp="1"/>
+          </p:cNvSpPr>
+          <p:nvPr/>
+        </p:nvSpPr>
+        <p:spPr>
+          <a:xfrm>
+            <a:off x="1381125" y="2476500"/>
+            <a:ext cx="3000375" cy="523875"/>
+          </a:xfrm>
+          <a:prstGeom prst="rect">
+            <a:avLst/>
+          </a:prstGeom>
+          <a:noFill/>
+          <a:ln w="0">
+            <a:noFill/>
+          </a:ln>
+        </p:spPr>
+        <p:txBody>
+          <a:bodyPr>
+            <a:noAutofit/>
+          </a:bodyPr>
+          <a:lstStyle/>
+          <a:p>
+            <a:pPr>
+              <a:buNone/>
+              <a:defRPr sz="2550" b="1">
+                <a:solidFill>
+                  <a:srgbClr val="121212"/>
+                </a:solidFill>
+                <a:latin typeface="PingFang TC"/>
+                <a:ea typeface="PingFang TC"/>
+                <a:cs typeface="PingFang TC"/>
+              </a:defRPr>
+            </a:pPr>
+            <a:r>
+              <a:rPr sz="2550" b="1">
+                <a:solidFill>
+                  <a:srgbClr val="121212"/>
+                </a:solidFill>
+                <a:latin typeface="PingFang TC"/>
+                <a:ea typeface="PingFang TC"/>
+                <a:cs typeface="PingFang TC"/>
+              </a:rPr>
+              <a:t>新建筆記本</a:t>
+            </a:r>
+          </a:p>
+        </p:txBody>
+      </p:sp>
+      <p:sp>
+        <p:nvSpPr>
+          <p:cNvPr id="10" name="">
+            <a:extLst>
+              <a:ext uri="{FF2B5EF4-FFF2-40B4-BE49-F238E27FC236}">
+                <a16:creationId xmlns:a16="http://schemas.microsoft.com/office/drawing/2014/main" id="{33F4DD03-9A6F-467F-A735-75DA093A6128}"/>
+              </a:ext>
+            </a:extLst>
+          </p:cNvPr>
+          <p:cNvSpPr>
+            <a:spLocks noGrp="1"/>
+          </p:cNvSpPr>
+          <p:nvPr/>
+        </p:nvSpPr>
+        <p:spPr>
+          <a:xfrm>
+            <a:off x="4695825" y="2381250"/>
+            <a:ext cx="6715125" cy="485775"/>
+          </a:xfrm>
+          <a:prstGeom prst="rect">
+            <a:avLst/>
+          </a:prstGeom>
+          <a:noFill/>
+          <a:ln w="0">
+            <a:noFill/>
+          </a:ln>
+        </p:spPr>
+        <p:txBody>
+          <a:bodyPr>
+            <a:noAutofit/>
+          </a:bodyPr>
+          <a:lstStyle/>
+          <a:p>
+            <a:pPr>
+              <a:buNone/>
+              <a:defRPr sz="2175" b="0">
+                <a:solidFill>
+                  <a:srgbClr val="121212"/>
+                </a:solidFill>
+                <a:latin typeface="PingFang TC"/>
+                <a:ea typeface="PingFang TC"/>
+                <a:cs typeface="PingFang TC"/>
+              </a:defRPr>
+            </a:pPr>
+            <a:r>
+              <a:rPr sz="2175" b="0">
+                <a:solidFill>
+                  <a:srgbClr val="121212"/>
+                </a:solidFill>
+                <a:latin typeface="PingFang TC"/>
+                <a:ea typeface="PingFang TC"/>
+                <a:cs typeface="PingFang TC"/>
+              </a:rPr>
+              <a:t>notebooklm.google.com → 新建</a:t>
+            </a:r>
+          </a:p>
+        </p:txBody>
+      </p:sp>
+      <p:sp>
+        <p:nvSpPr>
+          <p:cNvPr id="11" name="">
+            <a:extLst>
+              <a:ext uri="{FF2B5EF4-FFF2-40B4-BE49-F238E27FC236}">
+                <a16:creationId xmlns:a16="http://schemas.microsoft.com/office/drawing/2014/main" id="{D0ABE812-9CCE-4771-B793-DEEF63DB334E}"/>
+              </a:ext>
+            </a:extLst>
+          </p:cNvPr>
+          <p:cNvSpPr>
+            <a:spLocks noGrp="1"/>
+          </p:cNvSpPr>
+          <p:nvPr/>
+        </p:nvSpPr>
+        <p:spPr>
+          <a:xfrm>
+            <a:off x="4695825" y="2857500"/>
+            <a:ext cx="6715125" cy="428625"/>
+          </a:xfrm>
+          <a:prstGeom prst="rect">
+            <a:avLst/>
+          </a:prstGeom>
+          <a:noFill/>
+          <a:ln w="0">
+            <a:noFill/>
+          </a:ln>
+        </p:spPr>
+        <p:txBody>
+          <a:bodyPr>
+            <a:noAutofit/>
+          </a:bodyPr>
+          <a:lstStyle/>
+          <a:p>
+            <a:pPr>
+              <a:buNone/>
+              <a:defRPr sz="1875" b="0">
+                <a:solidFill>
+                  <a:srgbClr val="626262"/>
+                </a:solidFill>
+                <a:latin typeface="PingFang TC"/>
+                <a:ea typeface="PingFang TC"/>
+                <a:cs typeface="PingFang TC"/>
+              </a:defRPr>
+            </a:pPr>
+            <a:r>
+              <a:rPr sz="1875" b="0">
+                <a:solidFill>
+                  <a:srgbClr val="626262"/>
+                </a:solidFill>
+                <a:latin typeface="PingFang TC"/>
+                <a:ea typeface="PingFang TC"/>
+                <a:cs typeface="PingFang TC"/>
+              </a:rPr>
+              <a:t>取名「〔產業〕研究」</a:t>
+            </a:r>
+          </a:p>
+        </p:txBody>
+      </p:sp>
+      <p:sp>
+        <p:nvSpPr>
+          <p:cNvPr id="12" name="">
+            <a:extLst>
+              <a:ext uri="{FF2B5EF4-FFF2-40B4-BE49-F238E27FC236}">
+                <a16:creationId xmlns:a16="http://schemas.microsoft.com/office/drawing/2014/main" id="{6CFEF638-4578-4E18-A983-2CD7BBECE664}"/>
+              </a:ext>
+            </a:extLst>
+          </p:cNvPr>
+          <p:cNvSpPr>
+            <a:spLocks noGrp="1"/>
+          </p:cNvSpPr>
+          <p:nvPr/>
+        </p:nvSpPr>
+        <p:spPr>
+          <a:xfrm>
+            <a:off x="1381125" y="3390900"/>
+            <a:ext cx="10201275" cy="19050"/>
+          </a:xfrm>
+          <a:prstGeom prst="rect">
+            <a:avLst/>
+          </a:prstGeom>
+          <a:solidFill>
+            <a:srgbClr val="D9D5CF"/>
+          </a:solidFill>
+          <a:ln w="0">
+            <a:noFill/>
+          </a:ln>
+        </p:spPr>
+        <p:txBody>
+          <a:bodyPr/>
+          <a:p/>
+        </p:txBody>
+      </p:sp>
+      <p:sp>
+        <p:nvSpPr>
+          <p:cNvPr id="13" name="">
+            <a:extLst>
+              <a:ext uri="{FF2B5EF4-FFF2-40B4-BE49-F238E27FC236}">
+                <a16:creationId xmlns:a16="http://schemas.microsoft.com/office/drawing/2014/main" id="{88DEDAB4-3410-4DFB-B45E-21093285DC29}"/>
+              </a:ext>
+            </a:extLst>
+          </p:cNvPr>
+          <p:cNvSpPr>
+            <a:spLocks noGrp="1"/>
+          </p:cNvSpPr>
+          <p:nvPr/>
+        </p:nvSpPr>
+        <p:spPr>
+          <a:xfrm>
+            <a:off x="609600" y="3733800"/>
+            <a:ext cx="457200" cy="457200"/>
+          </a:xfrm>
+          <a:prstGeom prst="ellipse">
+            <a:avLst/>
+          </a:prstGeom>
+          <a:solidFill>
+            <a:srgbClr val="1D3A5F"/>
+          </a:solidFill>
+          <a:ln w="0">
+            <a:noFill/>
+          </a:ln>
+        </p:spPr>
+        <p:txBody>
+          <a:bodyPr/>
+          <a:p/>
+        </p:txBody>
+      </p:sp>
+      <p:sp>
+        <p:nvSpPr>
+          <p:cNvPr id="14" name="">
+            <a:extLst>
+              <a:ext uri="{FF2B5EF4-FFF2-40B4-BE49-F238E27FC236}">
+                <a16:creationId xmlns:a16="http://schemas.microsoft.com/office/drawing/2014/main" id="{E2F55AD4-312E-40BE-8405-29F4DBF3C7CD}"/>
+              </a:ext>
+            </a:extLst>
+          </p:cNvPr>
+          <p:cNvSpPr>
+            <a:spLocks noGrp="1"/>
+          </p:cNvSpPr>
+          <p:nvPr/>
+        </p:nvSpPr>
+        <p:spPr>
+          <a:xfrm>
+            <a:off x="704850" y="3771900"/>
+            <a:ext cx="381000" cy="400050"/>
+          </a:xfrm>
+          <a:prstGeom prst="rect">
+            <a:avLst/>
+          </a:prstGeom>
+          <a:noFill/>
+          <a:ln w="0">
+            <a:noFill/>
+          </a:ln>
+        </p:spPr>
+        <p:txBody>
+          <a:bodyPr>
+            <a:noAutofit/>
+          </a:bodyPr>
+          <a:lstStyle/>
+          <a:p>
+            <a:pPr>
+              <a:buNone/>
+              <a:defRPr sz="2025" b="1">
+                <a:solidFill>
+                  <a:srgbClr val="FFFFFF"/>
+                </a:solidFill>
+                <a:latin typeface="PingFang TC"/>
+                <a:ea typeface="PingFang TC"/>
+                <a:cs typeface="PingFang TC"/>
+              </a:defRPr>
+            </a:pPr>
+            <a:r>
+              <a:rPr sz="2025" b="1">
+                <a:solidFill>
+                  <a:srgbClr val="FFFFFF"/>
+                </a:solidFill>
+                <a:latin typeface="PingFang TC"/>
+                <a:ea typeface="PingFang TC"/>
+                <a:cs typeface="PingFang TC"/>
+              </a:rPr>
+              <a:t>2</a:t>
+            </a:r>
+          </a:p>
+        </p:txBody>
+      </p:sp>
+      <p:sp>
+        <p:nvSpPr>
+          <p:cNvPr id="15" name="">
+            <a:extLst>
+              <a:ext uri="{FF2B5EF4-FFF2-40B4-BE49-F238E27FC236}">
+                <a16:creationId xmlns:a16="http://schemas.microsoft.com/office/drawing/2014/main" id="{1CF083D0-1400-4ADC-BBBB-D83170A93F53}"/>
+              </a:ext>
+            </a:extLst>
+          </p:cNvPr>
+          <p:cNvSpPr>
+            <a:spLocks noGrp="1"/>
+          </p:cNvSpPr>
+          <p:nvPr/>
+        </p:nvSpPr>
+        <p:spPr>
+          <a:xfrm>
+            <a:off x="1381125" y="3676650"/>
+            <a:ext cx="3000375" cy="523875"/>
+          </a:xfrm>
+          <a:prstGeom prst="rect">
+            <a:avLst/>
+          </a:prstGeom>
+          <a:noFill/>
+          <a:ln w="0">
+            <a:noFill/>
+          </a:ln>
+        </p:spPr>
+        <p:txBody>
+          <a:bodyPr>
+            <a:noAutofit/>
+          </a:bodyPr>
+          <a:lstStyle/>
+          <a:p>
+            <a:pPr>
+              <a:buNone/>
+              <a:defRPr sz="2550" b="1">
+                <a:solidFill>
+                  <a:srgbClr val="121212"/>
+                </a:solidFill>
+                <a:latin typeface="PingFang TC"/>
+                <a:ea typeface="PingFang TC"/>
+                <a:cs typeface="PingFang TC"/>
+              </a:defRPr>
+            </a:pPr>
+            <a:r>
+              <a:rPr sz="2550" b="1">
+                <a:solidFill>
+                  <a:srgbClr val="121212"/>
+                </a:solidFill>
+                <a:latin typeface="PingFang TC"/>
+                <a:ea typeface="PingFang TC"/>
+                <a:cs typeface="PingFang TC"/>
+              </a:rPr>
+              <a:t>加 5–8 個來源</a:t>
+            </a:r>
+          </a:p>
+        </p:txBody>
+      </p:sp>
+      <p:sp>
+        <p:nvSpPr>
+          <p:cNvPr id="16" name="">
+            <a:extLst>
+              <a:ext uri="{FF2B5EF4-FFF2-40B4-BE49-F238E27FC236}">
+                <a16:creationId xmlns:a16="http://schemas.microsoft.com/office/drawing/2014/main" id="{5FF9CB42-8351-4870-83D3-39F83544CE1A}"/>
+              </a:ext>
+            </a:extLst>
+          </p:cNvPr>
+          <p:cNvSpPr>
+            <a:spLocks noGrp="1"/>
+          </p:cNvSpPr>
+          <p:nvPr/>
+        </p:nvSpPr>
+        <p:spPr>
+          <a:xfrm>
+            <a:off x="4695825" y="3581400"/>
+            <a:ext cx="6715125" cy="485775"/>
+          </a:xfrm>
+          <a:prstGeom prst="rect">
+            <a:avLst/>
+          </a:prstGeom>
+          <a:noFill/>
+          <a:ln w="0">
+            <a:noFill/>
+          </a:ln>
+        </p:spPr>
+        <p:txBody>
+          <a:bodyPr>
+            <a:noAutofit/>
+          </a:bodyPr>
+          <a:lstStyle/>
+          <a:p>
+            <a:pPr>
+              <a:buNone/>
+              <a:defRPr sz="2175" b="0">
+                <a:solidFill>
+                  <a:srgbClr val="121212"/>
+                </a:solidFill>
+                <a:latin typeface="PingFang TC"/>
+                <a:ea typeface="PingFang TC"/>
+                <a:cs typeface="PingFang TC"/>
+              </a:defRPr>
+            </a:pPr>
+            <a:r>
+              <a:rPr sz="2175" b="0">
+                <a:solidFill>
+                  <a:srgbClr val="121212"/>
+                </a:solidFill>
+                <a:latin typeface="PingFang TC"/>
+                <a:ea typeface="PingFang TC"/>
+                <a:cs typeface="PingFang TC"/>
+              </a:rPr>
+              <a:t>五層各至少一個</a:t>
+            </a:r>
+          </a:p>
+        </p:txBody>
+      </p:sp>
+      <p:sp>
+        <p:nvSpPr>
+          <p:cNvPr id="17" name="">
+            <a:extLst>
+              <a:ext uri="{FF2B5EF4-FFF2-40B4-BE49-F238E27FC236}">
+                <a16:creationId xmlns:a16="http://schemas.microsoft.com/office/drawing/2014/main" id="{E0780AF1-E146-481C-BBA1-1B66A161CC86}"/>
+              </a:ext>
+            </a:extLst>
+          </p:cNvPr>
+          <p:cNvSpPr>
+            <a:spLocks noGrp="1"/>
+          </p:cNvSpPr>
+          <p:nvPr/>
+        </p:nvSpPr>
+        <p:spPr>
+          <a:xfrm>
+            <a:off x="4695825" y="4057650"/>
+            <a:ext cx="6715125" cy="428625"/>
+          </a:xfrm>
+          <a:prstGeom prst="rect">
+            <a:avLst/>
+          </a:prstGeom>
+          <a:noFill/>
+          <a:ln w="0">
+            <a:noFill/>
+          </a:ln>
+        </p:spPr>
+        <p:txBody>
+          <a:bodyPr>
+            <a:noAutofit/>
+          </a:bodyPr>
+          <a:lstStyle/>
+          <a:p>
+            <a:pPr>
+              <a:buNone/>
+              <a:defRPr sz="1875" b="0">
+                <a:solidFill>
+                  <a:srgbClr val="626262"/>
+                </a:solidFill>
+                <a:latin typeface="PingFang TC"/>
+                <a:ea typeface="PingFang TC"/>
+                <a:cs typeface="PingFang TC"/>
+              </a:defRPr>
+            </a:pPr>
+            <a:r>
+              <a:rPr sz="1875" b="0">
+                <a:solidFill>
+                  <a:srgbClr val="626262"/>
+                </a:solidFill>
+                <a:latin typeface="PingFang TC"/>
+                <a:ea typeface="PingFang TC"/>
+                <a:cs typeface="PingFang TC"/>
+              </a:rPr>
+              <a:t>貼網址、上傳 PDF、貼 YouTube 都行</a:t>
+            </a:r>
+          </a:p>
+        </p:txBody>
+      </p:sp>
+      <p:sp>
+        <p:nvSpPr>
+          <p:cNvPr id="18" name="">
+            <a:extLst>
+              <a:ext uri="{FF2B5EF4-FFF2-40B4-BE49-F238E27FC236}">
+                <a16:creationId xmlns:a16="http://schemas.microsoft.com/office/drawing/2014/main" id="{65F52A88-2729-4AA8-969A-05036BD3EC9D}"/>
+              </a:ext>
+            </a:extLst>
+          </p:cNvPr>
+          <p:cNvSpPr>
+            <a:spLocks noGrp="1"/>
+          </p:cNvSpPr>
+          <p:nvPr/>
+        </p:nvSpPr>
+        <p:spPr>
+          <a:xfrm>
+            <a:off x="1381125" y="4591050"/>
+            <a:ext cx="10201275" cy="19050"/>
+          </a:xfrm>
+          <a:prstGeom prst="rect">
+            <a:avLst/>
+          </a:prstGeom>
+          <a:solidFill>
+            <a:srgbClr val="D9D5CF"/>
+          </a:solidFill>
+          <a:ln w="0">
+            <a:noFill/>
+          </a:ln>
+        </p:spPr>
+        <p:txBody>
+          <a:bodyPr/>
+          <a:p/>
+        </p:txBody>
+      </p:sp>
+      <p:sp>
+        <p:nvSpPr>
+          <p:cNvPr id="19" name="">
+            <a:extLst>
+              <a:ext uri="{FF2B5EF4-FFF2-40B4-BE49-F238E27FC236}">
+                <a16:creationId xmlns:a16="http://schemas.microsoft.com/office/drawing/2014/main" id="{22A1850A-3AA6-4697-82D3-07C737CCAC4E}"/>
+              </a:ext>
+            </a:extLst>
+          </p:cNvPr>
+          <p:cNvSpPr>
+            <a:spLocks noGrp="1"/>
+          </p:cNvSpPr>
+          <p:nvPr/>
+        </p:nvSpPr>
+        <p:spPr>
+          <a:xfrm>
+            <a:off x="609600" y="4933950"/>
+            <a:ext cx="457200" cy="457200"/>
+          </a:xfrm>
+          <a:prstGeom prst="ellipse">
+            <a:avLst/>
+          </a:prstGeom>
+          <a:solidFill>
+            <a:srgbClr val="E63946"/>
+          </a:solidFill>
+          <a:ln w="0">
+            <a:noFill/>
+          </a:ln>
+        </p:spPr>
+        <p:txBody>
+          <a:bodyPr/>
+          <a:p/>
+        </p:txBody>
+      </p:sp>
+      <p:sp>
+        <p:nvSpPr>
+          <p:cNvPr id="20" name="">
+            <a:extLst>
+              <a:ext uri="{FF2B5EF4-FFF2-40B4-BE49-F238E27FC236}">
+                <a16:creationId xmlns:a16="http://schemas.microsoft.com/office/drawing/2014/main" id="{6D381400-56EE-4745-832F-98B10DA7CE86}"/>
+              </a:ext>
+            </a:extLst>
+          </p:cNvPr>
+          <p:cNvSpPr>
+            <a:spLocks noGrp="1"/>
+          </p:cNvSpPr>
+          <p:nvPr/>
+        </p:nvSpPr>
+        <p:spPr>
+          <a:xfrm>
+            <a:off x="704850" y="4972050"/>
+            <a:ext cx="381000" cy="400050"/>
+          </a:xfrm>
+          <a:prstGeom prst="rect">
+            <a:avLst/>
+          </a:prstGeom>
+          <a:noFill/>
+          <a:ln w="0">
+            <a:noFill/>
+          </a:ln>
+        </p:spPr>
+        <p:txBody>
+          <a:bodyPr>
+            <a:noAutofit/>
+          </a:bodyPr>
+          <a:lstStyle/>
+          <a:p>
+            <a:pPr>
+              <a:buNone/>
+              <a:defRPr sz="2025" b="1">
+                <a:solidFill>
+                  <a:srgbClr val="FFFFFF"/>
+                </a:solidFill>
+                <a:latin typeface="PingFang TC"/>
+                <a:ea typeface="PingFang TC"/>
+                <a:cs typeface="PingFang TC"/>
+              </a:defRPr>
+            </a:pPr>
+            <a:r>
+              <a:rPr sz="2025" b="1">
+                <a:solidFill>
+                  <a:srgbClr val="FFFFFF"/>
+                </a:solidFill>
+                <a:latin typeface="PingFang TC"/>
+                <a:ea typeface="PingFang TC"/>
+                <a:cs typeface="PingFang TC"/>
+              </a:rPr>
+              <a:t>3</a:t>
+            </a:r>
+          </a:p>
+        </p:txBody>
+      </p:sp>
+      <p:sp>
+        <p:nvSpPr>
+          <p:cNvPr id="21" name="">
+            <a:extLst>
+              <a:ext uri="{FF2B5EF4-FFF2-40B4-BE49-F238E27FC236}">
+                <a16:creationId xmlns:a16="http://schemas.microsoft.com/office/drawing/2014/main" id="{DFE1E411-0E18-47D7-B903-0FC5796953C8}"/>
+              </a:ext>
+            </a:extLst>
+          </p:cNvPr>
+          <p:cNvSpPr>
+            <a:spLocks noGrp="1"/>
+          </p:cNvSpPr>
+          <p:nvPr/>
+        </p:nvSpPr>
+        <p:spPr>
+          <a:xfrm>
+            <a:off x="1381125" y="4876800"/>
+            <a:ext cx="3000375" cy="523875"/>
+          </a:xfrm>
+          <a:prstGeom prst="rect">
+            <a:avLst/>
+          </a:prstGeom>
+          <a:noFill/>
+          <a:ln w="0">
+            <a:noFill/>
+          </a:ln>
+        </p:spPr>
+        <p:txBody>
+          <a:bodyPr>
+            <a:noAutofit/>
+          </a:bodyPr>
+          <a:lstStyle/>
+          <a:p>
+            <a:pPr>
+              <a:buNone/>
+              <a:defRPr sz="2550" b="1">
+                <a:solidFill>
+                  <a:srgbClr val="121212"/>
+                </a:solidFill>
+                <a:latin typeface="PingFang TC"/>
+                <a:ea typeface="PingFang TC"/>
+                <a:cs typeface="PingFang TC"/>
+              </a:defRPr>
+            </a:pPr>
+            <a:r>
+              <a:rPr sz="2550" b="1">
+                <a:solidFill>
+                  <a:srgbClr val="121212"/>
+                </a:solidFill>
+                <a:latin typeface="PingFang TC"/>
+                <a:ea typeface="PingFang TC"/>
+                <a:cs typeface="PingFang TC"/>
+              </a:rPr>
+              <a:t>貼六題、要引用</a:t>
+            </a:r>
+          </a:p>
+        </p:txBody>
+      </p:sp>
+      <p:sp>
+        <p:nvSpPr>
+          <p:cNvPr id="22" name="">
+            <a:extLst>
+              <a:ext uri="{FF2B5EF4-FFF2-40B4-BE49-F238E27FC236}">
+                <a16:creationId xmlns:a16="http://schemas.microsoft.com/office/drawing/2014/main" id="{B0C933AB-3307-4C37-8E26-A9F979169F9A}"/>
+              </a:ext>
+            </a:extLst>
+          </p:cNvPr>
+          <p:cNvSpPr>
+            <a:spLocks noGrp="1"/>
+          </p:cNvSpPr>
+          <p:nvPr/>
+        </p:nvSpPr>
+        <p:spPr>
+          <a:xfrm>
+            <a:off x="4695825" y="4781550"/>
+            <a:ext cx="6715125" cy="485775"/>
+          </a:xfrm>
+          <a:prstGeom prst="rect">
+            <a:avLst/>
+          </a:prstGeom>
+          <a:noFill/>
+          <a:ln w="0">
+            <a:noFill/>
+          </a:ln>
+        </p:spPr>
+        <p:txBody>
+          <a:bodyPr>
+            <a:noAutofit/>
+          </a:bodyPr>
+          <a:lstStyle/>
+          <a:p>
+            <a:pPr>
+              <a:buNone/>
+              <a:defRPr sz="2175" b="0">
+                <a:solidFill>
+                  <a:srgbClr val="121212"/>
+                </a:solidFill>
+                <a:latin typeface="PingFang TC"/>
+                <a:ea typeface="PingFang TC"/>
+                <a:cs typeface="PingFang TC"/>
+              </a:defRPr>
+            </a:pPr>
+            <a:r>
+              <a:rPr sz="2175" b="0">
+                <a:solidFill>
+                  <a:srgbClr val="121212"/>
+                </a:solidFill>
+                <a:latin typeface="PingFang TC"/>
+                <a:ea typeface="PingFang TC"/>
+                <a:cs typeface="PingFang TC"/>
+              </a:rPr>
+              <a:t>按鈕複製六題 → 在對話框 ⌘V 貼上，一題一題問</a:t>
+            </a:r>
+          </a:p>
+        </p:txBody>
+      </p:sp>
+      <p:sp>
+        <p:nvSpPr>
+          <p:cNvPr id="23" name="">
+            <a:extLst>
+              <a:ext uri="{FF2B5EF4-FFF2-40B4-BE49-F238E27FC236}">
+                <a16:creationId xmlns:a16="http://schemas.microsoft.com/office/drawing/2014/main" id="{E1963D10-9201-4BF7-9F5D-46E0BE45C085}"/>
+              </a:ext>
+            </a:extLst>
+          </p:cNvPr>
+          <p:cNvSpPr>
+            <a:spLocks noGrp="1"/>
+          </p:cNvSpPr>
+          <p:nvPr/>
+        </p:nvSpPr>
+        <p:spPr>
+          <a:xfrm>
+            <a:off x="4695825" y="5257800"/>
+            <a:ext cx="6715125" cy="428625"/>
+          </a:xfrm>
+          <a:prstGeom prst="rect">
+            <a:avLst/>
+          </a:prstGeom>
+          <a:noFill/>
+          <a:ln w="0">
+            <a:noFill/>
+          </a:ln>
+        </p:spPr>
+        <p:txBody>
+          <a:bodyPr>
+            <a:noAutofit/>
+          </a:bodyPr>
+          <a:lstStyle/>
+          <a:p>
+            <a:pPr>
+              <a:buNone/>
+              <a:defRPr sz="1875" b="0">
+                <a:solidFill>
+                  <a:srgbClr val="626262"/>
+                </a:solidFill>
+                <a:latin typeface="PingFang TC"/>
+                <a:ea typeface="PingFang TC"/>
+                <a:cs typeface="PingFang TC"/>
+              </a:defRPr>
+            </a:pPr>
+            <a:r>
+              <a:rPr sz="1875" b="0">
+                <a:solidFill>
+                  <a:srgbClr val="626262"/>
+                </a:solidFill>
+                <a:latin typeface="PingFang TC"/>
+                <a:ea typeface="PingFang TC"/>
+                <a:cs typeface="PingFang TC"/>
+              </a:rPr>
+              <a:t>沒引用＝回去補來源，不是抄下來</a:t>
             </a:r>
           </a:p>
         </p:txBody>
@@ -19112,10 +19335,10 @@
       <p:grpSpPr/>
       <p:sp>
         <p:nvSpPr>
-          <p:cNvPr id="16" name="">
-            <a:extLst>
-              <a:ext uri="{FF2B5EF4-FFF2-40B4-BE49-F238E27FC236}">
-                <a16:creationId xmlns:a16="http://schemas.microsoft.com/office/drawing/2014/main" id="{FAD2CC10-49A9-4B2F-A703-CFEEA1744905}"/>
+          <p:cNvPr id="21" name="">
+            <a:extLst>
+              <a:ext uri="{FF2B5EF4-FFF2-40B4-BE49-F238E27FC236}">
+                <a16:creationId xmlns:a16="http://schemas.microsoft.com/office/drawing/2014/main" id="{8814B1AB-A708-463D-BCA9-62BBF766B05D}"/>
               </a:ext>
             </a:extLst>
           </p:cNvPr>
@@ -19173,7 +19396,7 @@
           <p:cNvPr id="2" name="">
             <a:extLst>
               <a:ext uri="{FF2B5EF4-FFF2-40B4-BE49-F238E27FC236}">
-                <a16:creationId xmlns:a16="http://schemas.microsoft.com/office/drawing/2014/main" id="{5D6271D0-F42F-410F-8C54-D04BF509A816}"/>
+                <a16:creationId xmlns:a16="http://schemas.microsoft.com/office/drawing/2014/main" id="{C0E469DC-8B6A-455A-8544-6038EB372150}"/>
               </a:ext>
             </a:extLst>
           </p:cNvPr>
@@ -19221,7 +19444,7 @@
                 <a:ea typeface="PingFang TC"/>
                 <a:cs typeface="PingFang TC"/>
               </a:rPr>
-              <a:t>卡 3 問 AI：要三個機會</a:t>
+              <a:t>NotebookLM 的六題階梯</a:t>
             </a:r>
           </a:p>
         </p:txBody>
@@ -19231,7 +19454,7 @@
           <p:cNvPr id="3" name="">
             <a:extLst>
               <a:ext uri="{FF2B5EF4-FFF2-40B4-BE49-F238E27FC236}">
-                <a16:creationId xmlns:a16="http://schemas.microsoft.com/office/drawing/2014/main" id="{6CF9C021-668F-4EC2-B07A-968DC09FE65A}"/>
+                <a16:creationId xmlns:a16="http://schemas.microsoft.com/office/drawing/2014/main" id="{987ED678-6582-47CC-8ECE-D90184EAB855}"/>
               </a:ext>
             </a:extLst>
           </p:cNvPr>
@@ -19279,7 +19502,7 @@
                 <a:ea typeface="PingFang TC"/>
                 <a:cs typeface="PingFang TC"/>
               </a:rPr>
-              <a:t>app 會把卡 2 有來源的困難自動附在問題後面；沒做卡 2 會被擋</a:t>
+              <a:t>從大到小、從現況到變化；答案貼回卡 2 時每點留（來源：XX）</a:t>
             </a:r>
           </a:p>
         </p:txBody>
@@ -19289,7 +19512,7 @@
           <p:cNvPr id="4" name="">
             <a:extLst>
               <a:ext uri="{FF2B5EF4-FFF2-40B4-BE49-F238E27FC236}">
-                <a16:creationId xmlns:a16="http://schemas.microsoft.com/office/drawing/2014/main" id="{7B432BB0-E85A-4B0B-9ED0-9F8DA0A12774}"/>
+                <a16:creationId xmlns:a16="http://schemas.microsoft.com/office/drawing/2014/main" id="{53FB0A49-91F3-4CAC-A9A3-15D1937610B3}"/>
               </a:ext>
             </a:extLst>
           </p:cNvPr>
@@ -19323,7 +19546,7 @@
           <p:cNvPr id="5" name="">
             <a:extLst>
               <a:ext uri="{FF2B5EF4-FFF2-40B4-BE49-F238E27FC236}">
-                <a16:creationId xmlns:a16="http://schemas.microsoft.com/office/drawing/2014/main" id="{6F79744F-70CA-4C57-B905-36B2B1147498}"/>
+                <a16:creationId xmlns:a16="http://schemas.microsoft.com/office/drawing/2014/main" id="{121EC846-19D4-4202-B8AD-BA33F7D1158E}"/>
               </a:ext>
             </a:extLst>
           </p:cNvPr>
@@ -19381,7 +19604,7 @@
           <p:cNvPr id="6" name="">
             <a:extLst>
               <a:ext uri="{FF2B5EF4-FFF2-40B4-BE49-F238E27FC236}">
-                <a16:creationId xmlns:a16="http://schemas.microsoft.com/office/drawing/2014/main" id="{6E17F4AE-5BC6-4D0B-9AEF-89BB49383766}"/>
+                <a16:creationId xmlns:a16="http://schemas.microsoft.com/office/drawing/2014/main" id="{7997F8E8-68FD-4DA3-8C4D-0FEE0D6A0C23}"/>
               </a:ext>
             </a:extLst>
           </p:cNvPr>
@@ -19429,7 +19652,7 @@
                 <a:ea typeface="PingFang TC"/>
                 <a:cs typeface="PingFang TC"/>
               </a:rPr>
-              <a:t>17 / 22</a:t>
+              <a:t>17 / 23</a:t>
             </a:r>
           </a:p>
         </p:txBody>
@@ -19439,28 +19662,28 @@
           <p:cNvPr id="7" name="">
             <a:extLst>
               <a:ext uri="{FF2B5EF4-FFF2-40B4-BE49-F238E27FC236}">
-                <a16:creationId xmlns:a16="http://schemas.microsoft.com/office/drawing/2014/main" id="{050C16C1-4F34-4C61-A4CE-D19D4A8D8522}"/>
-              </a:ext>
-            </a:extLst>
-          </p:cNvPr>
-          <p:cNvSpPr>
-            <a:spLocks noGrp="1"/>
-          </p:cNvSpPr>
-          <p:nvPr/>
-        </p:nvSpPr>
-        <p:spPr>
-          <a:xfrm>
-            <a:off x="609600" y="2390775"/>
-            <a:ext cx="6429375" cy="3019425"/>
-          </a:xfrm>
-          <a:prstGeom prst="rect">
-            <a:avLst/>
-          </a:prstGeom>
-          <a:solidFill>
-            <a:srgbClr val="FFFFFF"/>
-          </a:solidFill>
-          <a:ln w="0">
-            <a:noFill/>
+                <a16:creationId xmlns:a16="http://schemas.microsoft.com/office/drawing/2014/main" id="{DF09DED1-3E9E-4B14-904B-7645F2EF77A9}"/>
+              </a:ext>
+            </a:extLst>
+          </p:cNvPr>
+          <p:cNvSpPr>
+            <a:spLocks noGrp="1"/>
+          </p:cNvSpPr>
+          <p:nvPr/>
+        </p:nvSpPr>
+        <p:spPr>
+          <a:xfrm>
+            <a:off x="628650" y="2314575"/>
+            <a:ext cx="228600" cy="228600"/>
+          </a:xfrm>
+          <a:prstGeom prst="rect">
+            <a:avLst/>
+          </a:prstGeom>
+          <a:noFill/>
+          <a:ln w="19050">
+            <a:solidFill>
+              <a:srgbClr val="1D3A5F"/>
+            </a:solidFill>
           </a:ln>
         </p:spPr>
         <p:txBody>
@@ -19473,28 +19696,86 @@
           <p:cNvPr id="8" name="">
             <a:extLst>
               <a:ext uri="{FF2B5EF4-FFF2-40B4-BE49-F238E27FC236}">
-                <a16:creationId xmlns:a16="http://schemas.microsoft.com/office/drawing/2014/main" id="{5EF92AF1-462B-4BBA-9616-A393CA3B2934}"/>
-              </a:ext>
-            </a:extLst>
-          </p:cNvPr>
-          <p:cNvSpPr>
-            <a:spLocks noGrp="1"/>
-          </p:cNvSpPr>
-          <p:nvPr/>
-        </p:nvSpPr>
-        <p:spPr>
-          <a:xfrm>
-            <a:off x="609600" y="2390775"/>
-            <a:ext cx="66675" cy="3019425"/>
-          </a:xfrm>
-          <a:prstGeom prst="rect">
-            <a:avLst/>
-          </a:prstGeom>
-          <a:solidFill>
-            <a:srgbClr val="E63946"/>
-          </a:solidFill>
-          <a:ln w="0">
-            <a:noFill/>
+                <a16:creationId xmlns:a16="http://schemas.microsoft.com/office/drawing/2014/main" id="{C9CCA19B-DA36-4E1C-AA16-5520D21E050D}"/>
+              </a:ext>
+            </a:extLst>
+          </p:cNvPr>
+          <p:cNvSpPr>
+            <a:spLocks noGrp="1"/>
+          </p:cNvSpPr>
+          <p:nvPr/>
+        </p:nvSpPr>
+        <p:spPr>
+          <a:xfrm>
+            <a:off x="1085850" y="2238375"/>
+            <a:ext cx="10382250" cy="485775"/>
+          </a:xfrm>
+          <a:prstGeom prst="rect">
+            <a:avLst/>
+          </a:prstGeom>
+          <a:noFill/>
+          <a:ln w="0">
+            <a:noFill/>
+          </a:ln>
+        </p:spPr>
+        <p:txBody>
+          <a:bodyPr>
+            <a:noAutofit/>
+          </a:bodyPr>
+          <a:lstStyle/>
+          <a:p>
+            <a:pPr>
+              <a:buNone/>
+              <a:defRPr sz="2100" b="0">
+                <a:solidFill>
+                  <a:srgbClr val="121212"/>
+                </a:solidFill>
+                <a:latin typeface="PingFang TC"/>
+                <a:ea typeface="PingFang TC"/>
+                <a:cs typeface="PingFang TC"/>
+              </a:defRPr>
+            </a:pPr>
+            <a:r>
+              <a:rPr sz="2100" b="0">
+                <a:solidFill>
+                  <a:srgbClr val="121212"/>
+                </a:solidFill>
+                <a:latin typeface="PingFang TC"/>
+                <a:ea typeface="PingFang TC"/>
+                <a:cs typeface="PingFang TC"/>
+              </a:rPr>
+              <a:t>① 這一行在台灣有多大？多少家、多少人、多少錢？</a:t>
+            </a:r>
+          </a:p>
+        </p:txBody>
+      </p:sp>
+      <p:sp>
+        <p:nvSpPr>
+          <p:cNvPr id="9" name="">
+            <a:extLst>
+              <a:ext uri="{FF2B5EF4-FFF2-40B4-BE49-F238E27FC236}">
+                <a16:creationId xmlns:a16="http://schemas.microsoft.com/office/drawing/2014/main" id="{003F9287-4810-43E9-B75B-F3D6F55FB1F1}"/>
+              </a:ext>
+            </a:extLst>
+          </p:cNvPr>
+          <p:cNvSpPr>
+            <a:spLocks noGrp="1"/>
+          </p:cNvSpPr>
+          <p:nvPr/>
+        </p:nvSpPr>
+        <p:spPr>
+          <a:xfrm>
+            <a:off x="628650" y="2857500"/>
+            <a:ext cx="228600" cy="228600"/>
+          </a:xfrm>
+          <a:prstGeom prst="rect">
+            <a:avLst/>
+          </a:prstGeom>
+          <a:noFill/>
+          <a:ln w="19050">
+            <a:solidFill>
+              <a:srgbClr val="1D3A5F"/>
+            </a:solidFill>
           </a:ln>
         </p:spPr>
         <p:txBody>
@@ -19504,22 +19785,22 @@
       </p:sp>
       <p:sp>
         <p:nvSpPr>
-          <p:cNvPr id="9" name="">
-            <a:extLst>
-              <a:ext uri="{FF2B5EF4-FFF2-40B4-BE49-F238E27FC236}">
-                <a16:creationId xmlns:a16="http://schemas.microsoft.com/office/drawing/2014/main" id="{C1A52D7E-E401-4F1A-912A-DD72A311A838}"/>
-              </a:ext>
-            </a:extLst>
-          </p:cNvPr>
-          <p:cNvSpPr>
-            <a:spLocks noGrp="1"/>
-          </p:cNvSpPr>
-          <p:nvPr/>
-        </p:nvSpPr>
-        <p:spPr>
-          <a:xfrm>
-            <a:off x="904875" y="2590800"/>
-            <a:ext cx="5810250" cy="342900"/>
+          <p:cNvPr id="10" name="">
+            <a:extLst>
+              <a:ext uri="{FF2B5EF4-FFF2-40B4-BE49-F238E27FC236}">
+                <a16:creationId xmlns:a16="http://schemas.microsoft.com/office/drawing/2014/main" id="{D95D37CA-5A02-4321-BEC7-D57741D66A22}"/>
+              </a:ext>
+            </a:extLst>
+          </p:cNvPr>
+          <p:cNvSpPr>
+            <a:spLocks noGrp="1"/>
+          </p:cNvSpPr>
+          <p:nvPr/>
+        </p:nvSpPr>
+        <p:spPr>
+          <a:xfrm>
+            <a:off x="1085850" y="2781300"/>
+            <a:ext cx="10382250" cy="485775"/>
           </a:xfrm>
           <a:prstGeom prst="rect">
             <a:avLst/>
@@ -19537,47 +19818,81 @@
           <a:p>
             <a:pPr>
               <a:buNone/>
-              <a:defRPr sz="1500" b="1">
-                <a:solidFill>
-                  <a:srgbClr val="E63946"/>
-                </a:solidFill>
-                <a:latin typeface="PingFang TC"/>
-                <a:ea typeface="PingFang TC"/>
-                <a:cs typeface="PingFang TC"/>
-              </a:defRPr>
-            </a:pPr>
-            <a:r>
-              <a:rPr sz="1500" b="1">
-                <a:solidFill>
-                  <a:srgbClr val="E63946"/>
-                </a:solidFill>
-                <a:latin typeface="PingFang TC"/>
-                <a:ea typeface="PingFang TC"/>
-                <a:cs typeface="PingFang TC"/>
-              </a:rPr>
-              <a:t>問題長這樣</a:t>
-            </a:r>
-          </a:p>
-        </p:txBody>
-      </p:sp>
-      <p:sp>
-        <p:nvSpPr>
-          <p:cNvPr id="10" name="">
-            <a:extLst>
-              <a:ext uri="{FF2B5EF4-FFF2-40B4-BE49-F238E27FC236}">
-                <a16:creationId xmlns:a16="http://schemas.microsoft.com/office/drawing/2014/main" id="{C2659FCB-3F76-4A54-B0C6-739F0F74006E}"/>
-              </a:ext>
-            </a:extLst>
-          </p:cNvPr>
-          <p:cNvSpPr>
-            <a:spLocks noGrp="1"/>
-          </p:cNvSpPr>
-          <p:nvPr/>
-        </p:nvSpPr>
-        <p:spPr>
-          <a:xfrm>
-            <a:off x="904875" y="3162300"/>
-            <a:ext cx="5857875" cy="1962150"/>
+              <a:defRPr sz="2100" b="0">
+                <a:solidFill>
+                  <a:srgbClr val="121212"/>
+                </a:solidFill>
+                <a:latin typeface="PingFang TC"/>
+                <a:ea typeface="PingFang TC"/>
+                <a:cs typeface="PingFang TC"/>
+              </a:defRPr>
+            </a:pPr>
+            <a:r>
+              <a:rPr sz="2100" b="0">
+                <a:solidFill>
+                  <a:srgbClr val="121212"/>
+                </a:solidFill>
+                <a:latin typeface="PingFang TC"/>
+                <a:ea typeface="PingFang TC"/>
+                <a:cs typeface="PingFang TC"/>
+              </a:rPr>
+              <a:t>② 誰在賺錢？錢從誰手上流到誰手上？</a:t>
+            </a:r>
+          </a:p>
+        </p:txBody>
+      </p:sp>
+      <p:sp>
+        <p:nvSpPr>
+          <p:cNvPr id="11" name="">
+            <a:extLst>
+              <a:ext uri="{FF2B5EF4-FFF2-40B4-BE49-F238E27FC236}">
+                <a16:creationId xmlns:a16="http://schemas.microsoft.com/office/drawing/2014/main" id="{5977A7AB-2E6D-4A61-8127-FEBF350790E8}"/>
+              </a:ext>
+            </a:extLst>
+          </p:cNvPr>
+          <p:cNvSpPr>
+            <a:spLocks noGrp="1"/>
+          </p:cNvSpPr>
+          <p:nvPr/>
+        </p:nvSpPr>
+        <p:spPr>
+          <a:xfrm>
+            <a:off x="628650" y="3400425"/>
+            <a:ext cx="228600" cy="228600"/>
+          </a:xfrm>
+          <a:prstGeom prst="rect">
+            <a:avLst/>
+          </a:prstGeom>
+          <a:noFill/>
+          <a:ln w="19050">
+            <a:solidFill>
+              <a:srgbClr val="1D3A5F"/>
+            </a:solidFill>
+          </a:ln>
+        </p:spPr>
+        <p:txBody>
+          <a:bodyPr/>
+          <a:p/>
+        </p:txBody>
+      </p:sp>
+      <p:sp>
+        <p:nvSpPr>
+          <p:cNvPr id="12" name="">
+            <a:extLst>
+              <a:ext uri="{FF2B5EF4-FFF2-40B4-BE49-F238E27FC236}">
+                <a16:creationId xmlns:a16="http://schemas.microsoft.com/office/drawing/2014/main" id="{08A375F9-ED04-4364-B44C-40FCBDA24749}"/>
+              </a:ext>
+            </a:extLst>
+          </p:cNvPr>
+          <p:cNvSpPr>
+            <a:spLocks noGrp="1"/>
+          </p:cNvSpPr>
+          <p:nvPr/>
+        </p:nvSpPr>
+        <p:spPr>
+          <a:xfrm>
+            <a:off x="1085850" y="3324225"/>
+            <a:ext cx="10382250" cy="485775"/>
           </a:xfrm>
           <a:prstGeom prst="rect">
             <a:avLst/>
@@ -19593,21 +19908,19 @@
           </a:bodyPr>
           <a:lstStyle/>
           <a:p>
-            <a:r>
-              <a:rPr sz="2700" b="1">
+            <a:pPr>
+              <a:buNone/>
+              <a:defRPr sz="2100" b="0">
                 <a:solidFill>
                   <a:srgbClr val="121212"/>
                 </a:solidFill>
                 <a:latin typeface="PingFang TC"/>
                 <a:ea typeface="PingFang TC"/>
                 <a:cs typeface="PingFang TC"/>
-              </a:rPr>
-              <a:t>根據以下有來源的困難，</a:t>
-            </a:r>
-          </a:p>
-          <a:p>
-            <a:r>
-              <a:rPr sz="2700" b="1">
+              </a:defRPr>
+            </a:pPr>
+            <a:r>
+              <a:rPr sz="2100" b="0">
                 <a:solidFill>
                   <a:srgbClr val="121212"/>
                 </a:solidFill>
@@ -19615,29 +19928,63 @@
                 <a:ea typeface="PingFang TC"/>
                 <a:cs typeface="PingFang TC"/>
               </a:rPr>
-              <a:t>列三個適合小團隊切入的機會。</a:t>
-            </a:r>
-          </a:p>
-        </p:txBody>
-      </p:sp>
-      <p:sp>
-        <p:nvSpPr>
-          <p:cNvPr id="11" name="">
-            <a:extLst>
-              <a:ext uri="{FF2B5EF4-FFF2-40B4-BE49-F238E27FC236}">
-                <a16:creationId xmlns:a16="http://schemas.microsoft.com/office/drawing/2014/main" id="{7C18F928-A58F-4CEC-B00E-8B67AECA04F5}"/>
-              </a:ext>
-            </a:extLst>
-          </p:cNvPr>
-          <p:cNvSpPr>
-            <a:spLocks noGrp="1"/>
-          </p:cNvSpPr>
-          <p:nvPr/>
-        </p:nvSpPr>
-        <p:spPr>
-          <a:xfrm>
-            <a:off x="7620000" y="2428875"/>
-            <a:ext cx="3790950" cy="438150"/>
+              <a:t>③ 業者最常被抱怨、自己最常抱怨的三件事？</a:t>
+            </a:r>
+          </a:p>
+        </p:txBody>
+      </p:sp>
+      <p:sp>
+        <p:nvSpPr>
+          <p:cNvPr id="13" name="">
+            <a:extLst>
+              <a:ext uri="{FF2B5EF4-FFF2-40B4-BE49-F238E27FC236}">
+                <a16:creationId xmlns:a16="http://schemas.microsoft.com/office/drawing/2014/main" id="{9A03FFED-24D3-4EA6-9F40-56F24BF5E4F0}"/>
+              </a:ext>
+            </a:extLst>
+          </p:cNvPr>
+          <p:cNvSpPr>
+            <a:spLocks noGrp="1"/>
+          </p:cNvSpPr>
+          <p:nvPr/>
+        </p:nvSpPr>
+        <p:spPr>
+          <a:xfrm>
+            <a:off x="628650" y="3943350"/>
+            <a:ext cx="228600" cy="228600"/>
+          </a:xfrm>
+          <a:prstGeom prst="rect">
+            <a:avLst/>
+          </a:prstGeom>
+          <a:noFill/>
+          <a:ln w="19050">
+            <a:solidFill>
+              <a:srgbClr val="1D3A5F"/>
+            </a:solidFill>
+          </a:ln>
+        </p:spPr>
+        <p:txBody>
+          <a:bodyPr/>
+          <a:p/>
+        </p:txBody>
+      </p:sp>
+      <p:sp>
+        <p:nvSpPr>
+          <p:cNvPr id="14" name="">
+            <a:extLst>
+              <a:ext uri="{FF2B5EF4-FFF2-40B4-BE49-F238E27FC236}">
+                <a16:creationId xmlns:a16="http://schemas.microsoft.com/office/drawing/2014/main" id="{E595014F-654E-4514-9F8B-AE80342684F5}"/>
+              </a:ext>
+            </a:extLst>
+          </p:cNvPr>
+          <p:cNvSpPr>
+            <a:spLocks noGrp="1"/>
+          </p:cNvSpPr>
+          <p:nvPr/>
+        </p:nvSpPr>
+        <p:spPr>
+          <a:xfrm>
+            <a:off x="1085850" y="3867150"/>
+            <a:ext cx="10382250" cy="485775"/>
           </a:xfrm>
           <a:prstGeom prst="rect">
             <a:avLst/>
@@ -19655,47 +20002,81 @@
           <a:p>
             <a:pPr>
               <a:buNone/>
-              <a:defRPr sz="1800" b="1">
-                <a:solidFill>
-                  <a:srgbClr val="E63946"/>
-                </a:solidFill>
-                <a:latin typeface="PingFang TC"/>
-                <a:ea typeface="PingFang TC"/>
-                <a:cs typeface="PingFang TC"/>
-              </a:defRPr>
-            </a:pPr>
-            <a:r>
-              <a:rPr sz="1800" b="1">
-                <a:solidFill>
-                  <a:srgbClr val="E63946"/>
-                </a:solidFill>
-                <a:latin typeface="PingFang TC"/>
-                <a:ea typeface="PingFang TC"/>
-                <a:cs typeface="PingFang TC"/>
-              </a:rPr>
-              <a:t>每個機會要寫</a:t>
-            </a:r>
-          </a:p>
-        </p:txBody>
-      </p:sp>
-      <p:sp>
-        <p:nvSpPr>
-          <p:cNvPr id="12" name="">
-            <a:extLst>
-              <a:ext uri="{FF2B5EF4-FFF2-40B4-BE49-F238E27FC236}">
-                <a16:creationId xmlns:a16="http://schemas.microsoft.com/office/drawing/2014/main" id="{CA261E7D-3F50-4CDF-BA4D-9BDCEA023C9F}"/>
-              </a:ext>
-            </a:extLst>
-          </p:cNvPr>
-          <p:cNvSpPr>
-            <a:spLocks noGrp="1"/>
-          </p:cNvSpPr>
-          <p:nvPr/>
-        </p:nvSpPr>
-        <p:spPr>
-          <a:xfrm>
-            <a:off x="7620000" y="3019425"/>
-            <a:ext cx="3771900" cy="571500"/>
+              <a:defRPr sz="2100" b="0">
+                <a:solidFill>
+                  <a:srgbClr val="121212"/>
+                </a:solidFill>
+                <a:latin typeface="PingFang TC"/>
+                <a:ea typeface="PingFang TC"/>
+                <a:cs typeface="PingFang TC"/>
+              </a:defRPr>
+            </a:pPr>
+            <a:r>
+              <a:rPr sz="2100" b="0">
+                <a:solidFill>
+                  <a:srgbClr val="121212"/>
+                </a:solidFill>
+                <a:latin typeface="PingFang TC"/>
+                <a:ea typeface="PingFang TC"/>
+                <a:cs typeface="PingFang TC"/>
+              </a:rPr>
+              <a:t>④ 過去三年什麼變了？（缺工、平台、法規、AI）</a:t>
+            </a:r>
+          </a:p>
+        </p:txBody>
+      </p:sp>
+      <p:sp>
+        <p:nvSpPr>
+          <p:cNvPr id="15" name="">
+            <a:extLst>
+              <a:ext uri="{FF2B5EF4-FFF2-40B4-BE49-F238E27FC236}">
+                <a16:creationId xmlns:a16="http://schemas.microsoft.com/office/drawing/2014/main" id="{BA26016B-DE2B-4C47-9F38-B86019D4A583}"/>
+              </a:ext>
+            </a:extLst>
+          </p:cNvPr>
+          <p:cNvSpPr>
+            <a:spLocks noGrp="1"/>
+          </p:cNvSpPr>
+          <p:nvPr/>
+        </p:nvSpPr>
+        <p:spPr>
+          <a:xfrm>
+            <a:off x="628650" y="4486275"/>
+            <a:ext cx="228600" cy="228600"/>
+          </a:xfrm>
+          <a:prstGeom prst="rect">
+            <a:avLst/>
+          </a:prstGeom>
+          <a:noFill/>
+          <a:ln w="19050">
+            <a:solidFill>
+              <a:srgbClr val="E63946"/>
+            </a:solidFill>
+          </a:ln>
+        </p:spPr>
+        <p:txBody>
+          <a:bodyPr/>
+          <a:p/>
+        </p:txBody>
+      </p:sp>
+      <p:sp>
+        <p:nvSpPr>
+          <p:cNvPr id="16" name="">
+            <a:extLst>
+              <a:ext uri="{FF2B5EF4-FFF2-40B4-BE49-F238E27FC236}">
+                <a16:creationId xmlns:a16="http://schemas.microsoft.com/office/drawing/2014/main" id="{60A61946-1B30-4F82-8020-4EB887FFFF31}"/>
+              </a:ext>
+            </a:extLst>
+          </p:cNvPr>
+          <p:cNvSpPr>
+            <a:spLocks noGrp="1"/>
+          </p:cNvSpPr>
+          <p:nvPr/>
+        </p:nvSpPr>
+        <p:spPr>
+          <a:xfrm>
+            <a:off x="1085850" y="4410075"/>
+            <a:ext cx="10382250" cy="485775"/>
           </a:xfrm>
           <a:prstGeom prst="rect">
             <a:avLst/>
@@ -19731,38 +20112,38 @@
                 <a:ea typeface="PingFang TC"/>
                 <a:cs typeface="PingFang TC"/>
               </a:rPr>
-              <a:t>解誰的哪個困難？第一個會付錢的人是誰？</a:t>
-            </a:r>
-          </a:p>
-        </p:txBody>
-      </p:sp>
-      <p:sp>
-        <p:nvSpPr>
-          <p:cNvPr id="13" name="">
-            <a:extLst>
-              <a:ext uri="{FF2B5EF4-FFF2-40B4-BE49-F238E27FC236}">
-                <a16:creationId xmlns:a16="http://schemas.microsoft.com/office/drawing/2014/main" id="{39D6E7C0-AA95-4301-9EC4-3A9BBA345C59}"/>
-              </a:ext>
-            </a:extLst>
-          </p:cNvPr>
-          <p:cNvSpPr>
-            <a:spLocks noGrp="1"/>
-          </p:cNvSpPr>
-          <p:nvPr/>
-        </p:nvSpPr>
-        <p:spPr>
-          <a:xfrm>
-            <a:off x="7620000" y="3695700"/>
-            <a:ext cx="3810000" cy="19050"/>
-          </a:xfrm>
-          <a:prstGeom prst="rect">
-            <a:avLst/>
-          </a:prstGeom>
-          <a:solidFill>
-            <a:srgbClr val="D9D5CF"/>
-          </a:solidFill>
-          <a:ln w="0">
-            <a:noFill/>
+              <a:t>⑤ 有人試過解決嗎？結果如何？</a:t>
+            </a:r>
+          </a:p>
+        </p:txBody>
+      </p:sp>
+      <p:sp>
+        <p:nvSpPr>
+          <p:cNvPr id="17" name="">
+            <a:extLst>
+              <a:ext uri="{FF2B5EF4-FFF2-40B4-BE49-F238E27FC236}">
+                <a16:creationId xmlns:a16="http://schemas.microsoft.com/office/drawing/2014/main" id="{093DA355-6759-43A9-A95D-4361AA6A47BF}"/>
+              </a:ext>
+            </a:extLst>
+          </p:cNvPr>
+          <p:cNvSpPr>
+            <a:spLocks noGrp="1"/>
+          </p:cNvSpPr>
+          <p:nvPr/>
+        </p:nvSpPr>
+        <p:spPr>
+          <a:xfrm>
+            <a:off x="628650" y="5029200"/>
+            <a:ext cx="228600" cy="228600"/>
+          </a:xfrm>
+          <a:prstGeom prst="rect">
+            <a:avLst/>
+          </a:prstGeom>
+          <a:noFill/>
+          <a:ln w="19050">
+            <a:solidFill>
+              <a:srgbClr val="E63946"/>
+            </a:solidFill>
           </a:ln>
         </p:spPr>
         <p:txBody>
@@ -19772,22 +20153,22 @@
       </p:sp>
       <p:sp>
         <p:nvSpPr>
-          <p:cNvPr id="14" name="">
-            <a:extLst>
-              <a:ext uri="{FF2B5EF4-FFF2-40B4-BE49-F238E27FC236}">
-                <a16:creationId xmlns:a16="http://schemas.microsoft.com/office/drawing/2014/main" id="{E2BF70FB-348E-42A6-8EB7-2452D5ED2731}"/>
-              </a:ext>
-            </a:extLst>
-          </p:cNvPr>
-          <p:cNvSpPr>
-            <a:spLocks noGrp="1"/>
-          </p:cNvSpPr>
-          <p:nvPr/>
-        </p:nvSpPr>
-        <p:spPr>
-          <a:xfrm>
-            <a:off x="7620000" y="3990975"/>
-            <a:ext cx="3781425" cy="1104900"/>
+          <p:cNvPr id="18" name="">
+            <a:extLst>
+              <a:ext uri="{FF2B5EF4-FFF2-40B4-BE49-F238E27FC236}">
+                <a16:creationId xmlns:a16="http://schemas.microsoft.com/office/drawing/2014/main" id="{7377CCEB-8EAD-44CB-B435-B378C176210E}"/>
+              </a:ext>
+            </a:extLst>
+          </p:cNvPr>
+          <p:cNvSpPr>
+            <a:spLocks noGrp="1"/>
+          </p:cNvSpPr>
+          <p:nvPr/>
+        </p:nvSpPr>
+        <p:spPr>
+          <a:xfrm>
+            <a:off x="1085850" y="4953000"/>
+            <a:ext cx="10382250" cy="485775"/>
           </a:xfrm>
           <a:prstGeom prst="rect">
             <a:avLst/>
@@ -19803,21 +20184,19 @@
           </a:bodyPr>
           <a:lstStyle/>
           <a:p>
-            <a:r>
-              <a:rPr sz="2100" b="0">
+            <a:pPr>
+              <a:buNone/>
+              <a:defRPr sz="2100" b="1">
                 <a:solidFill>
                   <a:srgbClr val="121212"/>
                 </a:solidFill>
                 <a:latin typeface="PingFang TC"/>
                 <a:ea typeface="PingFang TC"/>
                 <a:cs typeface="PingFang TC"/>
-              </a:rPr>
-              <a:t>現在他付錢給誰？</a:t>
-            </a:r>
-          </a:p>
-          <a:p>
-            <a:r>
-              <a:rPr sz="2100" b="0">
+              </a:defRPr>
+            </a:pPr>
+            <a:r>
+              <a:rPr sz="2100" b="1">
                 <a:solidFill>
                   <a:srgbClr val="121212"/>
                 </a:solidFill>
@@ -19825,29 +20204,63 @@
                 <a:ea typeface="PingFang TC"/>
                 <a:cs typeface="PingFang TC"/>
               </a:rPr>
-              <a:t>為什麼是現在（AI、法規、行為改變）？</a:t>
-            </a:r>
-          </a:p>
-        </p:txBody>
-      </p:sp>
-      <p:sp>
-        <p:nvSpPr>
-          <p:cNvPr id="15" name="">
-            <a:extLst>
-              <a:ext uri="{FF2B5EF4-FFF2-40B4-BE49-F238E27FC236}">
-                <a16:creationId xmlns:a16="http://schemas.microsoft.com/office/drawing/2014/main" id="{9399EBA7-F7A6-4CBC-8E46-A7A6B884886E}"/>
-              </a:ext>
-            </a:extLst>
-          </p:cNvPr>
-          <p:cNvSpPr>
-            <a:spLocks noGrp="1"/>
-          </p:cNvSpPr>
-          <p:nvPr/>
-        </p:nvSpPr>
-        <p:spPr>
-          <a:xfrm>
-            <a:off x="609600" y="5638800"/>
-            <a:ext cx="10715625" cy="495300"/>
+              <a:t>⑥ 台灣跟國外差在哪？</a:t>
+            </a:r>
+          </a:p>
+        </p:txBody>
+      </p:sp>
+      <p:sp>
+        <p:nvSpPr>
+          <p:cNvPr id="19" name="">
+            <a:extLst>
+              <a:ext uri="{FF2B5EF4-FFF2-40B4-BE49-F238E27FC236}">
+                <a16:creationId xmlns:a16="http://schemas.microsoft.com/office/drawing/2014/main" id="{72DB212D-DCE9-4747-B435-0D67F2CC0D5D}"/>
+              </a:ext>
+            </a:extLst>
+          </p:cNvPr>
+          <p:cNvSpPr>
+            <a:spLocks noGrp="1"/>
+          </p:cNvSpPr>
+          <p:nvPr/>
+        </p:nvSpPr>
+        <p:spPr>
+          <a:xfrm>
+            <a:off x="609600" y="5648325"/>
+            <a:ext cx="10972800" cy="485775"/>
+          </a:xfrm>
+          <a:prstGeom prst="rect">
+            <a:avLst/>
+          </a:prstGeom>
+          <a:solidFill>
+            <a:srgbClr val="1D3A5F"/>
+          </a:solidFill>
+          <a:ln w="0">
+            <a:noFill/>
+          </a:ln>
+        </p:spPr>
+        <p:txBody>
+          <a:bodyPr/>
+          <a:p/>
+        </p:txBody>
+      </p:sp>
+      <p:sp>
+        <p:nvSpPr>
+          <p:cNvPr id="20" name="">
+            <a:extLst>
+              <a:ext uri="{FF2B5EF4-FFF2-40B4-BE49-F238E27FC236}">
+                <a16:creationId xmlns:a16="http://schemas.microsoft.com/office/drawing/2014/main" id="{AFE6C6B1-030D-4F0E-8E52-EDA429C81544}"/>
+              </a:ext>
+            </a:extLst>
+          </p:cNvPr>
+          <p:cNvSpPr>
+            <a:spLocks noGrp="1"/>
+          </p:cNvSpPr>
+          <p:nvPr/>
+        </p:nvSpPr>
+        <p:spPr>
+          <a:xfrm>
+            <a:off x="800100" y="5715000"/>
+            <a:ext cx="10525125" cy="390525"/>
           </a:xfrm>
           <a:prstGeom prst="rect">
             <a:avLst/>
@@ -19865,25 +20278,25 @@
           <a:p>
             <a:pPr>
               <a:buNone/>
-              <a:defRPr sz="1875" b="0">
-                <a:solidFill>
-                  <a:srgbClr val="1D3A5F"/>
-                </a:solidFill>
-                <a:latin typeface="PingFang TC"/>
-                <a:ea typeface="PingFang TC"/>
-                <a:cs typeface="PingFang TC"/>
-              </a:defRPr>
-            </a:pPr>
-            <a:r>
-              <a:rPr sz="1875" b="0">
-                <a:solidFill>
-                  <a:srgbClr val="1D3A5F"/>
-                </a:solidFill>
-                <a:latin typeface="PingFang TC"/>
-                <a:ea typeface="PingFang TC"/>
-                <a:cs typeface="PingFang TC"/>
-              </a:rPr>
-              <a:t>不要給「做 App 或平台」的答案，除非你能說出第一個付錢的人。三個機會各寫一行 A／B／C 貼回。</a:t>
+              <a:defRPr sz="2025" b="1">
+                <a:solidFill>
+                  <a:srgbClr val="FFFFFF"/>
+                </a:solidFill>
+                <a:latin typeface="PingFang TC"/>
+                <a:ea typeface="PingFang TC"/>
+                <a:cs typeface="PingFang TC"/>
+              </a:defRPr>
+            </a:pPr>
+            <a:r>
+              <a:rPr sz="2025" b="1">
+                <a:solidFill>
+                  <a:srgbClr val="FFFFFF"/>
+                </a:solidFill>
+                <a:latin typeface="PingFang TC"/>
+                <a:ea typeface="PingFang TC"/>
+                <a:cs typeface="PingFang TC"/>
+              </a:rPr>
+              <a:t>六題都有引用，卡 2 才算完成；卡 3 會自動把這些證據附在問題後面。</a:t>
             </a:r>
           </a:p>
         </p:txBody>
@@ -19897,768 +20310,6 @@
 </file>
 
 <file path=ppt/slides/slide43.xml><?xml version="1.0" encoding="utf-8"?>
-<p:sld xmlns:a="http://schemas.openxmlformats.org/drawingml/2006/main" xmlns:p="http://schemas.openxmlformats.org/presentationml/2006/main" xmlns:r="http://schemas.openxmlformats.org/officeDocument/2006/relationships">
-  <p:cSld>
-    <p:spTree>
-      <p:nvGrpSpPr>
-        <p:cNvPr id="1" name=""/>
-        <p:cNvGrpSpPr/>
-        <p:nvPr/>
-      </p:nvGrpSpPr>
-      <p:grpSpPr/>
-      <p:sp>
-        <p:nvSpPr>
-          <p:cNvPr id="14" name="">
-            <a:extLst>
-              <a:ext uri="{FF2B5EF4-FFF2-40B4-BE49-F238E27FC236}">
-                <a16:creationId xmlns:a16="http://schemas.microsoft.com/office/drawing/2014/main" id="{D99C096F-6EB5-41EA-B969-490BF1A5FE7B}"/>
-              </a:ext>
-            </a:extLst>
-          </p:cNvPr>
-          <p:cNvSpPr>
-            <a:spLocks noGrp="1"/>
-          </p:cNvSpPr>
-          <p:nvPr/>
-        </p:nvSpPr>
-        <p:spPr>
-          <a:xfrm>
-            <a:off x="0" y="0"/>
-            <a:ext cx="12192000" cy="6858000"/>
-          </a:xfrm>
-          <a:prstGeom prst="rect">
-            <a:avLst/>
-          </a:prstGeom>
-          <a:solidFill>
-            <a:srgbClr val="F6F3EE"/>
-          </a:solidFill>
-          <a:ln w="9525">
-            <a:solidFill>
-              <a:srgbClr val="F6F3EE"/>
-            </a:solidFill>
-          </a:ln>
-        </p:spPr>
-        <p:txBody>
-          <a:bodyPr/>
-          <a:p/>
-        </p:txBody>
-      </p:sp>
-      <p:sp>
-        <p:nvSpPr>
-          <p:cNvPr id="2" name="">
-            <a:extLst>
-              <a:ext uri="{FF2B5EF4-FFF2-40B4-BE49-F238E27FC236}">
-                <a16:creationId xmlns:a16="http://schemas.microsoft.com/office/drawing/2014/main" id="{F945F193-D6A2-4A5E-BD73-6B69757A3820}"/>
-              </a:ext>
-            </a:extLst>
-          </p:cNvPr>
-          <p:cNvSpPr>
-            <a:spLocks noGrp="1"/>
-          </p:cNvSpPr>
-          <p:nvPr/>
-        </p:nvSpPr>
-        <p:spPr>
-          <a:xfrm>
-            <a:off x="609600" y="285750"/>
-            <a:ext cx="10287000" cy="285750"/>
-          </a:xfrm>
-          <a:prstGeom prst="rect">
-            <a:avLst/>
-          </a:prstGeom>
-          <a:noFill/>
-          <a:ln w="0">
-            <a:noFill/>
-          </a:ln>
-        </p:spPr>
-        <p:txBody>
-          <a:bodyPr anchor="ctr">
-            <a:normAutofit fontScale="94444"/>
-          </a:bodyPr>
-          <a:lstStyle/>
-          <a:p>
-            <a:pPr algn="l">
-              <a:buNone/>
-              <a:defRPr sz="1350" b="1">
-                <a:solidFill>
-                  <a:srgbClr val="E63946"/>
-                </a:solidFill>
-                <a:latin typeface="PingFang TC"/>
-                <a:ea typeface="PingFang TC"/>
-                <a:cs typeface="PingFang TC"/>
-              </a:defRPr>
-            </a:pPr>
-            <a:r>
-              <a:rPr sz="1350" b="1">
-                <a:solidFill>
-                  <a:srgbClr val="E63946"/>
-                </a:solidFill>
-                <a:latin typeface="PingFang TC"/>
-                <a:ea typeface="PingFang TC"/>
-                <a:cs typeface="PingFang TC"/>
-              </a:rPr>
-              <a:t>WEEK 4  /  從我的痛看產業</a:t>
-            </a:r>
-          </a:p>
-        </p:txBody>
-      </p:sp>
-      <p:sp>
-        <p:nvSpPr>
-          <p:cNvPr id="3" name="">
-            <a:extLst>
-              <a:ext uri="{FF2B5EF4-FFF2-40B4-BE49-F238E27FC236}">
-                <a16:creationId xmlns:a16="http://schemas.microsoft.com/office/drawing/2014/main" id="{EBE0DE06-5026-47E2-9F71-7631AE1BDAE2}"/>
-              </a:ext>
-            </a:extLst>
-          </p:cNvPr>
-          <p:cNvSpPr>
-            <a:spLocks noGrp="1"/>
-          </p:cNvSpPr>
-          <p:nvPr/>
-        </p:nvSpPr>
-        <p:spPr>
-          <a:xfrm>
-            <a:off x="609600" y="838200"/>
-            <a:ext cx="10972800" cy="762000"/>
-          </a:xfrm>
-          <a:prstGeom prst="rect">
-            <a:avLst/>
-          </a:prstGeom>
-          <a:noFill/>
-          <a:ln w="0">
-            <a:noFill/>
-          </a:ln>
-        </p:spPr>
-        <p:txBody>
-          <a:bodyPr anchor="ctr">
-            <a:normAutofit fontScale="100000"/>
-          </a:bodyPr>
-          <a:lstStyle/>
-          <a:p>
-            <a:pPr algn="l">
-              <a:buNone/>
-              <a:defRPr sz="3450" b="1">
-                <a:solidFill>
-                  <a:srgbClr val="121212"/>
-                </a:solidFill>
-                <a:latin typeface="PingFang TC"/>
-                <a:ea typeface="PingFang TC"/>
-                <a:cs typeface="PingFang TC"/>
-              </a:defRPr>
-            </a:pPr>
-            <a:r>
-              <a:rPr sz="3450" b="1">
-                <a:solidFill>
-                  <a:srgbClr val="121212"/>
-                </a:solidFill>
-                <a:latin typeface="PingFang TC"/>
-                <a:ea typeface="PingFang TC"/>
-                <a:cs typeface="PingFang TC"/>
-              </a:rPr>
-              <a:t>Gemini 說 vs NotebookLM 查到</a:t>
-            </a:r>
-          </a:p>
-        </p:txBody>
-      </p:sp>
-      <p:sp>
-        <p:nvSpPr>
-          <p:cNvPr id="4" name="">
-            <a:extLst>
-              <a:ext uri="{FF2B5EF4-FFF2-40B4-BE49-F238E27FC236}">
-                <a16:creationId xmlns:a16="http://schemas.microsoft.com/office/drawing/2014/main" id="{E0ED7F9D-7CE4-45F4-B7CB-9761EE5DF652}"/>
-              </a:ext>
-            </a:extLst>
-          </p:cNvPr>
-          <p:cNvSpPr>
-            <a:spLocks noGrp="1"/>
-          </p:cNvSpPr>
-          <p:nvPr/>
-        </p:nvSpPr>
-        <p:spPr>
-          <a:xfrm>
-            <a:off x="609600" y="1619250"/>
-            <a:ext cx="10972800" cy="476250"/>
-          </a:xfrm>
-          <a:prstGeom prst="rect">
-            <a:avLst/>
-          </a:prstGeom>
-          <a:noFill/>
-          <a:ln w="0">
-            <a:noFill/>
-          </a:ln>
-        </p:spPr>
-        <p:txBody>
-          <a:bodyPr anchor="ctr">
-            <a:normAutofit fontScale="100000"/>
-          </a:bodyPr>
-          <a:lstStyle/>
-          <a:p>
-            <a:pPr algn="l">
-              <a:buNone/>
-              <a:defRPr sz="1800" b="0">
-                <a:solidFill>
-                  <a:srgbClr val="626262"/>
-                </a:solidFill>
-                <a:latin typeface="PingFang TC"/>
-                <a:ea typeface="PingFang TC"/>
-                <a:cs typeface="PingFang TC"/>
-              </a:defRPr>
-            </a:pPr>
-            <a:r>
-              <a:rPr sz="1800" b="0">
-                <a:solidFill>
-                  <a:srgbClr val="626262"/>
-                </a:solidFill>
-                <a:latin typeface="PingFang TC"/>
-                <a:ea typeface="PingFang TC"/>
-                <a:cs typeface="PingFang TC"/>
-              </a:rPr>
-              <a:t>貼回 app 時一定要標來源；老師看的是來源比例，不是 AI 寫得多漂亮</a:t>
-            </a:r>
-          </a:p>
-        </p:txBody>
-      </p:sp>
-      <p:sp>
-        <p:nvSpPr>
-          <p:cNvPr id="5" name="">
-            <a:extLst>
-              <a:ext uri="{FF2B5EF4-FFF2-40B4-BE49-F238E27FC236}">
-                <a16:creationId xmlns:a16="http://schemas.microsoft.com/office/drawing/2014/main" id="{A2DC1420-12C3-4916-8E72-AE7443D5B25C}"/>
-              </a:ext>
-            </a:extLst>
-          </p:cNvPr>
-          <p:cNvSpPr>
-            <a:spLocks noGrp="1"/>
-          </p:cNvSpPr>
-          <p:nvPr/>
-        </p:nvSpPr>
-        <p:spPr>
-          <a:xfrm>
-            <a:off x="609600" y="6286500"/>
-            <a:ext cx="10972800" cy="19050"/>
-          </a:xfrm>
-          <a:prstGeom prst="rect">
-            <a:avLst/>
-          </a:prstGeom>
-          <a:solidFill>
-            <a:srgbClr val="D6D0C7"/>
-          </a:solidFill>
-          <a:ln w="9525">
-            <a:solidFill>
-              <a:srgbClr val="D6D0C7"/>
-            </a:solidFill>
-          </a:ln>
-        </p:spPr>
-        <p:txBody>
-          <a:bodyPr/>
-          <a:p/>
-        </p:txBody>
-      </p:sp>
-      <p:sp>
-        <p:nvSpPr>
-          <p:cNvPr id="6" name="">
-            <a:extLst>
-              <a:ext uri="{FF2B5EF4-FFF2-40B4-BE49-F238E27FC236}">
-                <a16:creationId xmlns:a16="http://schemas.microsoft.com/office/drawing/2014/main" id="{2F07DDDE-8D75-462F-91D5-4B36B43575EE}"/>
-              </a:ext>
-            </a:extLst>
-          </p:cNvPr>
-          <p:cNvSpPr>
-            <a:spLocks noGrp="1"/>
-          </p:cNvSpPr>
-          <p:nvPr/>
-        </p:nvSpPr>
-        <p:spPr>
-          <a:xfrm>
-            <a:off x="609600" y="6362700"/>
-            <a:ext cx="2381250" cy="209550"/>
-          </a:xfrm>
-          <a:prstGeom prst="rect">
-            <a:avLst/>
-          </a:prstGeom>
-          <a:noFill/>
-          <a:ln w="0">
-            <a:noFill/>
-          </a:ln>
-        </p:spPr>
-        <p:txBody>
-          <a:bodyPr anchor="ctr">
-            <a:normAutofit fontScale="86111"/>
-          </a:bodyPr>
-          <a:lstStyle/>
-          <a:p>
-            <a:pPr algn="l">
-              <a:buNone/>
-              <a:defRPr sz="900" b="0">
-                <a:solidFill>
-                  <a:srgbClr val="626262"/>
-                </a:solidFill>
-                <a:latin typeface="PingFang TC"/>
-                <a:ea typeface="PingFang TC"/>
-                <a:cs typeface="PingFang TC"/>
-              </a:defRPr>
-            </a:pPr>
-            <a:r>
-              <a:rPr sz="900" b="0">
-                <a:solidFill>
-                  <a:srgbClr val="626262"/>
-                </a:solidFill>
-                <a:latin typeface="PingFang TC"/>
-                <a:ea typeface="PingFang TC"/>
-                <a:cs typeface="PingFang TC"/>
-              </a:rPr>
-              <a:t>Startup Journey Lab</a:t>
-            </a:r>
-          </a:p>
-        </p:txBody>
-      </p:sp>
-      <p:sp>
-        <p:nvSpPr>
-          <p:cNvPr id="7" name="">
-            <a:extLst>
-              <a:ext uri="{FF2B5EF4-FFF2-40B4-BE49-F238E27FC236}">
-                <a16:creationId xmlns:a16="http://schemas.microsoft.com/office/drawing/2014/main" id="{C5FE7A55-B727-4B6F-9EE2-D39F3300B62E}"/>
-              </a:ext>
-            </a:extLst>
-          </p:cNvPr>
-          <p:cNvSpPr>
-            <a:spLocks noGrp="1"/>
-          </p:cNvSpPr>
-          <p:nvPr/>
-        </p:nvSpPr>
-        <p:spPr>
-          <a:xfrm>
-            <a:off x="10477500" y="6362700"/>
-            <a:ext cx="1104900" cy="209550"/>
-          </a:xfrm>
-          <a:prstGeom prst="rect">
-            <a:avLst/>
-          </a:prstGeom>
-          <a:noFill/>
-          <a:ln w="0">
-            <a:noFill/>
-          </a:ln>
-        </p:spPr>
-        <p:txBody>
-          <a:bodyPr anchor="ctr">
-            <a:normAutofit fontScale="86111"/>
-          </a:bodyPr>
-          <a:lstStyle/>
-          <a:p>
-            <a:pPr algn="r">
-              <a:buNone/>
-              <a:defRPr sz="900" b="0">
-                <a:solidFill>
-                  <a:srgbClr val="626262"/>
-                </a:solidFill>
-                <a:latin typeface="PingFang TC"/>
-                <a:ea typeface="PingFang TC"/>
-                <a:cs typeface="PingFang TC"/>
-              </a:defRPr>
-            </a:pPr>
-            <a:r>
-              <a:rPr sz="900" b="0">
-                <a:solidFill>
-                  <a:srgbClr val="626262"/>
-                </a:solidFill>
-                <a:latin typeface="PingFang TC"/>
-                <a:ea typeface="PingFang TC"/>
-                <a:cs typeface="PingFang TC"/>
-              </a:rPr>
-              <a:t>18 / 22</a:t>
-            </a:r>
-          </a:p>
-        </p:txBody>
-      </p:sp>
-      <p:sp>
-        <p:nvSpPr>
-          <p:cNvPr id="8" name="">
-            <a:extLst>
-              <a:ext uri="{FF2B5EF4-FFF2-40B4-BE49-F238E27FC236}">
-                <a16:creationId xmlns:a16="http://schemas.microsoft.com/office/drawing/2014/main" id="{E25F88BD-8320-4506-A81F-3D2EC6975FEA}"/>
-              </a:ext>
-            </a:extLst>
-          </p:cNvPr>
-          <p:cNvSpPr>
-            <a:spLocks noGrp="1"/>
-          </p:cNvSpPr>
-          <p:nvPr/>
-        </p:nvSpPr>
-        <p:spPr>
-          <a:xfrm>
-            <a:off x="609600" y="2428875"/>
-            <a:ext cx="4476750" cy="457200"/>
-          </a:xfrm>
-          <a:prstGeom prst="rect">
-            <a:avLst/>
-          </a:prstGeom>
-          <a:noFill/>
-          <a:ln w="0">
-            <a:noFill/>
-          </a:ln>
-        </p:spPr>
-        <p:txBody>
-          <a:bodyPr anchor="ctr">
-            <a:normAutofit fontScale="100000"/>
-          </a:bodyPr>
-          <a:lstStyle/>
-          <a:p>
-            <a:pPr algn="l">
-              <a:buNone/>
-              <a:defRPr sz="2325" b="1">
-                <a:solidFill>
-                  <a:srgbClr val="E63946"/>
-                </a:solidFill>
-                <a:latin typeface="PingFang TC"/>
-                <a:ea typeface="PingFang TC"/>
-                <a:cs typeface="PingFang TC"/>
-              </a:defRPr>
-            </a:pPr>
-            <a:r>
-              <a:rPr sz="2325" b="1">
-                <a:solidFill>
-                  <a:srgbClr val="E63946"/>
-                </a:solidFill>
-                <a:latin typeface="PingFang TC"/>
-                <a:ea typeface="PingFang TC"/>
-                <a:cs typeface="PingFang TC"/>
-              </a:rPr>
-              <a:t>Gemini／GPT 說（發散）</a:t>
-            </a:r>
-          </a:p>
-        </p:txBody>
-      </p:sp>
-      <p:sp>
-        <p:nvSpPr>
-          <p:cNvPr id="9" name="">
-            <a:extLst>
-              <a:ext uri="{FF2B5EF4-FFF2-40B4-BE49-F238E27FC236}">
-                <a16:creationId xmlns:a16="http://schemas.microsoft.com/office/drawing/2014/main" id="{0993229B-BD18-4B58-BFFD-54C5C43644DE}"/>
-              </a:ext>
-            </a:extLst>
-          </p:cNvPr>
-          <p:cNvSpPr>
-            <a:spLocks noGrp="1"/>
-          </p:cNvSpPr>
-          <p:nvPr/>
-        </p:nvSpPr>
-        <p:spPr>
-          <a:xfrm>
-            <a:off x="609600" y="3000375"/>
-            <a:ext cx="4762500" cy="2238375"/>
-          </a:xfrm>
-          <a:prstGeom prst="rect">
-            <a:avLst/>
-          </a:prstGeom>
-          <a:noFill/>
-          <a:ln w="0">
-            <a:noFill/>
-          </a:ln>
-        </p:spPr>
-        <p:txBody>
-          <a:bodyPr anchor="ctr">
-            <a:normAutofit fontScale="100000"/>
-          </a:bodyPr>
-          <a:lstStyle/>
-          <a:p>
-            <a:r>
-              <a:rPr sz="1650" b="0">
-                <a:solidFill>
-                  <a:srgbClr val="121212"/>
-                </a:solidFill>
-                <a:latin typeface="PingFang TC"/>
-                <a:ea typeface="PingFang TC"/>
-                <a:cs typeface="PingFang TC"/>
-              </a:rPr>
-              <a:t>• 快、廣、會舉例</a:t>
-            </a:r>
-          </a:p>
-          <a:p>
-            <a:r>
-              <a:rPr sz="1650" b="0">
-                <a:solidFill>
-                  <a:srgbClr val="121212"/>
-                </a:solidFill>
-                <a:latin typeface="PingFang TC"/>
-                <a:ea typeface="PingFang TC"/>
-                <a:cs typeface="PingFang TC"/>
-              </a:rPr>
-              <a:t>• 會編數字、把猜測講得很肯定</a:t>
-            </a:r>
-          </a:p>
-          <a:p>
-            <a:r>
-              <a:rPr sz="1650" b="0">
-                <a:solidFill>
-                  <a:srgbClr val="121212"/>
-                </a:solidFill>
-                <a:latin typeface="PingFang TC"/>
-                <a:ea typeface="PingFang TC"/>
-                <a:cs typeface="PingFang TC"/>
-              </a:rPr>
-              <a:t>• 用在卡 1、卡 3</a:t>
-            </a:r>
-          </a:p>
-          <a:p>
-            <a:r>
-              <a:rPr sz="1650" b="0">
-                <a:solidFill>
-                  <a:srgbClr val="121212"/>
-                </a:solidFill>
-                <a:latin typeface="PingFang TC"/>
-                <a:ea typeface="PingFang TC"/>
-                <a:cs typeface="PingFang TC"/>
-              </a:rPr>
-              <a:t>• 有數字 → 寫出處或標「估計」</a:t>
-            </a:r>
-          </a:p>
-        </p:txBody>
-      </p:sp>
-      <p:sp>
-        <p:nvSpPr>
-          <p:cNvPr id="10" name="">
-            <a:extLst>
-              <a:ext uri="{FF2B5EF4-FFF2-40B4-BE49-F238E27FC236}">
-                <a16:creationId xmlns:a16="http://schemas.microsoft.com/office/drawing/2014/main" id="{92A462A0-899F-4C1D-9C7C-25D4058895FB}"/>
-              </a:ext>
-            </a:extLst>
-          </p:cNvPr>
-          <p:cNvSpPr>
-            <a:spLocks noGrp="1"/>
-          </p:cNvSpPr>
-          <p:nvPr/>
-        </p:nvSpPr>
-        <p:spPr>
-          <a:xfrm>
-            <a:off x="5953125" y="2428875"/>
-            <a:ext cx="38100" cy="2952750"/>
-          </a:xfrm>
-          <a:prstGeom prst="rect">
-            <a:avLst/>
-          </a:prstGeom>
-          <a:solidFill>
-            <a:srgbClr val="D6D0C7"/>
-          </a:solidFill>
-          <a:ln w="9525">
-            <a:solidFill>
-              <a:srgbClr val="D6D0C7"/>
-            </a:solidFill>
-          </a:ln>
-        </p:spPr>
-        <p:txBody>
-          <a:bodyPr/>
-          <a:p/>
-        </p:txBody>
-      </p:sp>
-      <p:sp>
-        <p:nvSpPr>
-          <p:cNvPr id="11" name="">
-            <a:extLst>
-              <a:ext uri="{FF2B5EF4-FFF2-40B4-BE49-F238E27FC236}">
-                <a16:creationId xmlns:a16="http://schemas.microsoft.com/office/drawing/2014/main" id="{B13E5783-0243-4D15-B1DC-FFBD06FE9F16}"/>
-              </a:ext>
-            </a:extLst>
-          </p:cNvPr>
-          <p:cNvSpPr>
-            <a:spLocks noGrp="1"/>
-          </p:cNvSpPr>
-          <p:nvPr/>
-        </p:nvSpPr>
-        <p:spPr>
-          <a:xfrm>
-            <a:off x="6572250" y="2428875"/>
-            <a:ext cx="4476750" cy="457200"/>
-          </a:xfrm>
-          <a:prstGeom prst="rect">
-            <a:avLst/>
-          </a:prstGeom>
-          <a:noFill/>
-          <a:ln w="0">
-            <a:noFill/>
-          </a:ln>
-        </p:spPr>
-        <p:txBody>
-          <a:bodyPr anchor="ctr">
-            <a:normAutofit fontScale="100000"/>
-          </a:bodyPr>
-          <a:lstStyle/>
-          <a:p>
-            <a:pPr algn="l">
-              <a:buNone/>
-              <a:defRPr sz="2325" b="1">
-                <a:solidFill>
-                  <a:srgbClr val="14395B"/>
-                </a:solidFill>
-                <a:latin typeface="PingFang TC"/>
-                <a:ea typeface="PingFang TC"/>
-                <a:cs typeface="PingFang TC"/>
-              </a:defRPr>
-            </a:pPr>
-            <a:r>
-              <a:rPr sz="2325" b="1">
-                <a:solidFill>
-                  <a:srgbClr val="14395B"/>
-                </a:solidFill>
-                <a:latin typeface="PingFang TC"/>
-                <a:ea typeface="PingFang TC"/>
-                <a:cs typeface="PingFang TC"/>
-              </a:rPr>
-              <a:t>NotebookLM 查到（有引用）</a:t>
-            </a:r>
-          </a:p>
-        </p:txBody>
-      </p:sp>
-      <p:sp>
-        <p:nvSpPr>
-          <p:cNvPr id="12" name="">
-            <a:extLst>
-              <a:ext uri="{FF2B5EF4-FFF2-40B4-BE49-F238E27FC236}">
-                <a16:creationId xmlns:a16="http://schemas.microsoft.com/office/drawing/2014/main" id="{204B0874-5189-41D9-9F8F-D809113B0CB0}"/>
-              </a:ext>
-            </a:extLst>
-          </p:cNvPr>
-          <p:cNvSpPr>
-            <a:spLocks noGrp="1"/>
-          </p:cNvSpPr>
-          <p:nvPr/>
-        </p:nvSpPr>
-        <p:spPr>
-          <a:xfrm>
-            <a:off x="6572250" y="3000375"/>
-            <a:ext cx="4762500" cy="2238375"/>
-          </a:xfrm>
-          <a:prstGeom prst="rect">
-            <a:avLst/>
-          </a:prstGeom>
-          <a:noFill/>
-          <a:ln w="0">
-            <a:noFill/>
-          </a:ln>
-        </p:spPr>
-        <p:txBody>
-          <a:bodyPr anchor="ctr">
-            <a:normAutofit fontScale="100000"/>
-          </a:bodyPr>
-          <a:lstStyle/>
-          <a:p>
-            <a:r>
-              <a:rPr sz="1650" b="0">
-                <a:solidFill>
-                  <a:srgbClr val="121212"/>
-                </a:solidFill>
-                <a:latin typeface="PingFang TC"/>
-                <a:ea typeface="PingFang TC"/>
-                <a:cs typeface="PingFang TC"/>
-              </a:rPr>
-              <a:t>• 只根據你餵的來源回答</a:t>
-            </a:r>
-          </a:p>
-          <a:p>
-            <a:r>
-              <a:rPr sz="1650" b="0">
-                <a:solidFill>
-                  <a:srgbClr val="121212"/>
-                </a:solidFill>
-                <a:latin typeface="PingFang TC"/>
-                <a:ea typeface="PingFang TC"/>
-                <a:cs typeface="PingFang TC"/>
-              </a:rPr>
-              <a:t>• 每句點得回原文</a:t>
-            </a:r>
-          </a:p>
-          <a:p>
-            <a:r>
-              <a:rPr sz="1650" b="0">
-                <a:solidFill>
-                  <a:srgbClr val="121212"/>
-                </a:solidFill>
-                <a:latin typeface="PingFang TC"/>
-                <a:ea typeface="PingFang TC"/>
-                <a:cs typeface="PingFang TC"/>
-              </a:rPr>
-              <a:t>• 用在卡 2</a:t>
-            </a:r>
-          </a:p>
-          <a:p>
-            <a:r>
-              <a:rPr sz="1650" b="0">
-                <a:solidFill>
-                  <a:srgbClr val="121212"/>
-                </a:solidFill>
-                <a:latin typeface="PingFang TC"/>
-                <a:ea typeface="PingFang TC"/>
-                <a:cs typeface="PingFang TC"/>
-              </a:rPr>
-              <a:t>• 沒餵來源就沒答案，慢但不編</a:t>
-            </a:r>
-          </a:p>
-        </p:txBody>
-      </p:sp>
-      <p:sp>
-        <p:nvSpPr>
-          <p:cNvPr id="13" name="">
-            <a:extLst>
-              <a:ext uri="{FF2B5EF4-FFF2-40B4-BE49-F238E27FC236}">
-                <a16:creationId xmlns:a16="http://schemas.microsoft.com/office/drawing/2014/main" id="{5A63A13F-D1D5-4F06-BFE8-CD5525CCAD8B}"/>
-              </a:ext>
-            </a:extLst>
-          </p:cNvPr>
-          <p:cNvSpPr>
-            <a:spLocks noGrp="1"/>
-          </p:cNvSpPr>
-          <p:nvPr/>
-        </p:nvSpPr>
-        <p:spPr>
-          <a:xfrm>
-            <a:off x="609600" y="5600700"/>
-            <a:ext cx="10972800" cy="400050"/>
-          </a:xfrm>
-          <a:prstGeom prst="rect">
-            <a:avLst/>
-          </a:prstGeom>
-          <a:noFill/>
-          <a:ln w="0">
-            <a:noFill/>
-          </a:ln>
-        </p:spPr>
-        <p:txBody>
-          <a:bodyPr anchor="ctr">
-            <a:normAutofit fontScale="100000"/>
-          </a:bodyPr>
-          <a:lstStyle/>
-          <a:p>
-            <a:pPr algn="l">
-              <a:buNone/>
-              <a:defRPr sz="1650" b="1">
-                <a:solidFill>
-                  <a:srgbClr val="E63946"/>
-                </a:solidFill>
-                <a:latin typeface="PingFang TC"/>
-                <a:ea typeface="PingFang TC"/>
-                <a:cs typeface="PingFang TC"/>
-              </a:defRPr>
-            </a:pPr>
-            <a:r>
-              <a:rPr sz="1650" b="1">
-                <a:solidFill>
-                  <a:srgbClr val="E63946"/>
-                </a:solidFill>
-                <a:latin typeface="PingFang TC"/>
-                <a:ea typeface="PingFang TC"/>
-                <a:cs typeface="PingFang TC"/>
-              </a:rPr>
-              <a:t>一條有來源的證據，勝過十句 AI。期中看的是：每個主張有沒有來源。</a:t>
-            </a:r>
-          </a:p>
-        </p:txBody>
-      </p:sp>
-    </p:spTree>
-  </p:cSld>
-  <p:clrMapOvr>
-    <a:masterClrMapping/>
-  </p:clrMapOvr>
-</p:sld>
-</file>
-
-<file path=ppt/slides/slide44.xml><?xml version="1.0" encoding="utf-8"?>
 <p:sld xmlns:a="http://schemas.openxmlformats.org/drawingml/2006/main" xmlns:p="http://schemas.openxmlformats.org/presentationml/2006/main" xmlns:r="http://schemas.openxmlformats.org/officeDocument/2006/relationships">
   <p:cSld>
     <p:bg>
@@ -20677,10 +20328,10 @@
       <p:grpSpPr/>
       <p:sp>
         <p:nvSpPr>
-          <p:cNvPr id="31" name="">
-            <a:extLst>
-              <a:ext uri="{FF2B5EF4-FFF2-40B4-BE49-F238E27FC236}">
-                <a16:creationId xmlns:a16="http://schemas.microsoft.com/office/drawing/2014/main" id="{68EB7237-7F7B-4EBB-8147-7D3116DA24B3}"/>
+          <p:cNvPr id="16" name="">
+            <a:extLst>
+              <a:ext uri="{FF2B5EF4-FFF2-40B4-BE49-F238E27FC236}">
+                <a16:creationId xmlns:a16="http://schemas.microsoft.com/office/drawing/2014/main" id="{FAD2CC10-49A9-4B2F-A703-CFEEA1744905}"/>
               </a:ext>
             </a:extLst>
           </p:cNvPr>
@@ -20738,7 +20389,7 @@
           <p:cNvPr id="2" name="">
             <a:extLst>
               <a:ext uri="{FF2B5EF4-FFF2-40B4-BE49-F238E27FC236}">
-                <a16:creationId xmlns:a16="http://schemas.microsoft.com/office/drawing/2014/main" id="{E3A4D602-346A-48B7-AE99-FAAAA326895A}"/>
+                <a16:creationId xmlns:a16="http://schemas.microsoft.com/office/drawing/2014/main" id="{5D6271D0-F42F-410F-8C54-D04BF509A816}"/>
               </a:ext>
             </a:extLst>
           </p:cNvPr>
@@ -20786,7 +20437,7 @@
                 <a:ea typeface="PingFang TC"/>
                 <a:cs typeface="PingFang TC"/>
               </a:rPr>
-              <a:t>一個好機會要答得出四個問題</a:t>
+              <a:t>卡 3 問 AI：要三個機會</a:t>
             </a:r>
           </a:p>
         </p:txBody>
@@ -20796,7 +20447,7 @@
           <p:cNvPr id="3" name="">
             <a:extLst>
               <a:ext uri="{FF2B5EF4-FFF2-40B4-BE49-F238E27FC236}">
-                <a16:creationId xmlns:a16="http://schemas.microsoft.com/office/drawing/2014/main" id="{EB9EFF97-9BDD-4B70-A899-0F84C83E795D}"/>
+                <a16:creationId xmlns:a16="http://schemas.microsoft.com/office/drawing/2014/main" id="{6CF9C021-668F-4EC2-B07A-968DC09FE65A}"/>
               </a:ext>
             </a:extLst>
           </p:cNvPr>
@@ -20844,7 +20495,7 @@
                 <a:ea typeface="PingFang TC"/>
                 <a:cs typeface="PingFang TC"/>
               </a:rPr>
-              <a:t>下週（Week 5）五問計分就從這四格開始</a:t>
+              <a:t>app 會把卡 2 有來源的困難自動附在問題後面；沒做卡 2 會被擋</a:t>
             </a:r>
           </a:p>
         </p:txBody>
@@ -20854,7 +20505,7 @@
           <p:cNvPr id="4" name="">
             <a:extLst>
               <a:ext uri="{FF2B5EF4-FFF2-40B4-BE49-F238E27FC236}">
-                <a16:creationId xmlns:a16="http://schemas.microsoft.com/office/drawing/2014/main" id="{D12C4FFE-AA45-4E84-9A78-83B6155A0076}"/>
+                <a16:creationId xmlns:a16="http://schemas.microsoft.com/office/drawing/2014/main" id="{7B432BB0-E85A-4B0B-9ED0-9F8DA0A12774}"/>
               </a:ext>
             </a:extLst>
           </p:cNvPr>
@@ -20888,7 +20539,7 @@
           <p:cNvPr id="5" name="">
             <a:extLst>
               <a:ext uri="{FF2B5EF4-FFF2-40B4-BE49-F238E27FC236}">
-                <a16:creationId xmlns:a16="http://schemas.microsoft.com/office/drawing/2014/main" id="{94862769-381A-4C7F-B6F8-66BEDA67D9A6}"/>
+                <a16:creationId xmlns:a16="http://schemas.microsoft.com/office/drawing/2014/main" id="{6F79744F-70CA-4C57-B905-36B2B1147498}"/>
               </a:ext>
             </a:extLst>
           </p:cNvPr>
@@ -20946,7 +20597,7 @@
           <p:cNvPr id="6" name="">
             <a:extLst>
               <a:ext uri="{FF2B5EF4-FFF2-40B4-BE49-F238E27FC236}">
-                <a16:creationId xmlns:a16="http://schemas.microsoft.com/office/drawing/2014/main" id="{682FD63C-1A06-42CE-A2D4-A2173418FE75}"/>
+                <a16:creationId xmlns:a16="http://schemas.microsoft.com/office/drawing/2014/main" id="{6E17F4AE-5BC6-4D0B-9AEF-89BB49383766}"/>
               </a:ext>
             </a:extLst>
           </p:cNvPr>
@@ -20994,7 +20645,7 @@
                 <a:ea typeface="PingFang TC"/>
                 <a:cs typeface="PingFang TC"/>
               </a:rPr>
-              <a:t>19 / 22</a:t>
+              <a:t>18 / 23</a:t>
             </a:r>
           </a:p>
         </p:txBody>
@@ -21004,19 +20655,19 @@
           <p:cNvPr id="7" name="">
             <a:extLst>
               <a:ext uri="{FF2B5EF4-FFF2-40B4-BE49-F238E27FC236}">
-                <a16:creationId xmlns:a16="http://schemas.microsoft.com/office/drawing/2014/main" id="{27A1CCD5-B26A-4035-801D-C98F40910D30}"/>
-              </a:ext>
-            </a:extLst>
-          </p:cNvPr>
-          <p:cNvSpPr>
-            <a:spLocks noGrp="1"/>
-          </p:cNvSpPr>
-          <p:nvPr/>
-        </p:nvSpPr>
-        <p:spPr>
-          <a:xfrm>
-            <a:off x="609600" y="2333625"/>
-            <a:ext cx="5372100" cy="1657350"/>
+                <a16:creationId xmlns:a16="http://schemas.microsoft.com/office/drawing/2014/main" id="{050C16C1-4F34-4C61-A4CE-D19D4A8D8522}"/>
+              </a:ext>
+            </a:extLst>
+          </p:cNvPr>
+          <p:cNvSpPr>
+            <a:spLocks noGrp="1"/>
+          </p:cNvSpPr>
+          <p:nvPr/>
+        </p:nvSpPr>
+        <p:spPr>
+          <a:xfrm>
+            <a:off x="609600" y="2390775"/>
+            <a:ext cx="6429375" cy="3019425"/>
           </a:xfrm>
           <a:prstGeom prst="rect">
             <a:avLst/>
@@ -21038,19 +20689,19 @@
           <p:cNvPr id="8" name="">
             <a:extLst>
               <a:ext uri="{FF2B5EF4-FFF2-40B4-BE49-F238E27FC236}">
-                <a16:creationId xmlns:a16="http://schemas.microsoft.com/office/drawing/2014/main" id="{400BA3D1-834E-4646-9683-131ABCF808E2}"/>
-              </a:ext>
-            </a:extLst>
-          </p:cNvPr>
-          <p:cNvSpPr>
-            <a:spLocks noGrp="1"/>
-          </p:cNvSpPr>
-          <p:nvPr/>
-        </p:nvSpPr>
-        <p:spPr>
-          <a:xfrm>
-            <a:off x="609600" y="2333625"/>
-            <a:ext cx="47625" cy="1657350"/>
+                <a16:creationId xmlns:a16="http://schemas.microsoft.com/office/drawing/2014/main" id="{5EF92AF1-462B-4BBA-9616-A393CA3B2934}"/>
+              </a:ext>
+            </a:extLst>
+          </p:cNvPr>
+          <p:cNvSpPr>
+            <a:spLocks noGrp="1"/>
+          </p:cNvSpPr>
+          <p:nvPr/>
+        </p:nvSpPr>
+        <p:spPr>
+          <a:xfrm>
+            <a:off x="609600" y="2390775"/>
+            <a:ext cx="66675" cy="3019425"/>
           </a:xfrm>
           <a:prstGeom prst="rect">
             <a:avLst/>
@@ -21072,19 +20723,19 @@
           <p:cNvPr id="9" name="">
             <a:extLst>
               <a:ext uri="{FF2B5EF4-FFF2-40B4-BE49-F238E27FC236}">
-                <a16:creationId xmlns:a16="http://schemas.microsoft.com/office/drawing/2014/main" id="{066F096E-6BFD-4B19-BFFC-76160372441F}"/>
-              </a:ext>
-            </a:extLst>
-          </p:cNvPr>
-          <p:cNvSpPr>
-            <a:spLocks noGrp="1"/>
-          </p:cNvSpPr>
-          <p:nvPr/>
-        </p:nvSpPr>
-        <p:spPr>
-          <a:xfrm>
-            <a:off x="819150" y="2505075"/>
-            <a:ext cx="647700" cy="428625"/>
+                <a16:creationId xmlns:a16="http://schemas.microsoft.com/office/drawing/2014/main" id="{C1A52D7E-E401-4F1A-912A-DD72A311A838}"/>
+              </a:ext>
+            </a:extLst>
+          </p:cNvPr>
+          <p:cNvSpPr>
+            <a:spLocks noGrp="1"/>
+          </p:cNvSpPr>
+          <p:nvPr/>
+        </p:nvSpPr>
+        <p:spPr>
+          <a:xfrm>
+            <a:off x="904875" y="2590800"/>
+            <a:ext cx="5810250" cy="342900"/>
           </a:xfrm>
           <a:prstGeom prst="rect">
             <a:avLst/>
@@ -21102,7 +20753,7 @@
           <a:p>
             <a:pPr>
               <a:buNone/>
-              <a:defRPr sz="2025" b="1">
+              <a:defRPr sz="1500" b="1">
                 <a:solidFill>
                   <a:srgbClr val="E63946"/>
                 </a:solidFill>
@@ -21112,7 +20763,7 @@
               </a:defRPr>
             </a:pPr>
             <a:r>
-              <a:rPr sz="2025" b="1">
+              <a:rPr sz="1500" b="1">
                 <a:solidFill>
                   <a:srgbClr val="E63946"/>
                 </a:solidFill>
@@ -21120,7 +20771,7 @@
                 <a:ea typeface="PingFang TC"/>
                 <a:cs typeface="PingFang TC"/>
               </a:rPr>
-              <a:t>01</a:t>
+              <a:t>問題長這樣</a:t>
             </a:r>
           </a:p>
         </p:txBody>
@@ -21130,19 +20781,19 @@
           <p:cNvPr id="10" name="">
             <a:extLst>
               <a:ext uri="{FF2B5EF4-FFF2-40B4-BE49-F238E27FC236}">
-                <a16:creationId xmlns:a16="http://schemas.microsoft.com/office/drawing/2014/main" id="{9B2C30A9-4597-48FB-9C72-464F020DDEFA}"/>
-              </a:ext>
-            </a:extLst>
-          </p:cNvPr>
-          <p:cNvSpPr>
-            <a:spLocks noGrp="1"/>
-          </p:cNvSpPr>
-          <p:nvPr/>
-        </p:nvSpPr>
-        <p:spPr>
-          <a:xfrm>
-            <a:off x="1524000" y="2505075"/>
-            <a:ext cx="4191000" cy="457200"/>
+                <a16:creationId xmlns:a16="http://schemas.microsoft.com/office/drawing/2014/main" id="{C2659FCB-3F76-4A54-B0C6-739F0F74006E}"/>
+              </a:ext>
+            </a:extLst>
+          </p:cNvPr>
+          <p:cNvSpPr>
+            <a:spLocks noGrp="1"/>
+          </p:cNvSpPr>
+          <p:nvPr/>
+        </p:nvSpPr>
+        <p:spPr>
+          <a:xfrm>
+            <a:off x="904875" y="3162300"/>
+            <a:ext cx="5857875" cy="1962150"/>
           </a:xfrm>
           <a:prstGeom prst="rect">
             <a:avLst/>
@@ -21158,19 +20809,21 @@
           </a:bodyPr>
           <a:lstStyle/>
           <a:p>
-            <a:pPr>
-              <a:buNone/>
-              <a:defRPr sz="2175" b="1">
+            <a:r>
+              <a:rPr sz="2700" b="1">
                 <a:solidFill>
                   <a:srgbClr val="121212"/>
                 </a:solidFill>
                 <a:latin typeface="PingFang TC"/>
                 <a:ea typeface="PingFang TC"/>
                 <a:cs typeface="PingFang TC"/>
-              </a:defRPr>
-            </a:pPr>
-            <a:r>
-              <a:rPr sz="2175" b="1">
+              </a:rPr>
+              <a:t>根據以下有來源的困難，</a:t>
+            </a:r>
+          </a:p>
+          <a:p>
+            <a:r>
+              <a:rPr sz="2700" b="1">
                 <a:solidFill>
                   <a:srgbClr val="121212"/>
                 </a:solidFill>
@@ -21178,7 +20831,7 @@
                 <a:ea typeface="PingFang TC"/>
                 <a:cs typeface="PingFang TC"/>
               </a:rPr>
-              <a:t>解誰的哪個困難？</a:t>
+              <a:t>列三個適合小團隊切入的機會。</a:t>
             </a:r>
           </a:p>
         </p:txBody>
@@ -21188,19 +20841,19 @@
           <p:cNvPr id="11" name="">
             <a:extLst>
               <a:ext uri="{FF2B5EF4-FFF2-40B4-BE49-F238E27FC236}">
-                <a16:creationId xmlns:a16="http://schemas.microsoft.com/office/drawing/2014/main" id="{149FFC90-3B89-4B88-A159-F50282024610}"/>
-              </a:ext>
-            </a:extLst>
-          </p:cNvPr>
-          <p:cNvSpPr>
-            <a:spLocks noGrp="1"/>
-          </p:cNvSpPr>
-          <p:nvPr/>
-        </p:nvSpPr>
-        <p:spPr>
-          <a:xfrm>
-            <a:off x="838200" y="3105150"/>
-            <a:ext cx="4867275" cy="514350"/>
+                <a16:creationId xmlns:a16="http://schemas.microsoft.com/office/drawing/2014/main" id="{7C18F928-A58F-4CEC-B00E-8B67AECA04F5}"/>
+              </a:ext>
+            </a:extLst>
+          </p:cNvPr>
+          <p:cNvSpPr>
+            <a:spLocks noGrp="1"/>
+          </p:cNvSpPr>
+          <p:nvPr/>
+        </p:nvSpPr>
+        <p:spPr>
+          <a:xfrm>
+            <a:off x="7620000" y="2428875"/>
+            <a:ext cx="3790950" cy="438150"/>
           </a:xfrm>
           <a:prstGeom prst="rect">
             <a:avLst/>
@@ -21218,25 +20871,25 @@
           <a:p>
             <a:pPr>
               <a:buNone/>
-              <a:defRPr sz="1650" b="0">
-                <a:solidFill>
-                  <a:srgbClr val="626262"/>
-                </a:solidFill>
-                <a:latin typeface="PingFang TC"/>
-                <a:ea typeface="PingFang TC"/>
-                <a:cs typeface="PingFang TC"/>
-              </a:defRPr>
-            </a:pPr>
-            <a:r>
-              <a:rPr sz="1650" b="0">
-                <a:solidFill>
-                  <a:srgbClr val="626262"/>
-                </a:solidFill>
-                <a:latin typeface="PingFang TC"/>
-                <a:ea typeface="PingFang TC"/>
-                <a:cs typeface="PingFang TC"/>
-              </a:rPr>
-              <a:t>例：早餐店老闆尖峰漏單，不是「餐飲業數位轉型」</a:t>
+              <a:defRPr sz="1800" b="1">
+                <a:solidFill>
+                  <a:srgbClr val="E63946"/>
+                </a:solidFill>
+                <a:latin typeface="PingFang TC"/>
+                <a:ea typeface="PingFang TC"/>
+                <a:cs typeface="PingFang TC"/>
+              </a:defRPr>
+            </a:pPr>
+            <a:r>
+              <a:rPr sz="1800" b="1">
+                <a:solidFill>
+                  <a:srgbClr val="E63946"/>
+                </a:solidFill>
+                <a:latin typeface="PingFang TC"/>
+                <a:ea typeface="PingFang TC"/>
+                <a:cs typeface="PingFang TC"/>
+              </a:rPr>
+              <a:t>每個機會要寫</a:t>
             </a:r>
           </a:p>
         </p:txBody>
@@ -21246,19 +20899,77 @@
           <p:cNvPr id="12" name="">
             <a:extLst>
               <a:ext uri="{FF2B5EF4-FFF2-40B4-BE49-F238E27FC236}">
-                <a16:creationId xmlns:a16="http://schemas.microsoft.com/office/drawing/2014/main" id="{C0389E3D-C56E-4707-A449-0AC32CA578CA}"/>
-              </a:ext>
-            </a:extLst>
-          </p:cNvPr>
-          <p:cNvSpPr>
-            <a:spLocks noGrp="1"/>
-          </p:cNvSpPr>
-          <p:nvPr/>
-        </p:nvSpPr>
-        <p:spPr>
-          <a:xfrm>
-            <a:off x="838200" y="3714750"/>
-            <a:ext cx="4905375" cy="19050"/>
+                <a16:creationId xmlns:a16="http://schemas.microsoft.com/office/drawing/2014/main" id="{CA261E7D-3F50-4CDF-BA4D-9BDCEA023C9F}"/>
+              </a:ext>
+            </a:extLst>
+          </p:cNvPr>
+          <p:cNvSpPr>
+            <a:spLocks noGrp="1"/>
+          </p:cNvSpPr>
+          <p:nvPr/>
+        </p:nvSpPr>
+        <p:spPr>
+          <a:xfrm>
+            <a:off x="7620000" y="3019425"/>
+            <a:ext cx="3771900" cy="571500"/>
+          </a:xfrm>
+          <a:prstGeom prst="rect">
+            <a:avLst/>
+          </a:prstGeom>
+          <a:noFill/>
+          <a:ln w="0">
+            <a:noFill/>
+          </a:ln>
+        </p:spPr>
+        <p:txBody>
+          <a:bodyPr>
+            <a:noAutofit/>
+          </a:bodyPr>
+          <a:lstStyle/>
+          <a:p>
+            <a:pPr>
+              <a:buNone/>
+              <a:defRPr sz="2100" b="1">
+                <a:solidFill>
+                  <a:srgbClr val="121212"/>
+                </a:solidFill>
+                <a:latin typeface="PingFang TC"/>
+                <a:ea typeface="PingFang TC"/>
+                <a:cs typeface="PingFang TC"/>
+              </a:defRPr>
+            </a:pPr>
+            <a:r>
+              <a:rPr sz="2100" b="1">
+                <a:solidFill>
+                  <a:srgbClr val="121212"/>
+                </a:solidFill>
+                <a:latin typeface="PingFang TC"/>
+                <a:ea typeface="PingFang TC"/>
+                <a:cs typeface="PingFang TC"/>
+              </a:rPr>
+              <a:t>解誰的哪個困難？第一個會付錢的人是誰？</a:t>
+            </a:r>
+          </a:p>
+        </p:txBody>
+      </p:sp>
+      <p:sp>
+        <p:nvSpPr>
+          <p:cNvPr id="13" name="">
+            <a:extLst>
+              <a:ext uri="{FF2B5EF4-FFF2-40B4-BE49-F238E27FC236}">
+                <a16:creationId xmlns:a16="http://schemas.microsoft.com/office/drawing/2014/main" id="{39D6E7C0-AA95-4301-9EC4-3A9BBA345C59}"/>
+              </a:ext>
+            </a:extLst>
+          </p:cNvPr>
+          <p:cNvSpPr>
+            <a:spLocks noGrp="1"/>
+          </p:cNvSpPr>
+          <p:nvPr/>
+        </p:nvSpPr>
+        <p:spPr>
+          <a:xfrm>
+            <a:off x="7620000" y="3695700"/>
+            <a:ext cx="3810000" cy="19050"/>
           </a:xfrm>
           <a:prstGeom prst="rect">
             <a:avLst/>
@@ -21277,31 +20988,169 @@
       </p:sp>
       <p:sp>
         <p:nvSpPr>
-          <p:cNvPr id="13" name="">
-            <a:extLst>
-              <a:ext uri="{FF2B5EF4-FFF2-40B4-BE49-F238E27FC236}">
-                <a16:creationId xmlns:a16="http://schemas.microsoft.com/office/drawing/2014/main" id="{CE170350-F5E0-44DF-A0AD-00F684A3D9DC}"/>
-              </a:ext>
-            </a:extLst>
-          </p:cNvPr>
-          <p:cNvSpPr>
-            <a:spLocks noGrp="1"/>
-          </p:cNvSpPr>
-          <p:nvPr/>
-        </p:nvSpPr>
-        <p:spPr>
-          <a:xfrm>
-            <a:off x="6210300" y="2333625"/>
-            <a:ext cx="5372100" cy="1657350"/>
+          <p:cNvPr id="14" name="">
+            <a:extLst>
+              <a:ext uri="{FF2B5EF4-FFF2-40B4-BE49-F238E27FC236}">
+                <a16:creationId xmlns:a16="http://schemas.microsoft.com/office/drawing/2014/main" id="{E2BF70FB-348E-42A6-8EB7-2452D5ED2731}"/>
+              </a:ext>
+            </a:extLst>
+          </p:cNvPr>
+          <p:cNvSpPr>
+            <a:spLocks noGrp="1"/>
+          </p:cNvSpPr>
+          <p:nvPr/>
+        </p:nvSpPr>
+        <p:spPr>
+          <a:xfrm>
+            <a:off x="7620000" y="3990975"/>
+            <a:ext cx="3781425" cy="1104900"/>
+          </a:xfrm>
+          <a:prstGeom prst="rect">
+            <a:avLst/>
+          </a:prstGeom>
+          <a:noFill/>
+          <a:ln w="0">
+            <a:noFill/>
+          </a:ln>
+        </p:spPr>
+        <p:txBody>
+          <a:bodyPr>
+            <a:noAutofit/>
+          </a:bodyPr>
+          <a:lstStyle/>
+          <a:p>
+            <a:r>
+              <a:rPr sz="2100" b="0">
+                <a:solidFill>
+                  <a:srgbClr val="121212"/>
+                </a:solidFill>
+                <a:latin typeface="PingFang TC"/>
+                <a:ea typeface="PingFang TC"/>
+                <a:cs typeface="PingFang TC"/>
+              </a:rPr>
+              <a:t>現在他付錢給誰？</a:t>
+            </a:r>
+          </a:p>
+          <a:p>
+            <a:r>
+              <a:rPr sz="2100" b="0">
+                <a:solidFill>
+                  <a:srgbClr val="121212"/>
+                </a:solidFill>
+                <a:latin typeface="PingFang TC"/>
+                <a:ea typeface="PingFang TC"/>
+                <a:cs typeface="PingFang TC"/>
+              </a:rPr>
+              <a:t>為什麼是現在（AI、法規、行為改變）？</a:t>
+            </a:r>
+          </a:p>
+        </p:txBody>
+      </p:sp>
+      <p:sp>
+        <p:nvSpPr>
+          <p:cNvPr id="15" name="">
+            <a:extLst>
+              <a:ext uri="{FF2B5EF4-FFF2-40B4-BE49-F238E27FC236}">
+                <a16:creationId xmlns:a16="http://schemas.microsoft.com/office/drawing/2014/main" id="{9399EBA7-F7A6-4CBC-8E46-A7A6B884886E}"/>
+              </a:ext>
+            </a:extLst>
+          </p:cNvPr>
+          <p:cNvSpPr>
+            <a:spLocks noGrp="1"/>
+          </p:cNvSpPr>
+          <p:nvPr/>
+        </p:nvSpPr>
+        <p:spPr>
+          <a:xfrm>
+            <a:off x="609600" y="5638800"/>
+            <a:ext cx="10715625" cy="495300"/>
+          </a:xfrm>
+          <a:prstGeom prst="rect">
+            <a:avLst/>
+          </a:prstGeom>
+          <a:noFill/>
+          <a:ln w="0">
+            <a:noFill/>
+          </a:ln>
+        </p:spPr>
+        <p:txBody>
+          <a:bodyPr>
+            <a:noAutofit/>
+          </a:bodyPr>
+          <a:lstStyle/>
+          <a:p>
+            <a:pPr>
+              <a:buNone/>
+              <a:defRPr sz="1875" b="0">
+                <a:solidFill>
+                  <a:srgbClr val="1D3A5F"/>
+                </a:solidFill>
+                <a:latin typeface="PingFang TC"/>
+                <a:ea typeface="PingFang TC"/>
+                <a:cs typeface="PingFang TC"/>
+              </a:defRPr>
+            </a:pPr>
+            <a:r>
+              <a:rPr sz="1875" b="0">
+                <a:solidFill>
+                  <a:srgbClr val="1D3A5F"/>
+                </a:solidFill>
+                <a:latin typeface="PingFang TC"/>
+                <a:ea typeface="PingFang TC"/>
+                <a:cs typeface="PingFang TC"/>
+              </a:rPr>
+              <a:t>按鈕複製「問題＋卡 2 證據」→ 到工具 ⌘V 貼上、送出。不要給「做 App」的答案，除非說得出第一個付錢的人。A／B／C 各一行貼回。</a:t>
+            </a:r>
+          </a:p>
+        </p:txBody>
+      </p:sp>
+    </p:spTree>
+  </p:cSld>
+  <p:clrMapOvr>
+    <a:masterClrMapping/>
+  </p:clrMapOvr>
+</p:sld>
+</file>
+
+<file path=ppt/slides/slide44.xml><?xml version="1.0" encoding="utf-8"?>
+<p:sld xmlns:a="http://schemas.openxmlformats.org/drawingml/2006/main" xmlns:p="http://schemas.openxmlformats.org/presentationml/2006/main" xmlns:r="http://schemas.openxmlformats.org/officeDocument/2006/relationships">
+  <p:cSld>
+    <p:spTree>
+      <p:nvGrpSpPr>
+        <p:cNvPr id="1" name=""/>
+        <p:cNvGrpSpPr/>
+        <p:nvPr/>
+      </p:nvGrpSpPr>
+      <p:grpSpPr/>
+      <p:sp>
+        <p:nvSpPr>
+          <p:cNvPr id="14" name="">
+            <a:extLst>
+              <a:ext uri="{FF2B5EF4-FFF2-40B4-BE49-F238E27FC236}">
+                <a16:creationId xmlns:a16="http://schemas.microsoft.com/office/drawing/2014/main" id="{D99C096F-6EB5-41EA-B969-490BF1A5FE7B}"/>
+              </a:ext>
+            </a:extLst>
+          </p:cNvPr>
+          <p:cNvSpPr>
+            <a:spLocks noGrp="1"/>
+          </p:cNvSpPr>
+          <p:nvPr/>
+        </p:nvSpPr>
+        <p:spPr>
+          <a:xfrm>
+            <a:off x="0" y="0"/>
+            <a:ext cx="12192000" cy="6858000"/>
           </a:xfrm>
           <a:prstGeom prst="rect">
             <a:avLst/>
           </a:prstGeom>
           <a:solidFill>
-            <a:srgbClr val="FFFFFF"/>
+            <a:srgbClr val="F6F3EE"/>
           </a:solidFill>
-          <a:ln w="0">
-            <a:noFill/>
+          <a:ln w="9525">
+            <a:solidFill>
+              <a:srgbClr val="F6F3EE"/>
+            </a:solidFill>
           </a:ln>
         </p:spPr>
         <p:txBody>
@@ -21311,31 +21160,207 @@
       </p:sp>
       <p:sp>
         <p:nvSpPr>
-          <p:cNvPr id="14" name="">
-            <a:extLst>
-              <a:ext uri="{FF2B5EF4-FFF2-40B4-BE49-F238E27FC236}">
-                <a16:creationId xmlns:a16="http://schemas.microsoft.com/office/drawing/2014/main" id="{AD3B1000-E290-49F8-9D0E-0C06A872F305}"/>
-              </a:ext>
-            </a:extLst>
-          </p:cNvPr>
-          <p:cNvSpPr>
-            <a:spLocks noGrp="1"/>
-          </p:cNvSpPr>
-          <p:nvPr/>
-        </p:nvSpPr>
-        <p:spPr>
-          <a:xfrm>
-            <a:off x="6210300" y="2333625"/>
-            <a:ext cx="47625" cy="1657350"/>
+          <p:cNvPr id="2" name="">
+            <a:extLst>
+              <a:ext uri="{FF2B5EF4-FFF2-40B4-BE49-F238E27FC236}">
+                <a16:creationId xmlns:a16="http://schemas.microsoft.com/office/drawing/2014/main" id="{F945F193-D6A2-4A5E-BD73-6B69757A3820}"/>
+              </a:ext>
+            </a:extLst>
+          </p:cNvPr>
+          <p:cNvSpPr>
+            <a:spLocks noGrp="1"/>
+          </p:cNvSpPr>
+          <p:nvPr/>
+        </p:nvSpPr>
+        <p:spPr>
+          <a:xfrm>
+            <a:off x="609600" y="285750"/>
+            <a:ext cx="10287000" cy="285750"/>
+          </a:xfrm>
+          <a:prstGeom prst="rect">
+            <a:avLst/>
+          </a:prstGeom>
+          <a:noFill/>
+          <a:ln w="0">
+            <a:noFill/>
+          </a:ln>
+        </p:spPr>
+        <p:txBody>
+          <a:bodyPr anchor="ctr">
+            <a:normAutofit fontScale="94444"/>
+          </a:bodyPr>
+          <a:lstStyle/>
+          <a:p>
+            <a:pPr algn="l">
+              <a:buNone/>
+              <a:defRPr sz="1350" b="1">
+                <a:solidFill>
+                  <a:srgbClr val="E63946"/>
+                </a:solidFill>
+                <a:latin typeface="PingFang TC"/>
+                <a:ea typeface="PingFang TC"/>
+                <a:cs typeface="PingFang TC"/>
+              </a:defRPr>
+            </a:pPr>
+            <a:r>
+              <a:rPr sz="1350" b="1">
+                <a:solidFill>
+                  <a:srgbClr val="E63946"/>
+                </a:solidFill>
+                <a:latin typeface="PingFang TC"/>
+                <a:ea typeface="PingFang TC"/>
+                <a:cs typeface="PingFang TC"/>
+              </a:rPr>
+              <a:t>WEEK 4  /  從我的痛看產業</a:t>
+            </a:r>
+          </a:p>
+        </p:txBody>
+      </p:sp>
+      <p:sp>
+        <p:nvSpPr>
+          <p:cNvPr id="3" name="">
+            <a:extLst>
+              <a:ext uri="{FF2B5EF4-FFF2-40B4-BE49-F238E27FC236}">
+                <a16:creationId xmlns:a16="http://schemas.microsoft.com/office/drawing/2014/main" id="{EBE0DE06-5026-47E2-9F71-7631AE1BDAE2}"/>
+              </a:ext>
+            </a:extLst>
+          </p:cNvPr>
+          <p:cNvSpPr>
+            <a:spLocks noGrp="1"/>
+          </p:cNvSpPr>
+          <p:nvPr/>
+        </p:nvSpPr>
+        <p:spPr>
+          <a:xfrm>
+            <a:off x="609600" y="838200"/>
+            <a:ext cx="10972800" cy="762000"/>
+          </a:xfrm>
+          <a:prstGeom prst="rect">
+            <a:avLst/>
+          </a:prstGeom>
+          <a:noFill/>
+          <a:ln w="0">
+            <a:noFill/>
+          </a:ln>
+        </p:spPr>
+        <p:txBody>
+          <a:bodyPr anchor="ctr">
+            <a:normAutofit fontScale="100000"/>
+          </a:bodyPr>
+          <a:lstStyle/>
+          <a:p>
+            <a:pPr algn="l">
+              <a:buNone/>
+              <a:defRPr sz="3450" b="1">
+                <a:solidFill>
+                  <a:srgbClr val="121212"/>
+                </a:solidFill>
+                <a:latin typeface="PingFang TC"/>
+                <a:ea typeface="PingFang TC"/>
+                <a:cs typeface="PingFang TC"/>
+              </a:defRPr>
+            </a:pPr>
+            <a:r>
+              <a:rPr sz="3450" b="1">
+                <a:solidFill>
+                  <a:srgbClr val="121212"/>
+                </a:solidFill>
+                <a:latin typeface="PingFang TC"/>
+                <a:ea typeface="PingFang TC"/>
+                <a:cs typeface="PingFang TC"/>
+              </a:rPr>
+              <a:t>Gemini 說 vs NotebookLM 查到</a:t>
+            </a:r>
+          </a:p>
+        </p:txBody>
+      </p:sp>
+      <p:sp>
+        <p:nvSpPr>
+          <p:cNvPr id="4" name="">
+            <a:extLst>
+              <a:ext uri="{FF2B5EF4-FFF2-40B4-BE49-F238E27FC236}">
+                <a16:creationId xmlns:a16="http://schemas.microsoft.com/office/drawing/2014/main" id="{E0ED7F9D-7CE4-45F4-B7CB-9761EE5DF652}"/>
+              </a:ext>
+            </a:extLst>
+          </p:cNvPr>
+          <p:cNvSpPr>
+            <a:spLocks noGrp="1"/>
+          </p:cNvSpPr>
+          <p:nvPr/>
+        </p:nvSpPr>
+        <p:spPr>
+          <a:xfrm>
+            <a:off x="609600" y="1619250"/>
+            <a:ext cx="10972800" cy="476250"/>
+          </a:xfrm>
+          <a:prstGeom prst="rect">
+            <a:avLst/>
+          </a:prstGeom>
+          <a:noFill/>
+          <a:ln w="0">
+            <a:noFill/>
+          </a:ln>
+        </p:spPr>
+        <p:txBody>
+          <a:bodyPr anchor="ctr">
+            <a:normAutofit fontScale="100000"/>
+          </a:bodyPr>
+          <a:lstStyle/>
+          <a:p>
+            <a:pPr algn="l">
+              <a:buNone/>
+              <a:defRPr sz="1800" b="0">
+                <a:solidFill>
+                  <a:srgbClr val="626262"/>
+                </a:solidFill>
+                <a:latin typeface="PingFang TC"/>
+                <a:ea typeface="PingFang TC"/>
+                <a:cs typeface="PingFang TC"/>
+              </a:defRPr>
+            </a:pPr>
+            <a:r>
+              <a:rPr sz="1800" b="0">
+                <a:solidFill>
+                  <a:srgbClr val="626262"/>
+                </a:solidFill>
+                <a:latin typeface="PingFang TC"/>
+                <a:ea typeface="PingFang TC"/>
+                <a:cs typeface="PingFang TC"/>
+              </a:rPr>
+              <a:t>貼回 app 時一定要標來源；老師看的是來源比例，不是 AI 寫得多漂亮</a:t>
+            </a:r>
+          </a:p>
+        </p:txBody>
+      </p:sp>
+      <p:sp>
+        <p:nvSpPr>
+          <p:cNvPr id="5" name="">
+            <a:extLst>
+              <a:ext uri="{FF2B5EF4-FFF2-40B4-BE49-F238E27FC236}">
+                <a16:creationId xmlns:a16="http://schemas.microsoft.com/office/drawing/2014/main" id="{A2DC1420-12C3-4916-8E72-AE7443D5B25C}"/>
+              </a:ext>
+            </a:extLst>
+          </p:cNvPr>
+          <p:cNvSpPr>
+            <a:spLocks noGrp="1"/>
+          </p:cNvSpPr>
+          <p:nvPr/>
+        </p:nvSpPr>
+        <p:spPr>
+          <a:xfrm>
+            <a:off x="609600" y="6286500"/>
+            <a:ext cx="10972800" cy="19050"/>
           </a:xfrm>
           <a:prstGeom prst="rect">
             <a:avLst/>
           </a:prstGeom>
           <a:solidFill>
-            <a:srgbClr val="E63946"/>
+            <a:srgbClr val="D6D0C7"/>
           </a:solidFill>
-          <a:ln w="0">
-            <a:noFill/>
+          <a:ln w="9525">
+            <a:solidFill>
+              <a:srgbClr val="D6D0C7"/>
+            </a:solidFill>
           </a:ln>
         </p:spPr>
         <p:txBody>
@@ -21345,40 +21370,156 @@
       </p:sp>
       <p:sp>
         <p:nvSpPr>
-          <p:cNvPr id="15" name="">
-            <a:extLst>
-              <a:ext uri="{FF2B5EF4-FFF2-40B4-BE49-F238E27FC236}">
-                <a16:creationId xmlns:a16="http://schemas.microsoft.com/office/drawing/2014/main" id="{639B8976-571E-4A1C-849D-D2C3FF78EED3}"/>
-              </a:ext>
-            </a:extLst>
-          </p:cNvPr>
-          <p:cNvSpPr>
-            <a:spLocks noGrp="1"/>
-          </p:cNvSpPr>
-          <p:nvPr/>
-        </p:nvSpPr>
-        <p:spPr>
-          <a:xfrm>
-            <a:off x="6419850" y="2505075"/>
-            <a:ext cx="647700" cy="428625"/>
-          </a:xfrm>
-          <a:prstGeom prst="rect">
-            <a:avLst/>
-          </a:prstGeom>
-          <a:noFill/>
-          <a:ln w="0">
-            <a:noFill/>
-          </a:ln>
-        </p:spPr>
-        <p:txBody>
-          <a:bodyPr>
-            <a:noAutofit/>
-          </a:bodyPr>
-          <a:lstStyle/>
-          <a:p>
-            <a:pPr>
-              <a:buNone/>
-              <a:defRPr sz="2025" b="1">
+          <p:cNvPr id="6" name="">
+            <a:extLst>
+              <a:ext uri="{FF2B5EF4-FFF2-40B4-BE49-F238E27FC236}">
+                <a16:creationId xmlns:a16="http://schemas.microsoft.com/office/drawing/2014/main" id="{2F07DDDE-8D75-462F-91D5-4B36B43575EE}"/>
+              </a:ext>
+            </a:extLst>
+          </p:cNvPr>
+          <p:cNvSpPr>
+            <a:spLocks noGrp="1"/>
+          </p:cNvSpPr>
+          <p:nvPr/>
+        </p:nvSpPr>
+        <p:spPr>
+          <a:xfrm>
+            <a:off x="609600" y="6362700"/>
+            <a:ext cx="2381250" cy="209550"/>
+          </a:xfrm>
+          <a:prstGeom prst="rect">
+            <a:avLst/>
+          </a:prstGeom>
+          <a:noFill/>
+          <a:ln w="0">
+            <a:noFill/>
+          </a:ln>
+        </p:spPr>
+        <p:txBody>
+          <a:bodyPr anchor="ctr">
+            <a:normAutofit fontScale="86111"/>
+          </a:bodyPr>
+          <a:lstStyle/>
+          <a:p>
+            <a:pPr algn="l">
+              <a:buNone/>
+              <a:defRPr sz="900" b="0">
+                <a:solidFill>
+                  <a:srgbClr val="626262"/>
+                </a:solidFill>
+                <a:latin typeface="PingFang TC"/>
+                <a:ea typeface="PingFang TC"/>
+                <a:cs typeface="PingFang TC"/>
+              </a:defRPr>
+            </a:pPr>
+            <a:r>
+              <a:rPr sz="900" b="0">
+                <a:solidFill>
+                  <a:srgbClr val="626262"/>
+                </a:solidFill>
+                <a:latin typeface="PingFang TC"/>
+                <a:ea typeface="PingFang TC"/>
+                <a:cs typeface="PingFang TC"/>
+              </a:rPr>
+              <a:t>Startup Journey Lab</a:t>
+            </a:r>
+          </a:p>
+        </p:txBody>
+      </p:sp>
+      <p:sp>
+        <p:nvSpPr>
+          <p:cNvPr id="7" name="">
+            <a:extLst>
+              <a:ext uri="{FF2B5EF4-FFF2-40B4-BE49-F238E27FC236}">
+                <a16:creationId xmlns:a16="http://schemas.microsoft.com/office/drawing/2014/main" id="{C5FE7A55-B727-4B6F-9EE2-D39F3300B62E}"/>
+              </a:ext>
+            </a:extLst>
+          </p:cNvPr>
+          <p:cNvSpPr>
+            <a:spLocks noGrp="1"/>
+          </p:cNvSpPr>
+          <p:nvPr/>
+        </p:nvSpPr>
+        <p:spPr>
+          <a:xfrm>
+            <a:off x="10477500" y="6362700"/>
+            <a:ext cx="1104900" cy="209550"/>
+          </a:xfrm>
+          <a:prstGeom prst="rect">
+            <a:avLst/>
+          </a:prstGeom>
+          <a:noFill/>
+          <a:ln w="0">
+            <a:noFill/>
+          </a:ln>
+        </p:spPr>
+        <p:txBody>
+          <a:bodyPr anchor="ctr">
+            <a:normAutofit fontScale="86111"/>
+          </a:bodyPr>
+          <a:lstStyle/>
+          <a:p>
+            <a:pPr algn="r">
+              <a:buNone/>
+              <a:defRPr sz="900" b="0">
+                <a:solidFill>
+                  <a:srgbClr val="626262"/>
+                </a:solidFill>
+                <a:latin typeface="PingFang TC"/>
+                <a:ea typeface="PingFang TC"/>
+                <a:cs typeface="PingFang TC"/>
+              </a:defRPr>
+            </a:pPr>
+            <a:r>
+              <a:rPr sz="900" b="0">
+                <a:solidFill>
+                  <a:srgbClr val="626262"/>
+                </a:solidFill>
+                <a:latin typeface="PingFang TC"/>
+                <a:ea typeface="PingFang TC"/>
+                <a:cs typeface="PingFang TC"/>
+              </a:rPr>
+              <a:t>19 / 23</a:t>
+            </a:r>
+          </a:p>
+        </p:txBody>
+      </p:sp>
+      <p:sp>
+        <p:nvSpPr>
+          <p:cNvPr id="8" name="">
+            <a:extLst>
+              <a:ext uri="{FF2B5EF4-FFF2-40B4-BE49-F238E27FC236}">
+                <a16:creationId xmlns:a16="http://schemas.microsoft.com/office/drawing/2014/main" id="{E25F88BD-8320-4506-A81F-3D2EC6975FEA}"/>
+              </a:ext>
+            </a:extLst>
+          </p:cNvPr>
+          <p:cNvSpPr>
+            <a:spLocks noGrp="1"/>
+          </p:cNvSpPr>
+          <p:nvPr/>
+        </p:nvSpPr>
+        <p:spPr>
+          <a:xfrm>
+            <a:off x="609600" y="2428875"/>
+            <a:ext cx="4476750" cy="457200"/>
+          </a:xfrm>
+          <a:prstGeom prst="rect">
+            <a:avLst/>
+          </a:prstGeom>
+          <a:noFill/>
+          <a:ln w="0">
+            <a:noFill/>
+          </a:ln>
+        </p:spPr>
+        <p:txBody>
+          <a:bodyPr anchor="ctr">
+            <a:normAutofit fontScale="100000"/>
+          </a:bodyPr>
+          <a:lstStyle/>
+          <a:p>
+            <a:pPr algn="l">
+              <a:buNone/>
+              <a:defRPr sz="2325" b="1">
                 <a:solidFill>
                   <a:srgbClr val="E63946"/>
                 </a:solidFill>
@@ -21388,7 +21529,7 @@
               </a:defRPr>
             </a:pPr>
             <a:r>
-              <a:rPr sz="2025" b="1">
+              <a:rPr sz="2325" b="1">
                 <a:solidFill>
                   <a:srgbClr val="E63946"/>
                 </a:solidFill>
@@ -21396,57 +21537,59 @@
                 <a:ea typeface="PingFang TC"/>
                 <a:cs typeface="PingFang TC"/>
               </a:rPr>
-              <a:t>02</a:t>
-            </a:r>
-          </a:p>
-        </p:txBody>
-      </p:sp>
-      <p:sp>
-        <p:nvSpPr>
-          <p:cNvPr id="16" name="">
-            <a:extLst>
-              <a:ext uri="{FF2B5EF4-FFF2-40B4-BE49-F238E27FC236}">
-                <a16:creationId xmlns:a16="http://schemas.microsoft.com/office/drawing/2014/main" id="{EBA0E952-AD26-4E31-89D8-0E17D9EBCC49}"/>
-              </a:ext>
-            </a:extLst>
-          </p:cNvPr>
-          <p:cNvSpPr>
-            <a:spLocks noGrp="1"/>
-          </p:cNvSpPr>
-          <p:nvPr/>
-        </p:nvSpPr>
-        <p:spPr>
-          <a:xfrm>
-            <a:off x="7124700" y="2505075"/>
-            <a:ext cx="4191000" cy="457200"/>
-          </a:xfrm>
-          <a:prstGeom prst="rect">
-            <a:avLst/>
-          </a:prstGeom>
-          <a:noFill/>
-          <a:ln w="0">
-            <a:noFill/>
-          </a:ln>
-        </p:spPr>
-        <p:txBody>
-          <a:bodyPr>
-            <a:noAutofit/>
-          </a:bodyPr>
-          <a:lstStyle/>
-          <a:p>
-            <a:pPr>
-              <a:buNone/>
-              <a:defRPr sz="2175" b="1">
+              <a:t>Gemini／GPT 說（發散）</a:t>
+            </a:r>
+          </a:p>
+        </p:txBody>
+      </p:sp>
+      <p:sp>
+        <p:nvSpPr>
+          <p:cNvPr id="9" name="">
+            <a:extLst>
+              <a:ext uri="{FF2B5EF4-FFF2-40B4-BE49-F238E27FC236}">
+                <a16:creationId xmlns:a16="http://schemas.microsoft.com/office/drawing/2014/main" id="{0993229B-BD18-4B58-BFFD-54C5C43644DE}"/>
+              </a:ext>
+            </a:extLst>
+          </p:cNvPr>
+          <p:cNvSpPr>
+            <a:spLocks noGrp="1"/>
+          </p:cNvSpPr>
+          <p:nvPr/>
+        </p:nvSpPr>
+        <p:spPr>
+          <a:xfrm>
+            <a:off x="609600" y="3000375"/>
+            <a:ext cx="4762500" cy="2238375"/>
+          </a:xfrm>
+          <a:prstGeom prst="rect">
+            <a:avLst/>
+          </a:prstGeom>
+          <a:noFill/>
+          <a:ln w="0">
+            <a:noFill/>
+          </a:ln>
+        </p:spPr>
+        <p:txBody>
+          <a:bodyPr anchor="ctr">
+            <a:normAutofit fontScale="100000"/>
+          </a:bodyPr>
+          <a:lstStyle/>
+          <a:p>
+            <a:r>
+              <a:rPr sz="1650" b="0">
                 <a:solidFill>
                   <a:srgbClr val="121212"/>
                 </a:solidFill>
                 <a:latin typeface="PingFang TC"/>
                 <a:ea typeface="PingFang TC"/>
                 <a:cs typeface="PingFang TC"/>
-              </a:defRPr>
-            </a:pPr>
-            <a:r>
-              <a:rPr sz="2175" b="1">
+              </a:rPr>
+              <a:t>• 快、廣、會舉例</a:t>
+            </a:r>
+          </a:p>
+          <a:p>
+            <a:r>
+              <a:rPr sz="1650" b="0">
                 <a:solidFill>
                   <a:srgbClr val="121212"/>
                 </a:solidFill>
@@ -21454,96 +21597,66 @@
                 <a:ea typeface="PingFang TC"/>
                 <a:cs typeface="PingFang TC"/>
               </a:rPr>
-              <a:t>第一個會付錢的人是誰？</a:t>
-            </a:r>
-          </a:p>
-        </p:txBody>
-      </p:sp>
-      <p:sp>
-        <p:nvSpPr>
-          <p:cNvPr id="17" name="">
-            <a:extLst>
-              <a:ext uri="{FF2B5EF4-FFF2-40B4-BE49-F238E27FC236}">
-                <a16:creationId xmlns:a16="http://schemas.microsoft.com/office/drawing/2014/main" id="{27A6A621-6AE2-4020-9522-1EFCDF0C4D22}"/>
-              </a:ext>
-            </a:extLst>
-          </p:cNvPr>
-          <p:cNvSpPr>
-            <a:spLocks noGrp="1"/>
-          </p:cNvSpPr>
-          <p:nvPr/>
-        </p:nvSpPr>
-        <p:spPr>
-          <a:xfrm>
-            <a:off x="6438900" y="3105150"/>
-            <a:ext cx="4867275" cy="514350"/>
-          </a:xfrm>
-          <a:prstGeom prst="rect">
-            <a:avLst/>
-          </a:prstGeom>
-          <a:noFill/>
-          <a:ln w="0">
-            <a:noFill/>
-          </a:ln>
-        </p:spPr>
-        <p:txBody>
-          <a:bodyPr>
-            <a:noAutofit/>
-          </a:bodyPr>
-          <a:lstStyle/>
-          <a:p>
-            <a:pPr>
-              <a:buNone/>
-              <a:defRPr sz="1650" b="0">
-                <a:solidFill>
-                  <a:srgbClr val="626262"/>
-                </a:solidFill>
-                <a:latin typeface="PingFang TC"/>
-                <a:ea typeface="PingFang TC"/>
-                <a:cs typeface="PingFang TC"/>
-              </a:defRPr>
-            </a:pPr>
+              <a:t>• 會編數字、把猜測講得很肯定</a:t>
+            </a:r>
+          </a:p>
+          <a:p>
             <a:r>
               <a:rPr sz="1650" b="0">
                 <a:solidFill>
-                  <a:srgbClr val="626262"/>
-                </a:solidFill>
-                <a:latin typeface="PingFang TC"/>
-                <a:ea typeface="PingFang TC"/>
-                <a:cs typeface="PingFang TC"/>
-              </a:rPr>
-              <a:t>例：三家分店以上的早餐店老闆，不是「所有餐飲業者」</a:t>
-            </a:r>
-          </a:p>
-        </p:txBody>
-      </p:sp>
-      <p:sp>
-        <p:nvSpPr>
-          <p:cNvPr id="18" name="">
-            <a:extLst>
-              <a:ext uri="{FF2B5EF4-FFF2-40B4-BE49-F238E27FC236}">
-                <a16:creationId xmlns:a16="http://schemas.microsoft.com/office/drawing/2014/main" id="{3D5E9FEA-7654-4EFA-8998-C77A9A4BA516}"/>
-              </a:ext>
-            </a:extLst>
-          </p:cNvPr>
-          <p:cNvSpPr>
-            <a:spLocks noGrp="1"/>
-          </p:cNvSpPr>
-          <p:nvPr/>
-        </p:nvSpPr>
-        <p:spPr>
-          <a:xfrm>
-            <a:off x="6438900" y="3714750"/>
-            <a:ext cx="4905375" cy="19050"/>
+                  <a:srgbClr val="121212"/>
+                </a:solidFill>
+                <a:latin typeface="PingFang TC"/>
+                <a:ea typeface="PingFang TC"/>
+                <a:cs typeface="PingFang TC"/>
+              </a:rPr>
+              <a:t>• 用在卡 1、卡 3</a:t>
+            </a:r>
+          </a:p>
+          <a:p>
+            <a:r>
+              <a:rPr sz="1650" b="0">
+                <a:solidFill>
+                  <a:srgbClr val="121212"/>
+                </a:solidFill>
+                <a:latin typeface="PingFang TC"/>
+                <a:ea typeface="PingFang TC"/>
+                <a:cs typeface="PingFang TC"/>
+              </a:rPr>
+              <a:t>• 有數字 → 寫出處或標「估計」</a:t>
+            </a:r>
+          </a:p>
+        </p:txBody>
+      </p:sp>
+      <p:sp>
+        <p:nvSpPr>
+          <p:cNvPr id="10" name="">
+            <a:extLst>
+              <a:ext uri="{FF2B5EF4-FFF2-40B4-BE49-F238E27FC236}">
+                <a16:creationId xmlns:a16="http://schemas.microsoft.com/office/drawing/2014/main" id="{92A462A0-899F-4C1D-9C7C-25D4058895FB}"/>
+              </a:ext>
+            </a:extLst>
+          </p:cNvPr>
+          <p:cNvSpPr>
+            <a:spLocks noGrp="1"/>
+          </p:cNvSpPr>
+          <p:nvPr/>
+        </p:nvSpPr>
+        <p:spPr>
+          <a:xfrm>
+            <a:off x="5953125" y="2428875"/>
+            <a:ext cx="38100" cy="2952750"/>
           </a:xfrm>
           <a:prstGeom prst="rect">
             <a:avLst/>
           </a:prstGeom>
           <a:solidFill>
-            <a:srgbClr val="D9D5CF"/>
+            <a:srgbClr val="D6D0C7"/>
           </a:solidFill>
-          <a:ln w="0">
-            <a:noFill/>
+          <a:ln w="9525">
+            <a:solidFill>
+              <a:srgbClr val="D6D0C7"/>
+            </a:solidFill>
           </a:ln>
         </p:spPr>
         <p:txBody>
@@ -21553,108 +21666,184 @@
       </p:sp>
       <p:sp>
         <p:nvSpPr>
-          <p:cNvPr id="19" name="">
-            <a:extLst>
-              <a:ext uri="{FF2B5EF4-FFF2-40B4-BE49-F238E27FC236}">
-                <a16:creationId xmlns:a16="http://schemas.microsoft.com/office/drawing/2014/main" id="{E8F8ED3D-E01B-4FE2-8DDB-B2AFB41A9CEE}"/>
-              </a:ext>
-            </a:extLst>
-          </p:cNvPr>
-          <p:cNvSpPr>
-            <a:spLocks noGrp="1"/>
-          </p:cNvSpPr>
-          <p:nvPr/>
-        </p:nvSpPr>
-        <p:spPr>
-          <a:xfrm>
-            <a:off x="609600" y="4248150"/>
-            <a:ext cx="5372100" cy="1657350"/>
-          </a:xfrm>
-          <a:prstGeom prst="rect">
-            <a:avLst/>
-          </a:prstGeom>
-          <a:solidFill>
-            <a:srgbClr val="FFFFFF"/>
-          </a:solidFill>
-          <a:ln w="0">
-            <a:noFill/>
-          </a:ln>
-        </p:spPr>
-        <p:txBody>
-          <a:bodyPr/>
-          <a:p/>
-        </p:txBody>
-      </p:sp>
-      <p:sp>
-        <p:nvSpPr>
-          <p:cNvPr id="20" name="">
-            <a:extLst>
-              <a:ext uri="{FF2B5EF4-FFF2-40B4-BE49-F238E27FC236}">
-                <a16:creationId xmlns:a16="http://schemas.microsoft.com/office/drawing/2014/main" id="{4AB9F765-1955-4D41-9C88-83F376762D9E}"/>
-              </a:ext>
-            </a:extLst>
-          </p:cNvPr>
-          <p:cNvSpPr>
-            <a:spLocks noGrp="1"/>
-          </p:cNvSpPr>
-          <p:nvPr/>
-        </p:nvSpPr>
-        <p:spPr>
-          <a:xfrm>
-            <a:off x="609600" y="4248150"/>
-            <a:ext cx="47625" cy="1657350"/>
-          </a:xfrm>
-          <a:prstGeom prst="rect">
-            <a:avLst/>
-          </a:prstGeom>
-          <a:solidFill>
-            <a:srgbClr val="E63946"/>
-          </a:solidFill>
-          <a:ln w="0">
-            <a:noFill/>
-          </a:ln>
-        </p:spPr>
-        <p:txBody>
-          <a:bodyPr/>
-          <a:p/>
-        </p:txBody>
-      </p:sp>
-      <p:sp>
-        <p:nvSpPr>
-          <p:cNvPr id="21" name="">
-            <a:extLst>
-              <a:ext uri="{FF2B5EF4-FFF2-40B4-BE49-F238E27FC236}">
-                <a16:creationId xmlns:a16="http://schemas.microsoft.com/office/drawing/2014/main" id="{45D78E31-998E-4BFA-A554-D824FA379782}"/>
-              </a:ext>
-            </a:extLst>
-          </p:cNvPr>
-          <p:cNvSpPr>
-            <a:spLocks noGrp="1"/>
-          </p:cNvSpPr>
-          <p:nvPr/>
-        </p:nvSpPr>
-        <p:spPr>
-          <a:xfrm>
-            <a:off x="819150" y="4419600"/>
-            <a:ext cx="647700" cy="428625"/>
-          </a:xfrm>
-          <a:prstGeom prst="rect">
-            <a:avLst/>
-          </a:prstGeom>
-          <a:noFill/>
-          <a:ln w="0">
-            <a:noFill/>
-          </a:ln>
-        </p:spPr>
-        <p:txBody>
-          <a:bodyPr>
-            <a:noAutofit/>
-          </a:bodyPr>
-          <a:lstStyle/>
-          <a:p>
-            <a:pPr>
-              <a:buNone/>
-              <a:defRPr sz="2025" b="1">
+          <p:cNvPr id="11" name="">
+            <a:extLst>
+              <a:ext uri="{FF2B5EF4-FFF2-40B4-BE49-F238E27FC236}">
+                <a16:creationId xmlns:a16="http://schemas.microsoft.com/office/drawing/2014/main" id="{B13E5783-0243-4D15-B1DC-FFBD06FE9F16}"/>
+              </a:ext>
+            </a:extLst>
+          </p:cNvPr>
+          <p:cNvSpPr>
+            <a:spLocks noGrp="1"/>
+          </p:cNvSpPr>
+          <p:nvPr/>
+        </p:nvSpPr>
+        <p:spPr>
+          <a:xfrm>
+            <a:off x="6572250" y="2428875"/>
+            <a:ext cx="4476750" cy="457200"/>
+          </a:xfrm>
+          <a:prstGeom prst="rect">
+            <a:avLst/>
+          </a:prstGeom>
+          <a:noFill/>
+          <a:ln w="0">
+            <a:noFill/>
+          </a:ln>
+        </p:spPr>
+        <p:txBody>
+          <a:bodyPr anchor="ctr">
+            <a:normAutofit fontScale="100000"/>
+          </a:bodyPr>
+          <a:lstStyle/>
+          <a:p>
+            <a:pPr algn="l">
+              <a:buNone/>
+              <a:defRPr sz="2325" b="1">
+                <a:solidFill>
+                  <a:srgbClr val="14395B"/>
+                </a:solidFill>
+                <a:latin typeface="PingFang TC"/>
+                <a:ea typeface="PingFang TC"/>
+                <a:cs typeface="PingFang TC"/>
+              </a:defRPr>
+            </a:pPr>
+            <a:r>
+              <a:rPr sz="2325" b="1">
+                <a:solidFill>
+                  <a:srgbClr val="14395B"/>
+                </a:solidFill>
+                <a:latin typeface="PingFang TC"/>
+                <a:ea typeface="PingFang TC"/>
+                <a:cs typeface="PingFang TC"/>
+              </a:rPr>
+              <a:t>NotebookLM 查到（有引用）</a:t>
+            </a:r>
+          </a:p>
+        </p:txBody>
+      </p:sp>
+      <p:sp>
+        <p:nvSpPr>
+          <p:cNvPr id="12" name="">
+            <a:extLst>
+              <a:ext uri="{FF2B5EF4-FFF2-40B4-BE49-F238E27FC236}">
+                <a16:creationId xmlns:a16="http://schemas.microsoft.com/office/drawing/2014/main" id="{204B0874-5189-41D9-9F8F-D809113B0CB0}"/>
+              </a:ext>
+            </a:extLst>
+          </p:cNvPr>
+          <p:cNvSpPr>
+            <a:spLocks noGrp="1"/>
+          </p:cNvSpPr>
+          <p:nvPr/>
+        </p:nvSpPr>
+        <p:spPr>
+          <a:xfrm>
+            <a:off x="6572250" y="3000375"/>
+            <a:ext cx="4762500" cy="2238375"/>
+          </a:xfrm>
+          <a:prstGeom prst="rect">
+            <a:avLst/>
+          </a:prstGeom>
+          <a:noFill/>
+          <a:ln w="0">
+            <a:noFill/>
+          </a:ln>
+        </p:spPr>
+        <p:txBody>
+          <a:bodyPr anchor="ctr">
+            <a:normAutofit fontScale="100000"/>
+          </a:bodyPr>
+          <a:lstStyle/>
+          <a:p>
+            <a:r>
+              <a:rPr sz="1650" b="0">
+                <a:solidFill>
+                  <a:srgbClr val="121212"/>
+                </a:solidFill>
+                <a:latin typeface="PingFang TC"/>
+                <a:ea typeface="PingFang TC"/>
+                <a:cs typeface="PingFang TC"/>
+              </a:rPr>
+              <a:t>• 只根據你餵的來源回答</a:t>
+            </a:r>
+          </a:p>
+          <a:p>
+            <a:r>
+              <a:rPr sz="1650" b="0">
+                <a:solidFill>
+                  <a:srgbClr val="121212"/>
+                </a:solidFill>
+                <a:latin typeface="PingFang TC"/>
+                <a:ea typeface="PingFang TC"/>
+                <a:cs typeface="PingFang TC"/>
+              </a:rPr>
+              <a:t>• 每句點得回原文</a:t>
+            </a:r>
+          </a:p>
+          <a:p>
+            <a:r>
+              <a:rPr sz="1650" b="0">
+                <a:solidFill>
+                  <a:srgbClr val="121212"/>
+                </a:solidFill>
+                <a:latin typeface="PingFang TC"/>
+                <a:ea typeface="PingFang TC"/>
+                <a:cs typeface="PingFang TC"/>
+              </a:rPr>
+              <a:t>• 用在卡 2</a:t>
+            </a:r>
+          </a:p>
+          <a:p>
+            <a:r>
+              <a:rPr sz="1650" b="0">
+                <a:solidFill>
+                  <a:srgbClr val="121212"/>
+                </a:solidFill>
+                <a:latin typeface="PingFang TC"/>
+                <a:ea typeface="PingFang TC"/>
+                <a:cs typeface="PingFang TC"/>
+              </a:rPr>
+              <a:t>• 沒餵來源就沒答案，慢但不編</a:t>
+            </a:r>
+          </a:p>
+        </p:txBody>
+      </p:sp>
+      <p:sp>
+        <p:nvSpPr>
+          <p:cNvPr id="13" name="">
+            <a:extLst>
+              <a:ext uri="{FF2B5EF4-FFF2-40B4-BE49-F238E27FC236}">
+                <a16:creationId xmlns:a16="http://schemas.microsoft.com/office/drawing/2014/main" id="{5A63A13F-D1D5-4F06-BFE8-CD5525CCAD8B}"/>
+              </a:ext>
+            </a:extLst>
+          </p:cNvPr>
+          <p:cNvSpPr>
+            <a:spLocks noGrp="1"/>
+          </p:cNvSpPr>
+          <p:nvPr/>
+        </p:nvSpPr>
+        <p:spPr>
+          <a:xfrm>
+            <a:off x="609600" y="5600700"/>
+            <a:ext cx="10972800" cy="400050"/>
+          </a:xfrm>
+          <a:prstGeom prst="rect">
+            <a:avLst/>
+          </a:prstGeom>
+          <a:noFill/>
+          <a:ln w="0">
+            <a:noFill/>
+          </a:ln>
+        </p:spPr>
+        <p:txBody>
+          <a:bodyPr anchor="ctr">
+            <a:normAutofit fontScale="100000"/>
+          </a:bodyPr>
+          <a:lstStyle/>
+          <a:p>
+            <a:pPr algn="l">
+              <a:buNone/>
+              <a:defRPr sz="1650" b="1">
                 <a:solidFill>
                   <a:srgbClr val="E63946"/>
                 </a:solidFill>
@@ -21664,7 +21853,7 @@
               </a:defRPr>
             </a:pPr>
             <a:r>
-              <a:rPr sz="2025" b="1">
+              <a:rPr sz="1650" b="1">
                 <a:solidFill>
                   <a:srgbClr val="E63946"/>
                 </a:solidFill>
@@ -21672,435 +21861,9 @@
                 <a:ea typeface="PingFang TC"/>
                 <a:cs typeface="PingFang TC"/>
               </a:rPr>
-              <a:t>03</a:t>
-            </a:r>
-          </a:p>
-        </p:txBody>
-      </p:sp>
-      <p:sp>
-        <p:nvSpPr>
-          <p:cNvPr id="22" name="">
-            <a:extLst>
-              <a:ext uri="{FF2B5EF4-FFF2-40B4-BE49-F238E27FC236}">
-                <a16:creationId xmlns:a16="http://schemas.microsoft.com/office/drawing/2014/main" id="{DC700C09-5DC7-4A22-AA97-AC16015F50CC}"/>
-              </a:ext>
-            </a:extLst>
-          </p:cNvPr>
-          <p:cNvSpPr>
-            <a:spLocks noGrp="1"/>
-          </p:cNvSpPr>
-          <p:nvPr/>
-        </p:nvSpPr>
-        <p:spPr>
-          <a:xfrm>
-            <a:off x="1524000" y="4419600"/>
-            <a:ext cx="4191000" cy="457200"/>
-          </a:xfrm>
-          <a:prstGeom prst="rect">
-            <a:avLst/>
-          </a:prstGeom>
-          <a:noFill/>
-          <a:ln w="0">
-            <a:noFill/>
-          </a:ln>
-        </p:spPr>
-        <p:txBody>
-          <a:bodyPr>
-            <a:noAutofit/>
-          </a:bodyPr>
-          <a:lstStyle/>
-          <a:p>
-            <a:pPr>
-              <a:buNone/>
-              <a:defRPr sz="2175" b="1">
-                <a:solidFill>
-                  <a:srgbClr val="121212"/>
-                </a:solidFill>
-                <a:latin typeface="PingFang TC"/>
-                <a:ea typeface="PingFang TC"/>
-                <a:cs typeface="PingFang TC"/>
-              </a:defRPr>
-            </a:pPr>
-            <a:r>
-              <a:rPr sz="2175" b="1">
-                <a:solidFill>
-                  <a:srgbClr val="121212"/>
-                </a:solidFill>
-                <a:latin typeface="PingFang TC"/>
-                <a:ea typeface="PingFang TC"/>
-                <a:cs typeface="PingFang TC"/>
-              </a:rPr>
-              <a:t>現在他付錢給誰？</a:t>
-            </a:r>
-          </a:p>
-        </p:txBody>
-      </p:sp>
-      <p:sp>
-        <p:nvSpPr>
-          <p:cNvPr id="23" name="">
-            <a:extLst>
-              <a:ext uri="{FF2B5EF4-FFF2-40B4-BE49-F238E27FC236}">
-                <a16:creationId xmlns:a16="http://schemas.microsoft.com/office/drawing/2014/main" id="{8668167D-14C4-4575-B53E-7AABB13896ED}"/>
-              </a:ext>
-            </a:extLst>
-          </p:cNvPr>
-          <p:cNvSpPr>
-            <a:spLocks noGrp="1"/>
-          </p:cNvSpPr>
-          <p:nvPr/>
-        </p:nvSpPr>
-        <p:spPr>
-          <a:xfrm>
-            <a:off x="838200" y="5019675"/>
-            <a:ext cx="4867275" cy="514350"/>
-          </a:xfrm>
-          <a:prstGeom prst="rect">
-            <a:avLst/>
-          </a:prstGeom>
-          <a:noFill/>
-          <a:ln w="0">
-            <a:noFill/>
-          </a:ln>
-        </p:spPr>
-        <p:txBody>
-          <a:bodyPr>
-            <a:noAutofit/>
-          </a:bodyPr>
-          <a:lstStyle/>
-          <a:p>
-            <a:pPr>
-              <a:buNone/>
-              <a:defRPr sz="1650" b="0">
-                <a:solidFill>
-                  <a:srgbClr val="626262"/>
-                </a:solidFill>
-                <a:latin typeface="PingFang TC"/>
-                <a:ea typeface="PingFang TC"/>
-                <a:cs typeface="PingFang TC"/>
-              </a:defRPr>
-            </a:pPr>
-            <a:r>
-              <a:rPr sz="1650" b="0">
-                <a:solidFill>
-                  <a:srgbClr val="626262"/>
-                </a:solidFill>
-                <a:latin typeface="PingFang TC"/>
-                <a:ea typeface="PingFang TC"/>
-                <a:cs typeface="PingFang TC"/>
-              </a:rPr>
-              <a:t>例：LINE 群免費＋一個人工接單的工讀生；外送平台抽三成</a:t>
-            </a:r>
-          </a:p>
-        </p:txBody>
-      </p:sp>
-      <p:sp>
-        <p:nvSpPr>
-          <p:cNvPr id="24" name="">
-            <a:extLst>
-              <a:ext uri="{FF2B5EF4-FFF2-40B4-BE49-F238E27FC236}">
-                <a16:creationId xmlns:a16="http://schemas.microsoft.com/office/drawing/2014/main" id="{50382CE4-25B9-4F93-95EA-C2893B5516BB}"/>
-              </a:ext>
-            </a:extLst>
-          </p:cNvPr>
-          <p:cNvSpPr>
-            <a:spLocks noGrp="1"/>
-          </p:cNvSpPr>
-          <p:nvPr/>
-        </p:nvSpPr>
-        <p:spPr>
-          <a:xfrm>
-            <a:off x="838200" y="5629275"/>
-            <a:ext cx="4905375" cy="19050"/>
-          </a:xfrm>
-          <a:prstGeom prst="rect">
-            <a:avLst/>
-          </a:prstGeom>
-          <a:solidFill>
-            <a:srgbClr val="D9D5CF"/>
-          </a:solidFill>
-          <a:ln w="0">
-            <a:noFill/>
-          </a:ln>
-        </p:spPr>
-        <p:txBody>
-          <a:bodyPr/>
-          <a:p/>
-        </p:txBody>
-      </p:sp>
-      <p:sp>
-        <p:nvSpPr>
-          <p:cNvPr id="25" name="">
-            <a:extLst>
-              <a:ext uri="{FF2B5EF4-FFF2-40B4-BE49-F238E27FC236}">
-                <a16:creationId xmlns:a16="http://schemas.microsoft.com/office/drawing/2014/main" id="{0554D802-4E35-4493-A040-EBB9030F3F4E}"/>
-              </a:ext>
-            </a:extLst>
-          </p:cNvPr>
-          <p:cNvSpPr>
-            <a:spLocks noGrp="1"/>
-          </p:cNvSpPr>
-          <p:nvPr/>
-        </p:nvSpPr>
-        <p:spPr>
-          <a:xfrm>
-            <a:off x="6210300" y="4248150"/>
-            <a:ext cx="5372100" cy="1657350"/>
-          </a:xfrm>
-          <a:prstGeom prst="rect">
-            <a:avLst/>
-          </a:prstGeom>
-          <a:solidFill>
-            <a:srgbClr val="FFFFFF"/>
-          </a:solidFill>
-          <a:ln w="0">
-            <a:noFill/>
-          </a:ln>
-        </p:spPr>
-        <p:txBody>
-          <a:bodyPr/>
-          <a:p/>
-        </p:txBody>
-      </p:sp>
-      <p:sp>
-        <p:nvSpPr>
-          <p:cNvPr id="26" name="">
-            <a:extLst>
-              <a:ext uri="{FF2B5EF4-FFF2-40B4-BE49-F238E27FC236}">
-                <a16:creationId xmlns:a16="http://schemas.microsoft.com/office/drawing/2014/main" id="{42E7A137-3813-409A-95BC-2CF6A7879627}"/>
-              </a:ext>
-            </a:extLst>
-          </p:cNvPr>
-          <p:cNvSpPr>
-            <a:spLocks noGrp="1"/>
-          </p:cNvSpPr>
-          <p:nvPr/>
-        </p:nvSpPr>
-        <p:spPr>
-          <a:xfrm>
-            <a:off x="6210300" y="4248150"/>
-            <a:ext cx="47625" cy="1657350"/>
-          </a:xfrm>
-          <a:prstGeom prst="rect">
-            <a:avLst/>
-          </a:prstGeom>
-          <a:solidFill>
-            <a:srgbClr val="E63946"/>
-          </a:solidFill>
-          <a:ln w="0">
-            <a:noFill/>
-          </a:ln>
-        </p:spPr>
-        <p:txBody>
-          <a:bodyPr/>
-          <a:p/>
-        </p:txBody>
-      </p:sp>
-      <p:sp>
-        <p:nvSpPr>
-          <p:cNvPr id="27" name="">
-            <a:extLst>
-              <a:ext uri="{FF2B5EF4-FFF2-40B4-BE49-F238E27FC236}">
-                <a16:creationId xmlns:a16="http://schemas.microsoft.com/office/drawing/2014/main" id="{D015D6CB-B4CB-48C3-BF11-5D852A8D654C}"/>
-              </a:ext>
-            </a:extLst>
-          </p:cNvPr>
-          <p:cNvSpPr>
-            <a:spLocks noGrp="1"/>
-          </p:cNvSpPr>
-          <p:nvPr/>
-        </p:nvSpPr>
-        <p:spPr>
-          <a:xfrm>
-            <a:off x="6419850" y="4419600"/>
-            <a:ext cx="647700" cy="428625"/>
-          </a:xfrm>
-          <a:prstGeom prst="rect">
-            <a:avLst/>
-          </a:prstGeom>
-          <a:noFill/>
-          <a:ln w="0">
-            <a:noFill/>
-          </a:ln>
-        </p:spPr>
-        <p:txBody>
-          <a:bodyPr>
-            <a:noAutofit/>
-          </a:bodyPr>
-          <a:lstStyle/>
-          <a:p>
-            <a:pPr>
-              <a:buNone/>
-              <a:defRPr sz="2025" b="1">
-                <a:solidFill>
-                  <a:srgbClr val="E63946"/>
-                </a:solidFill>
-                <a:latin typeface="PingFang TC"/>
-                <a:ea typeface="PingFang TC"/>
-                <a:cs typeface="PingFang TC"/>
-              </a:defRPr>
-            </a:pPr>
-            <a:r>
-              <a:rPr sz="2025" b="1">
-                <a:solidFill>
-                  <a:srgbClr val="E63946"/>
-                </a:solidFill>
-                <a:latin typeface="PingFang TC"/>
-                <a:ea typeface="PingFang TC"/>
-                <a:cs typeface="PingFang TC"/>
-              </a:rPr>
-              <a:t>04</a:t>
-            </a:r>
-          </a:p>
-        </p:txBody>
-      </p:sp>
-      <p:sp>
-        <p:nvSpPr>
-          <p:cNvPr id="28" name="">
-            <a:extLst>
-              <a:ext uri="{FF2B5EF4-FFF2-40B4-BE49-F238E27FC236}">
-                <a16:creationId xmlns:a16="http://schemas.microsoft.com/office/drawing/2014/main" id="{6DA70BE6-B36E-447E-BB42-1ACF6D1DC1FE}"/>
-              </a:ext>
-            </a:extLst>
-          </p:cNvPr>
-          <p:cNvSpPr>
-            <a:spLocks noGrp="1"/>
-          </p:cNvSpPr>
-          <p:nvPr/>
-        </p:nvSpPr>
-        <p:spPr>
-          <a:xfrm>
-            <a:off x="7124700" y="4419600"/>
-            <a:ext cx="4191000" cy="457200"/>
-          </a:xfrm>
-          <a:prstGeom prst="rect">
-            <a:avLst/>
-          </a:prstGeom>
-          <a:noFill/>
-          <a:ln w="0">
-            <a:noFill/>
-          </a:ln>
-        </p:spPr>
-        <p:txBody>
-          <a:bodyPr>
-            <a:noAutofit/>
-          </a:bodyPr>
-          <a:lstStyle/>
-          <a:p>
-            <a:pPr>
-              <a:buNone/>
-              <a:defRPr sz="2175" b="1">
-                <a:solidFill>
-                  <a:srgbClr val="121212"/>
-                </a:solidFill>
-                <a:latin typeface="PingFang TC"/>
-                <a:ea typeface="PingFang TC"/>
-                <a:cs typeface="PingFang TC"/>
-              </a:defRPr>
-            </a:pPr>
-            <a:r>
-              <a:rPr sz="2175" b="1">
-                <a:solidFill>
-                  <a:srgbClr val="121212"/>
-                </a:solidFill>
-                <a:latin typeface="PingFang TC"/>
-                <a:ea typeface="PingFang TC"/>
-                <a:cs typeface="PingFang TC"/>
-              </a:rPr>
-              <a:t>為什麼是現在？</a:t>
-            </a:r>
-          </a:p>
-        </p:txBody>
-      </p:sp>
-      <p:sp>
-        <p:nvSpPr>
-          <p:cNvPr id="29" name="">
-            <a:extLst>
-              <a:ext uri="{FF2B5EF4-FFF2-40B4-BE49-F238E27FC236}">
-                <a16:creationId xmlns:a16="http://schemas.microsoft.com/office/drawing/2014/main" id="{70B6D5FA-EA01-4907-A6CB-D4041C18C5ED}"/>
-              </a:ext>
-            </a:extLst>
-          </p:cNvPr>
-          <p:cNvSpPr>
-            <a:spLocks noGrp="1"/>
-          </p:cNvSpPr>
-          <p:nvPr/>
-        </p:nvSpPr>
-        <p:spPr>
-          <a:xfrm>
-            <a:off x="6438900" y="5019675"/>
-            <a:ext cx="4867275" cy="514350"/>
-          </a:xfrm>
-          <a:prstGeom prst="rect">
-            <a:avLst/>
-          </a:prstGeom>
-          <a:noFill/>
-          <a:ln w="0">
-            <a:noFill/>
-          </a:ln>
-        </p:spPr>
-        <p:txBody>
-          <a:bodyPr>
-            <a:noAutofit/>
-          </a:bodyPr>
-          <a:lstStyle/>
-          <a:p>
-            <a:pPr>
-              <a:buNone/>
-              <a:defRPr sz="1650" b="0">
-                <a:solidFill>
-                  <a:srgbClr val="626262"/>
-                </a:solidFill>
-                <a:latin typeface="PingFang TC"/>
-                <a:ea typeface="PingFang TC"/>
-                <a:cs typeface="PingFang TC"/>
-              </a:defRPr>
-            </a:pPr>
-            <a:r>
-              <a:rPr sz="1650" b="0">
-                <a:solidFill>
-                  <a:srgbClr val="626262"/>
-                </a:solidFill>
-                <a:latin typeface="PingFang TC"/>
-                <a:ea typeface="PingFang TC"/>
-                <a:cs typeface="PingFang TC"/>
-              </a:rPr>
-              <a:t>例：缺工、外送普及、AI 語音接單今年變便宜——三者之一要說得出</a:t>
-            </a:r>
-          </a:p>
-        </p:txBody>
-      </p:sp>
-      <p:sp>
-        <p:nvSpPr>
-          <p:cNvPr id="30" name="">
-            <a:extLst>
-              <a:ext uri="{FF2B5EF4-FFF2-40B4-BE49-F238E27FC236}">
-                <a16:creationId xmlns:a16="http://schemas.microsoft.com/office/drawing/2014/main" id="{DAE4AA41-CF0B-4EB5-871A-7FD226B0079B}"/>
-              </a:ext>
-            </a:extLst>
-          </p:cNvPr>
-          <p:cNvSpPr>
-            <a:spLocks noGrp="1"/>
-          </p:cNvSpPr>
-          <p:nvPr/>
-        </p:nvSpPr>
-        <p:spPr>
-          <a:xfrm>
-            <a:off x="6438900" y="5629275"/>
-            <a:ext cx="4905375" cy="19050"/>
-          </a:xfrm>
-          <a:prstGeom prst="rect">
-            <a:avLst/>
-          </a:prstGeom>
-          <a:solidFill>
-            <a:srgbClr val="D9D5CF"/>
-          </a:solidFill>
-          <a:ln w="0">
-            <a:noFill/>
-          </a:ln>
-        </p:spPr>
-        <p:txBody>
-          <a:bodyPr/>
-          <a:p/>
+              <a:t>一條有來源的證據，勝過十句 AI。期中看的是：每個主張有沒有來源。</a:t>
+            </a:r>
+          </a:p>
         </p:txBody>
       </p:sp>
     </p:spTree>
@@ -22112,6 +21875,1459 @@
 </file>
 
 <file path=ppt/slides/slide45.xml><?xml version="1.0" encoding="utf-8"?>
+<p:sld xmlns:a="http://schemas.openxmlformats.org/drawingml/2006/main" xmlns:p="http://schemas.openxmlformats.org/presentationml/2006/main" xmlns:r="http://schemas.openxmlformats.org/officeDocument/2006/relationships">
+  <p:cSld>
+    <p:bg>
+      <p:bgPr>
+        <a:solidFill>
+          <a:srgbClr val="F6F3EE"/>
+        </a:solidFill>
+      </p:bgPr>
+    </p:bg>
+    <p:spTree>
+      <p:nvGrpSpPr>
+        <p:cNvPr id="1" name=""/>
+        <p:cNvGrpSpPr/>
+        <p:nvPr/>
+      </p:nvGrpSpPr>
+      <p:grpSpPr/>
+      <p:sp>
+        <p:nvSpPr>
+          <p:cNvPr id="31" name="">
+            <a:extLst>
+              <a:ext uri="{FF2B5EF4-FFF2-40B4-BE49-F238E27FC236}">
+                <a16:creationId xmlns:a16="http://schemas.microsoft.com/office/drawing/2014/main" id="{68EB7237-7F7B-4EBB-8147-7D3116DA24B3}"/>
+              </a:ext>
+            </a:extLst>
+          </p:cNvPr>
+          <p:cNvSpPr>
+            <a:spLocks noGrp="1"/>
+          </p:cNvSpPr>
+          <p:nvPr/>
+        </p:nvSpPr>
+        <p:spPr>
+          <a:xfrm>
+            <a:off x="609600" y="285750"/>
+            <a:ext cx="10287000" cy="285750"/>
+          </a:xfrm>
+          <a:prstGeom prst="rect">
+            <a:avLst/>
+          </a:prstGeom>
+          <a:noFill/>
+          <a:ln w="0">
+            <a:noFill/>
+          </a:ln>
+        </p:spPr>
+        <p:txBody>
+          <a:bodyPr>
+            <a:noAutofit/>
+          </a:bodyPr>
+          <a:lstStyle/>
+          <a:p>
+            <a:pPr>
+              <a:buNone/>
+              <a:defRPr sz="1350" b="1">
+                <a:solidFill>
+                  <a:srgbClr val="E63946"/>
+                </a:solidFill>
+                <a:latin typeface="PingFang TC"/>
+                <a:ea typeface="PingFang TC"/>
+                <a:cs typeface="PingFang TC"/>
+              </a:defRPr>
+            </a:pPr>
+            <a:r>
+              <a:rPr sz="1350" b="1">
+                <a:solidFill>
+                  <a:srgbClr val="E63946"/>
+                </a:solidFill>
+                <a:latin typeface="PingFang TC"/>
+                <a:ea typeface="PingFang TC"/>
+                <a:cs typeface="PingFang TC"/>
+              </a:rPr>
+              <a:t>WEEK 4  /  從我的痛看產業</a:t>
+            </a:r>
+          </a:p>
+        </p:txBody>
+      </p:sp>
+      <p:sp>
+        <p:nvSpPr>
+          <p:cNvPr id="2" name="">
+            <a:extLst>
+              <a:ext uri="{FF2B5EF4-FFF2-40B4-BE49-F238E27FC236}">
+                <a16:creationId xmlns:a16="http://schemas.microsoft.com/office/drawing/2014/main" id="{E3A4D602-346A-48B7-AE99-FAAAA326895A}"/>
+              </a:ext>
+            </a:extLst>
+          </p:cNvPr>
+          <p:cNvSpPr>
+            <a:spLocks noGrp="1"/>
+          </p:cNvSpPr>
+          <p:nvPr/>
+        </p:nvSpPr>
+        <p:spPr>
+          <a:xfrm>
+            <a:off x="609600" y="838200"/>
+            <a:ext cx="10972800" cy="762000"/>
+          </a:xfrm>
+          <a:prstGeom prst="rect">
+            <a:avLst/>
+          </a:prstGeom>
+          <a:noFill/>
+          <a:ln w="0">
+            <a:noFill/>
+          </a:ln>
+        </p:spPr>
+        <p:txBody>
+          <a:bodyPr>
+            <a:noAutofit/>
+          </a:bodyPr>
+          <a:lstStyle/>
+          <a:p>
+            <a:pPr>
+              <a:buNone/>
+              <a:defRPr sz="3450" b="1">
+                <a:solidFill>
+                  <a:srgbClr val="121212"/>
+                </a:solidFill>
+                <a:latin typeface="PingFang TC"/>
+                <a:ea typeface="PingFang TC"/>
+                <a:cs typeface="PingFang TC"/>
+              </a:defRPr>
+            </a:pPr>
+            <a:r>
+              <a:rPr sz="3450" b="1">
+                <a:solidFill>
+                  <a:srgbClr val="121212"/>
+                </a:solidFill>
+                <a:latin typeface="PingFang TC"/>
+                <a:ea typeface="PingFang TC"/>
+                <a:cs typeface="PingFang TC"/>
+              </a:rPr>
+              <a:t>一個好機會要答得出四個問題</a:t>
+            </a:r>
+          </a:p>
+        </p:txBody>
+      </p:sp>
+      <p:sp>
+        <p:nvSpPr>
+          <p:cNvPr id="3" name="">
+            <a:extLst>
+              <a:ext uri="{FF2B5EF4-FFF2-40B4-BE49-F238E27FC236}">
+                <a16:creationId xmlns:a16="http://schemas.microsoft.com/office/drawing/2014/main" id="{EB9EFF97-9BDD-4B70-A899-0F84C83E795D}"/>
+              </a:ext>
+            </a:extLst>
+          </p:cNvPr>
+          <p:cNvSpPr>
+            <a:spLocks noGrp="1"/>
+          </p:cNvSpPr>
+          <p:nvPr/>
+        </p:nvSpPr>
+        <p:spPr>
+          <a:xfrm>
+            <a:off x="609600" y="1619250"/>
+            <a:ext cx="10972800" cy="495300"/>
+          </a:xfrm>
+          <a:prstGeom prst="rect">
+            <a:avLst/>
+          </a:prstGeom>
+          <a:noFill/>
+          <a:ln w="0">
+            <a:noFill/>
+          </a:ln>
+        </p:spPr>
+        <p:txBody>
+          <a:bodyPr>
+            <a:noAutofit/>
+          </a:bodyPr>
+          <a:lstStyle/>
+          <a:p>
+            <a:pPr>
+              <a:buNone/>
+              <a:defRPr sz="1875" b="0">
+                <a:solidFill>
+                  <a:srgbClr val="626262"/>
+                </a:solidFill>
+                <a:latin typeface="PingFang TC"/>
+                <a:ea typeface="PingFang TC"/>
+                <a:cs typeface="PingFang TC"/>
+              </a:defRPr>
+            </a:pPr>
+            <a:r>
+              <a:rPr sz="1875" b="0">
+                <a:solidFill>
+                  <a:srgbClr val="626262"/>
+                </a:solidFill>
+                <a:latin typeface="PingFang TC"/>
+                <a:ea typeface="PingFang TC"/>
+                <a:cs typeface="PingFang TC"/>
+              </a:rPr>
+              <a:t>下週（Week 5）五問計分就從這四格開始</a:t>
+            </a:r>
+          </a:p>
+        </p:txBody>
+      </p:sp>
+      <p:sp>
+        <p:nvSpPr>
+          <p:cNvPr id="4" name="">
+            <a:extLst>
+              <a:ext uri="{FF2B5EF4-FFF2-40B4-BE49-F238E27FC236}">
+                <a16:creationId xmlns:a16="http://schemas.microsoft.com/office/drawing/2014/main" id="{D12C4FFE-AA45-4E84-9A78-83B6155A0076}"/>
+              </a:ext>
+            </a:extLst>
+          </p:cNvPr>
+          <p:cNvSpPr>
+            <a:spLocks noGrp="1"/>
+          </p:cNvSpPr>
+          <p:nvPr/>
+        </p:nvSpPr>
+        <p:spPr>
+          <a:xfrm>
+            <a:off x="609600" y="6286500"/>
+            <a:ext cx="10972800" cy="19050"/>
+          </a:xfrm>
+          <a:prstGeom prst="rect">
+            <a:avLst/>
+          </a:prstGeom>
+          <a:solidFill>
+            <a:srgbClr val="D9D5CF"/>
+          </a:solidFill>
+          <a:ln w="0">
+            <a:noFill/>
+          </a:ln>
+        </p:spPr>
+        <p:txBody>
+          <a:bodyPr/>
+          <a:p/>
+        </p:txBody>
+      </p:sp>
+      <p:sp>
+        <p:nvSpPr>
+          <p:cNvPr id="5" name="">
+            <a:extLst>
+              <a:ext uri="{FF2B5EF4-FFF2-40B4-BE49-F238E27FC236}">
+                <a16:creationId xmlns:a16="http://schemas.microsoft.com/office/drawing/2014/main" id="{94862769-381A-4C7F-B6F8-66BEDA67D9A6}"/>
+              </a:ext>
+            </a:extLst>
+          </p:cNvPr>
+          <p:cNvSpPr>
+            <a:spLocks noGrp="1"/>
+          </p:cNvSpPr>
+          <p:nvPr/>
+        </p:nvSpPr>
+        <p:spPr>
+          <a:xfrm>
+            <a:off x="609600" y="6410325"/>
+            <a:ext cx="5238750" cy="285750"/>
+          </a:xfrm>
+          <a:prstGeom prst="rect">
+            <a:avLst/>
+          </a:prstGeom>
+          <a:noFill/>
+          <a:ln w="0">
+            <a:noFill/>
+          </a:ln>
+        </p:spPr>
+        <p:txBody>
+          <a:bodyPr>
+            <a:noAutofit/>
+          </a:bodyPr>
+          <a:lstStyle/>
+          <a:p>
+            <a:pPr>
+              <a:buNone/>
+              <a:defRPr sz="1200" b="0">
+                <a:solidFill>
+                  <a:srgbClr val="626262"/>
+                </a:solidFill>
+                <a:latin typeface="PingFang TC"/>
+                <a:ea typeface="PingFang TC"/>
+                <a:cs typeface="PingFang TC"/>
+              </a:defRPr>
+            </a:pPr>
+            <a:r>
+              <a:rPr sz="1200" b="0">
+                <a:solidFill>
+                  <a:srgbClr val="626262"/>
+                </a:solidFill>
+                <a:latin typeface="PingFang TC"/>
+                <a:ea typeface="PingFang TC"/>
+                <a:cs typeface="PingFang TC"/>
+              </a:rPr>
+              <a:t>Startup Journey Lab</a:t>
+            </a:r>
+          </a:p>
+        </p:txBody>
+      </p:sp>
+      <p:sp>
+        <p:nvSpPr>
+          <p:cNvPr id="6" name="">
+            <a:extLst>
+              <a:ext uri="{FF2B5EF4-FFF2-40B4-BE49-F238E27FC236}">
+                <a16:creationId xmlns:a16="http://schemas.microsoft.com/office/drawing/2014/main" id="{682FD63C-1A06-42CE-A2D4-A2173418FE75}"/>
+              </a:ext>
+            </a:extLst>
+          </p:cNvPr>
+          <p:cNvSpPr>
+            <a:spLocks noGrp="1"/>
+          </p:cNvSpPr>
+          <p:nvPr/>
+        </p:nvSpPr>
+        <p:spPr>
+          <a:xfrm>
+            <a:off x="10668000" y="6410325"/>
+            <a:ext cx="1047750" cy="285750"/>
+          </a:xfrm>
+          <a:prstGeom prst="rect">
+            <a:avLst/>
+          </a:prstGeom>
+          <a:noFill/>
+          <a:ln w="0">
+            <a:noFill/>
+          </a:ln>
+        </p:spPr>
+        <p:txBody>
+          <a:bodyPr>
+            <a:noAutofit/>
+          </a:bodyPr>
+          <a:lstStyle/>
+          <a:p>
+            <a:pPr>
+              <a:buNone/>
+              <a:defRPr sz="1200" b="0">
+                <a:solidFill>
+                  <a:srgbClr val="626262"/>
+                </a:solidFill>
+                <a:latin typeface="PingFang TC"/>
+                <a:ea typeface="PingFang TC"/>
+                <a:cs typeface="PingFang TC"/>
+              </a:defRPr>
+            </a:pPr>
+            <a:r>
+              <a:rPr sz="1200" b="0">
+                <a:solidFill>
+                  <a:srgbClr val="626262"/>
+                </a:solidFill>
+                <a:latin typeface="PingFang TC"/>
+                <a:ea typeface="PingFang TC"/>
+                <a:cs typeface="PingFang TC"/>
+              </a:rPr>
+              <a:t>20 / 23</a:t>
+            </a:r>
+          </a:p>
+        </p:txBody>
+      </p:sp>
+      <p:sp>
+        <p:nvSpPr>
+          <p:cNvPr id="7" name="">
+            <a:extLst>
+              <a:ext uri="{FF2B5EF4-FFF2-40B4-BE49-F238E27FC236}">
+                <a16:creationId xmlns:a16="http://schemas.microsoft.com/office/drawing/2014/main" id="{27A1CCD5-B26A-4035-801D-C98F40910D30}"/>
+              </a:ext>
+            </a:extLst>
+          </p:cNvPr>
+          <p:cNvSpPr>
+            <a:spLocks noGrp="1"/>
+          </p:cNvSpPr>
+          <p:nvPr/>
+        </p:nvSpPr>
+        <p:spPr>
+          <a:xfrm>
+            <a:off x="609600" y="2333625"/>
+            <a:ext cx="5372100" cy="1657350"/>
+          </a:xfrm>
+          <a:prstGeom prst="rect">
+            <a:avLst/>
+          </a:prstGeom>
+          <a:solidFill>
+            <a:srgbClr val="FFFFFF"/>
+          </a:solidFill>
+          <a:ln w="0">
+            <a:noFill/>
+          </a:ln>
+        </p:spPr>
+        <p:txBody>
+          <a:bodyPr/>
+          <a:p/>
+        </p:txBody>
+      </p:sp>
+      <p:sp>
+        <p:nvSpPr>
+          <p:cNvPr id="8" name="">
+            <a:extLst>
+              <a:ext uri="{FF2B5EF4-FFF2-40B4-BE49-F238E27FC236}">
+                <a16:creationId xmlns:a16="http://schemas.microsoft.com/office/drawing/2014/main" id="{400BA3D1-834E-4646-9683-131ABCF808E2}"/>
+              </a:ext>
+            </a:extLst>
+          </p:cNvPr>
+          <p:cNvSpPr>
+            <a:spLocks noGrp="1"/>
+          </p:cNvSpPr>
+          <p:nvPr/>
+        </p:nvSpPr>
+        <p:spPr>
+          <a:xfrm>
+            <a:off x="609600" y="2333625"/>
+            <a:ext cx="47625" cy="1657350"/>
+          </a:xfrm>
+          <a:prstGeom prst="rect">
+            <a:avLst/>
+          </a:prstGeom>
+          <a:solidFill>
+            <a:srgbClr val="E63946"/>
+          </a:solidFill>
+          <a:ln w="0">
+            <a:noFill/>
+          </a:ln>
+        </p:spPr>
+        <p:txBody>
+          <a:bodyPr/>
+          <a:p/>
+        </p:txBody>
+      </p:sp>
+      <p:sp>
+        <p:nvSpPr>
+          <p:cNvPr id="9" name="">
+            <a:extLst>
+              <a:ext uri="{FF2B5EF4-FFF2-40B4-BE49-F238E27FC236}">
+                <a16:creationId xmlns:a16="http://schemas.microsoft.com/office/drawing/2014/main" id="{066F096E-6BFD-4B19-BFFC-76160372441F}"/>
+              </a:ext>
+            </a:extLst>
+          </p:cNvPr>
+          <p:cNvSpPr>
+            <a:spLocks noGrp="1"/>
+          </p:cNvSpPr>
+          <p:nvPr/>
+        </p:nvSpPr>
+        <p:spPr>
+          <a:xfrm>
+            <a:off x="819150" y="2505075"/>
+            <a:ext cx="647700" cy="428625"/>
+          </a:xfrm>
+          <a:prstGeom prst="rect">
+            <a:avLst/>
+          </a:prstGeom>
+          <a:noFill/>
+          <a:ln w="0">
+            <a:noFill/>
+          </a:ln>
+        </p:spPr>
+        <p:txBody>
+          <a:bodyPr>
+            <a:noAutofit/>
+          </a:bodyPr>
+          <a:lstStyle/>
+          <a:p>
+            <a:pPr>
+              <a:buNone/>
+              <a:defRPr sz="2025" b="1">
+                <a:solidFill>
+                  <a:srgbClr val="E63946"/>
+                </a:solidFill>
+                <a:latin typeface="PingFang TC"/>
+                <a:ea typeface="PingFang TC"/>
+                <a:cs typeface="PingFang TC"/>
+              </a:defRPr>
+            </a:pPr>
+            <a:r>
+              <a:rPr sz="2025" b="1">
+                <a:solidFill>
+                  <a:srgbClr val="E63946"/>
+                </a:solidFill>
+                <a:latin typeface="PingFang TC"/>
+                <a:ea typeface="PingFang TC"/>
+                <a:cs typeface="PingFang TC"/>
+              </a:rPr>
+              <a:t>01</a:t>
+            </a:r>
+          </a:p>
+        </p:txBody>
+      </p:sp>
+      <p:sp>
+        <p:nvSpPr>
+          <p:cNvPr id="10" name="">
+            <a:extLst>
+              <a:ext uri="{FF2B5EF4-FFF2-40B4-BE49-F238E27FC236}">
+                <a16:creationId xmlns:a16="http://schemas.microsoft.com/office/drawing/2014/main" id="{9B2C30A9-4597-48FB-9C72-464F020DDEFA}"/>
+              </a:ext>
+            </a:extLst>
+          </p:cNvPr>
+          <p:cNvSpPr>
+            <a:spLocks noGrp="1"/>
+          </p:cNvSpPr>
+          <p:nvPr/>
+        </p:nvSpPr>
+        <p:spPr>
+          <a:xfrm>
+            <a:off x="1524000" y="2505075"/>
+            <a:ext cx="4191000" cy="457200"/>
+          </a:xfrm>
+          <a:prstGeom prst="rect">
+            <a:avLst/>
+          </a:prstGeom>
+          <a:noFill/>
+          <a:ln w="0">
+            <a:noFill/>
+          </a:ln>
+        </p:spPr>
+        <p:txBody>
+          <a:bodyPr>
+            <a:noAutofit/>
+          </a:bodyPr>
+          <a:lstStyle/>
+          <a:p>
+            <a:pPr>
+              <a:buNone/>
+              <a:defRPr sz="2175" b="1">
+                <a:solidFill>
+                  <a:srgbClr val="121212"/>
+                </a:solidFill>
+                <a:latin typeface="PingFang TC"/>
+                <a:ea typeface="PingFang TC"/>
+                <a:cs typeface="PingFang TC"/>
+              </a:defRPr>
+            </a:pPr>
+            <a:r>
+              <a:rPr sz="2175" b="1">
+                <a:solidFill>
+                  <a:srgbClr val="121212"/>
+                </a:solidFill>
+                <a:latin typeface="PingFang TC"/>
+                <a:ea typeface="PingFang TC"/>
+                <a:cs typeface="PingFang TC"/>
+              </a:rPr>
+              <a:t>解誰的哪個困難？</a:t>
+            </a:r>
+          </a:p>
+        </p:txBody>
+      </p:sp>
+      <p:sp>
+        <p:nvSpPr>
+          <p:cNvPr id="11" name="">
+            <a:extLst>
+              <a:ext uri="{FF2B5EF4-FFF2-40B4-BE49-F238E27FC236}">
+                <a16:creationId xmlns:a16="http://schemas.microsoft.com/office/drawing/2014/main" id="{149FFC90-3B89-4B88-A159-F50282024610}"/>
+              </a:ext>
+            </a:extLst>
+          </p:cNvPr>
+          <p:cNvSpPr>
+            <a:spLocks noGrp="1"/>
+          </p:cNvSpPr>
+          <p:nvPr/>
+        </p:nvSpPr>
+        <p:spPr>
+          <a:xfrm>
+            <a:off x="838200" y="3105150"/>
+            <a:ext cx="4867275" cy="514350"/>
+          </a:xfrm>
+          <a:prstGeom prst="rect">
+            <a:avLst/>
+          </a:prstGeom>
+          <a:noFill/>
+          <a:ln w="0">
+            <a:noFill/>
+          </a:ln>
+        </p:spPr>
+        <p:txBody>
+          <a:bodyPr>
+            <a:noAutofit/>
+          </a:bodyPr>
+          <a:lstStyle/>
+          <a:p>
+            <a:pPr>
+              <a:buNone/>
+              <a:defRPr sz="1650" b="0">
+                <a:solidFill>
+                  <a:srgbClr val="626262"/>
+                </a:solidFill>
+                <a:latin typeface="PingFang TC"/>
+                <a:ea typeface="PingFang TC"/>
+                <a:cs typeface="PingFang TC"/>
+              </a:defRPr>
+            </a:pPr>
+            <a:r>
+              <a:rPr sz="1650" b="0">
+                <a:solidFill>
+                  <a:srgbClr val="626262"/>
+                </a:solidFill>
+                <a:latin typeface="PingFang TC"/>
+                <a:ea typeface="PingFang TC"/>
+                <a:cs typeface="PingFang TC"/>
+              </a:rPr>
+              <a:t>例：早餐店老闆尖峰漏單，不是「餐飲業數位轉型」</a:t>
+            </a:r>
+          </a:p>
+        </p:txBody>
+      </p:sp>
+      <p:sp>
+        <p:nvSpPr>
+          <p:cNvPr id="12" name="">
+            <a:extLst>
+              <a:ext uri="{FF2B5EF4-FFF2-40B4-BE49-F238E27FC236}">
+                <a16:creationId xmlns:a16="http://schemas.microsoft.com/office/drawing/2014/main" id="{C0389E3D-C56E-4707-A449-0AC32CA578CA}"/>
+              </a:ext>
+            </a:extLst>
+          </p:cNvPr>
+          <p:cNvSpPr>
+            <a:spLocks noGrp="1"/>
+          </p:cNvSpPr>
+          <p:nvPr/>
+        </p:nvSpPr>
+        <p:spPr>
+          <a:xfrm>
+            <a:off x="838200" y="3714750"/>
+            <a:ext cx="4905375" cy="19050"/>
+          </a:xfrm>
+          <a:prstGeom prst="rect">
+            <a:avLst/>
+          </a:prstGeom>
+          <a:solidFill>
+            <a:srgbClr val="D9D5CF"/>
+          </a:solidFill>
+          <a:ln w="0">
+            <a:noFill/>
+          </a:ln>
+        </p:spPr>
+        <p:txBody>
+          <a:bodyPr/>
+          <a:p/>
+        </p:txBody>
+      </p:sp>
+      <p:sp>
+        <p:nvSpPr>
+          <p:cNvPr id="13" name="">
+            <a:extLst>
+              <a:ext uri="{FF2B5EF4-FFF2-40B4-BE49-F238E27FC236}">
+                <a16:creationId xmlns:a16="http://schemas.microsoft.com/office/drawing/2014/main" id="{CE170350-F5E0-44DF-A0AD-00F684A3D9DC}"/>
+              </a:ext>
+            </a:extLst>
+          </p:cNvPr>
+          <p:cNvSpPr>
+            <a:spLocks noGrp="1"/>
+          </p:cNvSpPr>
+          <p:nvPr/>
+        </p:nvSpPr>
+        <p:spPr>
+          <a:xfrm>
+            <a:off x="6210300" y="2333625"/>
+            <a:ext cx="5372100" cy="1657350"/>
+          </a:xfrm>
+          <a:prstGeom prst="rect">
+            <a:avLst/>
+          </a:prstGeom>
+          <a:solidFill>
+            <a:srgbClr val="FFFFFF"/>
+          </a:solidFill>
+          <a:ln w="0">
+            <a:noFill/>
+          </a:ln>
+        </p:spPr>
+        <p:txBody>
+          <a:bodyPr/>
+          <a:p/>
+        </p:txBody>
+      </p:sp>
+      <p:sp>
+        <p:nvSpPr>
+          <p:cNvPr id="14" name="">
+            <a:extLst>
+              <a:ext uri="{FF2B5EF4-FFF2-40B4-BE49-F238E27FC236}">
+                <a16:creationId xmlns:a16="http://schemas.microsoft.com/office/drawing/2014/main" id="{AD3B1000-E290-49F8-9D0E-0C06A872F305}"/>
+              </a:ext>
+            </a:extLst>
+          </p:cNvPr>
+          <p:cNvSpPr>
+            <a:spLocks noGrp="1"/>
+          </p:cNvSpPr>
+          <p:nvPr/>
+        </p:nvSpPr>
+        <p:spPr>
+          <a:xfrm>
+            <a:off x="6210300" y="2333625"/>
+            <a:ext cx="47625" cy="1657350"/>
+          </a:xfrm>
+          <a:prstGeom prst="rect">
+            <a:avLst/>
+          </a:prstGeom>
+          <a:solidFill>
+            <a:srgbClr val="E63946"/>
+          </a:solidFill>
+          <a:ln w="0">
+            <a:noFill/>
+          </a:ln>
+        </p:spPr>
+        <p:txBody>
+          <a:bodyPr/>
+          <a:p/>
+        </p:txBody>
+      </p:sp>
+      <p:sp>
+        <p:nvSpPr>
+          <p:cNvPr id="15" name="">
+            <a:extLst>
+              <a:ext uri="{FF2B5EF4-FFF2-40B4-BE49-F238E27FC236}">
+                <a16:creationId xmlns:a16="http://schemas.microsoft.com/office/drawing/2014/main" id="{639B8976-571E-4A1C-849D-D2C3FF78EED3}"/>
+              </a:ext>
+            </a:extLst>
+          </p:cNvPr>
+          <p:cNvSpPr>
+            <a:spLocks noGrp="1"/>
+          </p:cNvSpPr>
+          <p:nvPr/>
+        </p:nvSpPr>
+        <p:spPr>
+          <a:xfrm>
+            <a:off x="6419850" y="2505075"/>
+            <a:ext cx="647700" cy="428625"/>
+          </a:xfrm>
+          <a:prstGeom prst="rect">
+            <a:avLst/>
+          </a:prstGeom>
+          <a:noFill/>
+          <a:ln w="0">
+            <a:noFill/>
+          </a:ln>
+        </p:spPr>
+        <p:txBody>
+          <a:bodyPr>
+            <a:noAutofit/>
+          </a:bodyPr>
+          <a:lstStyle/>
+          <a:p>
+            <a:pPr>
+              <a:buNone/>
+              <a:defRPr sz="2025" b="1">
+                <a:solidFill>
+                  <a:srgbClr val="E63946"/>
+                </a:solidFill>
+                <a:latin typeface="PingFang TC"/>
+                <a:ea typeface="PingFang TC"/>
+                <a:cs typeface="PingFang TC"/>
+              </a:defRPr>
+            </a:pPr>
+            <a:r>
+              <a:rPr sz="2025" b="1">
+                <a:solidFill>
+                  <a:srgbClr val="E63946"/>
+                </a:solidFill>
+                <a:latin typeface="PingFang TC"/>
+                <a:ea typeface="PingFang TC"/>
+                <a:cs typeface="PingFang TC"/>
+              </a:rPr>
+              <a:t>02</a:t>
+            </a:r>
+          </a:p>
+        </p:txBody>
+      </p:sp>
+      <p:sp>
+        <p:nvSpPr>
+          <p:cNvPr id="16" name="">
+            <a:extLst>
+              <a:ext uri="{FF2B5EF4-FFF2-40B4-BE49-F238E27FC236}">
+                <a16:creationId xmlns:a16="http://schemas.microsoft.com/office/drawing/2014/main" id="{EBA0E952-AD26-4E31-89D8-0E17D9EBCC49}"/>
+              </a:ext>
+            </a:extLst>
+          </p:cNvPr>
+          <p:cNvSpPr>
+            <a:spLocks noGrp="1"/>
+          </p:cNvSpPr>
+          <p:nvPr/>
+        </p:nvSpPr>
+        <p:spPr>
+          <a:xfrm>
+            <a:off x="7124700" y="2505075"/>
+            <a:ext cx="4191000" cy="457200"/>
+          </a:xfrm>
+          <a:prstGeom prst="rect">
+            <a:avLst/>
+          </a:prstGeom>
+          <a:noFill/>
+          <a:ln w="0">
+            <a:noFill/>
+          </a:ln>
+        </p:spPr>
+        <p:txBody>
+          <a:bodyPr>
+            <a:noAutofit/>
+          </a:bodyPr>
+          <a:lstStyle/>
+          <a:p>
+            <a:pPr>
+              <a:buNone/>
+              <a:defRPr sz="2175" b="1">
+                <a:solidFill>
+                  <a:srgbClr val="121212"/>
+                </a:solidFill>
+                <a:latin typeface="PingFang TC"/>
+                <a:ea typeface="PingFang TC"/>
+                <a:cs typeface="PingFang TC"/>
+              </a:defRPr>
+            </a:pPr>
+            <a:r>
+              <a:rPr sz="2175" b="1">
+                <a:solidFill>
+                  <a:srgbClr val="121212"/>
+                </a:solidFill>
+                <a:latin typeface="PingFang TC"/>
+                <a:ea typeface="PingFang TC"/>
+                <a:cs typeface="PingFang TC"/>
+              </a:rPr>
+              <a:t>第一個會付錢的人是誰？</a:t>
+            </a:r>
+          </a:p>
+        </p:txBody>
+      </p:sp>
+      <p:sp>
+        <p:nvSpPr>
+          <p:cNvPr id="17" name="">
+            <a:extLst>
+              <a:ext uri="{FF2B5EF4-FFF2-40B4-BE49-F238E27FC236}">
+                <a16:creationId xmlns:a16="http://schemas.microsoft.com/office/drawing/2014/main" id="{27A6A621-6AE2-4020-9522-1EFCDF0C4D22}"/>
+              </a:ext>
+            </a:extLst>
+          </p:cNvPr>
+          <p:cNvSpPr>
+            <a:spLocks noGrp="1"/>
+          </p:cNvSpPr>
+          <p:nvPr/>
+        </p:nvSpPr>
+        <p:spPr>
+          <a:xfrm>
+            <a:off x="6438900" y="3105150"/>
+            <a:ext cx="4867275" cy="514350"/>
+          </a:xfrm>
+          <a:prstGeom prst="rect">
+            <a:avLst/>
+          </a:prstGeom>
+          <a:noFill/>
+          <a:ln w="0">
+            <a:noFill/>
+          </a:ln>
+        </p:spPr>
+        <p:txBody>
+          <a:bodyPr>
+            <a:noAutofit/>
+          </a:bodyPr>
+          <a:lstStyle/>
+          <a:p>
+            <a:pPr>
+              <a:buNone/>
+              <a:defRPr sz="1650" b="0">
+                <a:solidFill>
+                  <a:srgbClr val="626262"/>
+                </a:solidFill>
+                <a:latin typeface="PingFang TC"/>
+                <a:ea typeface="PingFang TC"/>
+                <a:cs typeface="PingFang TC"/>
+              </a:defRPr>
+            </a:pPr>
+            <a:r>
+              <a:rPr sz="1650" b="0">
+                <a:solidFill>
+                  <a:srgbClr val="626262"/>
+                </a:solidFill>
+                <a:latin typeface="PingFang TC"/>
+                <a:ea typeface="PingFang TC"/>
+                <a:cs typeface="PingFang TC"/>
+              </a:rPr>
+              <a:t>例：三家分店以上的早餐店老闆，不是「所有餐飲業者」</a:t>
+            </a:r>
+          </a:p>
+        </p:txBody>
+      </p:sp>
+      <p:sp>
+        <p:nvSpPr>
+          <p:cNvPr id="18" name="">
+            <a:extLst>
+              <a:ext uri="{FF2B5EF4-FFF2-40B4-BE49-F238E27FC236}">
+                <a16:creationId xmlns:a16="http://schemas.microsoft.com/office/drawing/2014/main" id="{3D5E9FEA-7654-4EFA-8998-C77A9A4BA516}"/>
+              </a:ext>
+            </a:extLst>
+          </p:cNvPr>
+          <p:cNvSpPr>
+            <a:spLocks noGrp="1"/>
+          </p:cNvSpPr>
+          <p:nvPr/>
+        </p:nvSpPr>
+        <p:spPr>
+          <a:xfrm>
+            <a:off x="6438900" y="3714750"/>
+            <a:ext cx="4905375" cy="19050"/>
+          </a:xfrm>
+          <a:prstGeom prst="rect">
+            <a:avLst/>
+          </a:prstGeom>
+          <a:solidFill>
+            <a:srgbClr val="D9D5CF"/>
+          </a:solidFill>
+          <a:ln w="0">
+            <a:noFill/>
+          </a:ln>
+        </p:spPr>
+        <p:txBody>
+          <a:bodyPr/>
+          <a:p/>
+        </p:txBody>
+      </p:sp>
+      <p:sp>
+        <p:nvSpPr>
+          <p:cNvPr id="19" name="">
+            <a:extLst>
+              <a:ext uri="{FF2B5EF4-FFF2-40B4-BE49-F238E27FC236}">
+                <a16:creationId xmlns:a16="http://schemas.microsoft.com/office/drawing/2014/main" id="{E8F8ED3D-E01B-4FE2-8DDB-B2AFB41A9CEE}"/>
+              </a:ext>
+            </a:extLst>
+          </p:cNvPr>
+          <p:cNvSpPr>
+            <a:spLocks noGrp="1"/>
+          </p:cNvSpPr>
+          <p:nvPr/>
+        </p:nvSpPr>
+        <p:spPr>
+          <a:xfrm>
+            <a:off x="609600" y="4248150"/>
+            <a:ext cx="5372100" cy="1657350"/>
+          </a:xfrm>
+          <a:prstGeom prst="rect">
+            <a:avLst/>
+          </a:prstGeom>
+          <a:solidFill>
+            <a:srgbClr val="FFFFFF"/>
+          </a:solidFill>
+          <a:ln w="0">
+            <a:noFill/>
+          </a:ln>
+        </p:spPr>
+        <p:txBody>
+          <a:bodyPr/>
+          <a:p/>
+        </p:txBody>
+      </p:sp>
+      <p:sp>
+        <p:nvSpPr>
+          <p:cNvPr id="20" name="">
+            <a:extLst>
+              <a:ext uri="{FF2B5EF4-FFF2-40B4-BE49-F238E27FC236}">
+                <a16:creationId xmlns:a16="http://schemas.microsoft.com/office/drawing/2014/main" id="{4AB9F765-1955-4D41-9C88-83F376762D9E}"/>
+              </a:ext>
+            </a:extLst>
+          </p:cNvPr>
+          <p:cNvSpPr>
+            <a:spLocks noGrp="1"/>
+          </p:cNvSpPr>
+          <p:nvPr/>
+        </p:nvSpPr>
+        <p:spPr>
+          <a:xfrm>
+            <a:off x="609600" y="4248150"/>
+            <a:ext cx="47625" cy="1657350"/>
+          </a:xfrm>
+          <a:prstGeom prst="rect">
+            <a:avLst/>
+          </a:prstGeom>
+          <a:solidFill>
+            <a:srgbClr val="E63946"/>
+          </a:solidFill>
+          <a:ln w="0">
+            <a:noFill/>
+          </a:ln>
+        </p:spPr>
+        <p:txBody>
+          <a:bodyPr/>
+          <a:p/>
+        </p:txBody>
+      </p:sp>
+      <p:sp>
+        <p:nvSpPr>
+          <p:cNvPr id="21" name="">
+            <a:extLst>
+              <a:ext uri="{FF2B5EF4-FFF2-40B4-BE49-F238E27FC236}">
+                <a16:creationId xmlns:a16="http://schemas.microsoft.com/office/drawing/2014/main" id="{45D78E31-998E-4BFA-A554-D824FA379782}"/>
+              </a:ext>
+            </a:extLst>
+          </p:cNvPr>
+          <p:cNvSpPr>
+            <a:spLocks noGrp="1"/>
+          </p:cNvSpPr>
+          <p:nvPr/>
+        </p:nvSpPr>
+        <p:spPr>
+          <a:xfrm>
+            <a:off x="819150" y="4419600"/>
+            <a:ext cx="647700" cy="428625"/>
+          </a:xfrm>
+          <a:prstGeom prst="rect">
+            <a:avLst/>
+          </a:prstGeom>
+          <a:noFill/>
+          <a:ln w="0">
+            <a:noFill/>
+          </a:ln>
+        </p:spPr>
+        <p:txBody>
+          <a:bodyPr>
+            <a:noAutofit/>
+          </a:bodyPr>
+          <a:lstStyle/>
+          <a:p>
+            <a:pPr>
+              <a:buNone/>
+              <a:defRPr sz="2025" b="1">
+                <a:solidFill>
+                  <a:srgbClr val="E63946"/>
+                </a:solidFill>
+                <a:latin typeface="PingFang TC"/>
+                <a:ea typeface="PingFang TC"/>
+                <a:cs typeface="PingFang TC"/>
+              </a:defRPr>
+            </a:pPr>
+            <a:r>
+              <a:rPr sz="2025" b="1">
+                <a:solidFill>
+                  <a:srgbClr val="E63946"/>
+                </a:solidFill>
+                <a:latin typeface="PingFang TC"/>
+                <a:ea typeface="PingFang TC"/>
+                <a:cs typeface="PingFang TC"/>
+              </a:rPr>
+              <a:t>03</a:t>
+            </a:r>
+          </a:p>
+        </p:txBody>
+      </p:sp>
+      <p:sp>
+        <p:nvSpPr>
+          <p:cNvPr id="22" name="">
+            <a:extLst>
+              <a:ext uri="{FF2B5EF4-FFF2-40B4-BE49-F238E27FC236}">
+                <a16:creationId xmlns:a16="http://schemas.microsoft.com/office/drawing/2014/main" id="{DC700C09-5DC7-4A22-AA97-AC16015F50CC}"/>
+              </a:ext>
+            </a:extLst>
+          </p:cNvPr>
+          <p:cNvSpPr>
+            <a:spLocks noGrp="1"/>
+          </p:cNvSpPr>
+          <p:nvPr/>
+        </p:nvSpPr>
+        <p:spPr>
+          <a:xfrm>
+            <a:off x="1524000" y="4419600"/>
+            <a:ext cx="4191000" cy="457200"/>
+          </a:xfrm>
+          <a:prstGeom prst="rect">
+            <a:avLst/>
+          </a:prstGeom>
+          <a:noFill/>
+          <a:ln w="0">
+            <a:noFill/>
+          </a:ln>
+        </p:spPr>
+        <p:txBody>
+          <a:bodyPr>
+            <a:noAutofit/>
+          </a:bodyPr>
+          <a:lstStyle/>
+          <a:p>
+            <a:pPr>
+              <a:buNone/>
+              <a:defRPr sz="2175" b="1">
+                <a:solidFill>
+                  <a:srgbClr val="121212"/>
+                </a:solidFill>
+                <a:latin typeface="PingFang TC"/>
+                <a:ea typeface="PingFang TC"/>
+                <a:cs typeface="PingFang TC"/>
+              </a:defRPr>
+            </a:pPr>
+            <a:r>
+              <a:rPr sz="2175" b="1">
+                <a:solidFill>
+                  <a:srgbClr val="121212"/>
+                </a:solidFill>
+                <a:latin typeface="PingFang TC"/>
+                <a:ea typeface="PingFang TC"/>
+                <a:cs typeface="PingFang TC"/>
+              </a:rPr>
+              <a:t>現在他付錢給誰？</a:t>
+            </a:r>
+          </a:p>
+        </p:txBody>
+      </p:sp>
+      <p:sp>
+        <p:nvSpPr>
+          <p:cNvPr id="23" name="">
+            <a:extLst>
+              <a:ext uri="{FF2B5EF4-FFF2-40B4-BE49-F238E27FC236}">
+                <a16:creationId xmlns:a16="http://schemas.microsoft.com/office/drawing/2014/main" id="{8668167D-14C4-4575-B53E-7AABB13896ED}"/>
+              </a:ext>
+            </a:extLst>
+          </p:cNvPr>
+          <p:cNvSpPr>
+            <a:spLocks noGrp="1"/>
+          </p:cNvSpPr>
+          <p:nvPr/>
+        </p:nvSpPr>
+        <p:spPr>
+          <a:xfrm>
+            <a:off x="838200" y="5019675"/>
+            <a:ext cx="4867275" cy="514350"/>
+          </a:xfrm>
+          <a:prstGeom prst="rect">
+            <a:avLst/>
+          </a:prstGeom>
+          <a:noFill/>
+          <a:ln w="0">
+            <a:noFill/>
+          </a:ln>
+        </p:spPr>
+        <p:txBody>
+          <a:bodyPr>
+            <a:noAutofit/>
+          </a:bodyPr>
+          <a:lstStyle/>
+          <a:p>
+            <a:pPr>
+              <a:buNone/>
+              <a:defRPr sz="1650" b="0">
+                <a:solidFill>
+                  <a:srgbClr val="626262"/>
+                </a:solidFill>
+                <a:latin typeface="PingFang TC"/>
+                <a:ea typeface="PingFang TC"/>
+                <a:cs typeface="PingFang TC"/>
+              </a:defRPr>
+            </a:pPr>
+            <a:r>
+              <a:rPr sz="1650" b="0">
+                <a:solidFill>
+                  <a:srgbClr val="626262"/>
+                </a:solidFill>
+                <a:latin typeface="PingFang TC"/>
+                <a:ea typeface="PingFang TC"/>
+                <a:cs typeface="PingFang TC"/>
+              </a:rPr>
+              <a:t>例：LINE 群免費＋一個人工接單的工讀生；外送平台抽三成</a:t>
+            </a:r>
+          </a:p>
+        </p:txBody>
+      </p:sp>
+      <p:sp>
+        <p:nvSpPr>
+          <p:cNvPr id="24" name="">
+            <a:extLst>
+              <a:ext uri="{FF2B5EF4-FFF2-40B4-BE49-F238E27FC236}">
+                <a16:creationId xmlns:a16="http://schemas.microsoft.com/office/drawing/2014/main" id="{50382CE4-25B9-4F93-95EA-C2893B5516BB}"/>
+              </a:ext>
+            </a:extLst>
+          </p:cNvPr>
+          <p:cNvSpPr>
+            <a:spLocks noGrp="1"/>
+          </p:cNvSpPr>
+          <p:nvPr/>
+        </p:nvSpPr>
+        <p:spPr>
+          <a:xfrm>
+            <a:off x="838200" y="5629275"/>
+            <a:ext cx="4905375" cy="19050"/>
+          </a:xfrm>
+          <a:prstGeom prst="rect">
+            <a:avLst/>
+          </a:prstGeom>
+          <a:solidFill>
+            <a:srgbClr val="D9D5CF"/>
+          </a:solidFill>
+          <a:ln w="0">
+            <a:noFill/>
+          </a:ln>
+        </p:spPr>
+        <p:txBody>
+          <a:bodyPr/>
+          <a:p/>
+        </p:txBody>
+      </p:sp>
+      <p:sp>
+        <p:nvSpPr>
+          <p:cNvPr id="25" name="">
+            <a:extLst>
+              <a:ext uri="{FF2B5EF4-FFF2-40B4-BE49-F238E27FC236}">
+                <a16:creationId xmlns:a16="http://schemas.microsoft.com/office/drawing/2014/main" id="{0554D802-4E35-4493-A040-EBB9030F3F4E}"/>
+              </a:ext>
+            </a:extLst>
+          </p:cNvPr>
+          <p:cNvSpPr>
+            <a:spLocks noGrp="1"/>
+          </p:cNvSpPr>
+          <p:nvPr/>
+        </p:nvSpPr>
+        <p:spPr>
+          <a:xfrm>
+            <a:off x="6210300" y="4248150"/>
+            <a:ext cx="5372100" cy="1657350"/>
+          </a:xfrm>
+          <a:prstGeom prst="rect">
+            <a:avLst/>
+          </a:prstGeom>
+          <a:solidFill>
+            <a:srgbClr val="FFFFFF"/>
+          </a:solidFill>
+          <a:ln w="0">
+            <a:noFill/>
+          </a:ln>
+        </p:spPr>
+        <p:txBody>
+          <a:bodyPr/>
+          <a:p/>
+        </p:txBody>
+      </p:sp>
+      <p:sp>
+        <p:nvSpPr>
+          <p:cNvPr id="26" name="">
+            <a:extLst>
+              <a:ext uri="{FF2B5EF4-FFF2-40B4-BE49-F238E27FC236}">
+                <a16:creationId xmlns:a16="http://schemas.microsoft.com/office/drawing/2014/main" id="{42E7A137-3813-409A-95BC-2CF6A7879627}"/>
+              </a:ext>
+            </a:extLst>
+          </p:cNvPr>
+          <p:cNvSpPr>
+            <a:spLocks noGrp="1"/>
+          </p:cNvSpPr>
+          <p:nvPr/>
+        </p:nvSpPr>
+        <p:spPr>
+          <a:xfrm>
+            <a:off x="6210300" y="4248150"/>
+            <a:ext cx="47625" cy="1657350"/>
+          </a:xfrm>
+          <a:prstGeom prst="rect">
+            <a:avLst/>
+          </a:prstGeom>
+          <a:solidFill>
+            <a:srgbClr val="E63946"/>
+          </a:solidFill>
+          <a:ln w="0">
+            <a:noFill/>
+          </a:ln>
+        </p:spPr>
+        <p:txBody>
+          <a:bodyPr/>
+          <a:p/>
+        </p:txBody>
+      </p:sp>
+      <p:sp>
+        <p:nvSpPr>
+          <p:cNvPr id="27" name="">
+            <a:extLst>
+              <a:ext uri="{FF2B5EF4-FFF2-40B4-BE49-F238E27FC236}">
+                <a16:creationId xmlns:a16="http://schemas.microsoft.com/office/drawing/2014/main" id="{D015D6CB-B4CB-48C3-BF11-5D852A8D654C}"/>
+              </a:ext>
+            </a:extLst>
+          </p:cNvPr>
+          <p:cNvSpPr>
+            <a:spLocks noGrp="1"/>
+          </p:cNvSpPr>
+          <p:nvPr/>
+        </p:nvSpPr>
+        <p:spPr>
+          <a:xfrm>
+            <a:off x="6419850" y="4419600"/>
+            <a:ext cx="647700" cy="428625"/>
+          </a:xfrm>
+          <a:prstGeom prst="rect">
+            <a:avLst/>
+          </a:prstGeom>
+          <a:noFill/>
+          <a:ln w="0">
+            <a:noFill/>
+          </a:ln>
+        </p:spPr>
+        <p:txBody>
+          <a:bodyPr>
+            <a:noAutofit/>
+          </a:bodyPr>
+          <a:lstStyle/>
+          <a:p>
+            <a:pPr>
+              <a:buNone/>
+              <a:defRPr sz="2025" b="1">
+                <a:solidFill>
+                  <a:srgbClr val="E63946"/>
+                </a:solidFill>
+                <a:latin typeface="PingFang TC"/>
+                <a:ea typeface="PingFang TC"/>
+                <a:cs typeface="PingFang TC"/>
+              </a:defRPr>
+            </a:pPr>
+            <a:r>
+              <a:rPr sz="2025" b="1">
+                <a:solidFill>
+                  <a:srgbClr val="E63946"/>
+                </a:solidFill>
+                <a:latin typeface="PingFang TC"/>
+                <a:ea typeface="PingFang TC"/>
+                <a:cs typeface="PingFang TC"/>
+              </a:rPr>
+              <a:t>04</a:t>
+            </a:r>
+          </a:p>
+        </p:txBody>
+      </p:sp>
+      <p:sp>
+        <p:nvSpPr>
+          <p:cNvPr id="28" name="">
+            <a:extLst>
+              <a:ext uri="{FF2B5EF4-FFF2-40B4-BE49-F238E27FC236}">
+                <a16:creationId xmlns:a16="http://schemas.microsoft.com/office/drawing/2014/main" id="{6DA70BE6-B36E-447E-BB42-1ACF6D1DC1FE}"/>
+              </a:ext>
+            </a:extLst>
+          </p:cNvPr>
+          <p:cNvSpPr>
+            <a:spLocks noGrp="1"/>
+          </p:cNvSpPr>
+          <p:nvPr/>
+        </p:nvSpPr>
+        <p:spPr>
+          <a:xfrm>
+            <a:off x="7124700" y="4419600"/>
+            <a:ext cx="4191000" cy="457200"/>
+          </a:xfrm>
+          <a:prstGeom prst="rect">
+            <a:avLst/>
+          </a:prstGeom>
+          <a:noFill/>
+          <a:ln w="0">
+            <a:noFill/>
+          </a:ln>
+        </p:spPr>
+        <p:txBody>
+          <a:bodyPr>
+            <a:noAutofit/>
+          </a:bodyPr>
+          <a:lstStyle/>
+          <a:p>
+            <a:pPr>
+              <a:buNone/>
+              <a:defRPr sz="2175" b="1">
+                <a:solidFill>
+                  <a:srgbClr val="121212"/>
+                </a:solidFill>
+                <a:latin typeface="PingFang TC"/>
+                <a:ea typeface="PingFang TC"/>
+                <a:cs typeface="PingFang TC"/>
+              </a:defRPr>
+            </a:pPr>
+            <a:r>
+              <a:rPr sz="2175" b="1">
+                <a:solidFill>
+                  <a:srgbClr val="121212"/>
+                </a:solidFill>
+                <a:latin typeface="PingFang TC"/>
+                <a:ea typeface="PingFang TC"/>
+                <a:cs typeface="PingFang TC"/>
+              </a:rPr>
+              <a:t>為什麼是現在？</a:t>
+            </a:r>
+          </a:p>
+        </p:txBody>
+      </p:sp>
+      <p:sp>
+        <p:nvSpPr>
+          <p:cNvPr id="29" name="">
+            <a:extLst>
+              <a:ext uri="{FF2B5EF4-FFF2-40B4-BE49-F238E27FC236}">
+                <a16:creationId xmlns:a16="http://schemas.microsoft.com/office/drawing/2014/main" id="{70B6D5FA-EA01-4907-A6CB-D4041C18C5ED}"/>
+              </a:ext>
+            </a:extLst>
+          </p:cNvPr>
+          <p:cNvSpPr>
+            <a:spLocks noGrp="1"/>
+          </p:cNvSpPr>
+          <p:nvPr/>
+        </p:nvSpPr>
+        <p:spPr>
+          <a:xfrm>
+            <a:off x="6438900" y="5019675"/>
+            <a:ext cx="4867275" cy="514350"/>
+          </a:xfrm>
+          <a:prstGeom prst="rect">
+            <a:avLst/>
+          </a:prstGeom>
+          <a:noFill/>
+          <a:ln w="0">
+            <a:noFill/>
+          </a:ln>
+        </p:spPr>
+        <p:txBody>
+          <a:bodyPr>
+            <a:noAutofit/>
+          </a:bodyPr>
+          <a:lstStyle/>
+          <a:p>
+            <a:pPr>
+              <a:buNone/>
+              <a:defRPr sz="1650" b="0">
+                <a:solidFill>
+                  <a:srgbClr val="626262"/>
+                </a:solidFill>
+                <a:latin typeface="PingFang TC"/>
+                <a:ea typeface="PingFang TC"/>
+                <a:cs typeface="PingFang TC"/>
+              </a:defRPr>
+            </a:pPr>
+            <a:r>
+              <a:rPr sz="1650" b="0">
+                <a:solidFill>
+                  <a:srgbClr val="626262"/>
+                </a:solidFill>
+                <a:latin typeface="PingFang TC"/>
+                <a:ea typeface="PingFang TC"/>
+                <a:cs typeface="PingFang TC"/>
+              </a:rPr>
+              <a:t>例：缺工、外送普及、AI 語音接單今年變便宜——三者之一要說得出</a:t>
+            </a:r>
+          </a:p>
+        </p:txBody>
+      </p:sp>
+      <p:sp>
+        <p:nvSpPr>
+          <p:cNvPr id="30" name="">
+            <a:extLst>
+              <a:ext uri="{FF2B5EF4-FFF2-40B4-BE49-F238E27FC236}">
+                <a16:creationId xmlns:a16="http://schemas.microsoft.com/office/drawing/2014/main" id="{DAE4AA41-CF0B-4EB5-871A-7FD226B0079B}"/>
+              </a:ext>
+            </a:extLst>
+          </p:cNvPr>
+          <p:cNvSpPr>
+            <a:spLocks noGrp="1"/>
+          </p:cNvSpPr>
+          <p:nvPr/>
+        </p:nvSpPr>
+        <p:spPr>
+          <a:xfrm>
+            <a:off x="6438900" y="5629275"/>
+            <a:ext cx="4905375" cy="19050"/>
+          </a:xfrm>
+          <a:prstGeom prst="rect">
+            <a:avLst/>
+          </a:prstGeom>
+          <a:solidFill>
+            <a:srgbClr val="D9D5CF"/>
+          </a:solidFill>
+          <a:ln w="0">
+            <a:noFill/>
+          </a:ln>
+        </p:spPr>
+        <p:txBody>
+          <a:bodyPr/>
+          <a:p/>
+        </p:txBody>
+      </p:sp>
+    </p:spTree>
+  </p:cSld>
+  <p:clrMapOvr>
+    <a:masterClrMapping/>
+  </p:clrMapOvr>
+</p:sld>
+</file>
+
+<file path=ppt/slides/slide46.xml><?xml version="1.0" encoding="utf-8"?>
 <p:sld xmlns:a="http://schemas.openxmlformats.org/drawingml/2006/main" xmlns:p="http://schemas.openxmlformats.org/presentationml/2006/main" xmlns:r="http://schemas.openxmlformats.org/officeDocument/2006/relationships">
   <p:cSld>
     <p:bg>
@@ -22447,7 +23663,7 @@
                 <a:ea typeface="PingFang TC"/>
                 <a:cs typeface="PingFang TC"/>
               </a:rPr>
-              <a:t>20 / 22</a:t>
+              <a:t>21 / 23</a:t>
             </a:r>
           </a:p>
         </p:txBody>
@@ -22683,7 +23899,7 @@
 </p:sld>
 </file>
 
-<file path=ppt/slides/slide46.xml><?xml version="1.0" encoding="utf-8"?>
+<file path=ppt/slides/slide47.xml><?xml version="1.0" encoding="utf-8"?>
 <p:sld xmlns:a="http://schemas.openxmlformats.org/drawingml/2006/main" xmlns:p="http://schemas.openxmlformats.org/presentationml/2006/main" xmlns:r="http://schemas.openxmlformats.org/officeDocument/2006/relationships">
   <p:cSld>
     <p:bg>
@@ -23019,7 +24235,7 @@
                 <a:ea typeface="PingFang TC"/>
                 <a:cs typeface="PingFang TC"/>
               </a:rPr>
-              <a:t>21 / 22</a:t>
+              <a:t>22 / 23</a:t>
             </a:r>
           </a:p>
         </p:txBody>
@@ -23676,7 +24892,7 @@
 </p:sld>
 </file>
 
-<file path=ppt/slides/slide47.xml><?xml version="1.0" encoding="utf-8"?>
+<file path=ppt/slides/slide48.xml><?xml version="1.0" encoding="utf-8"?>
 <p:sld xmlns:a="http://schemas.openxmlformats.org/drawingml/2006/main" xmlns:p="http://schemas.openxmlformats.org/presentationml/2006/main" xmlns:r="http://schemas.openxmlformats.org/officeDocument/2006/relationships">
   <p:cSld>
     <p:spTree>
@@ -24043,7 +25259,7 @@
                 <a:ea typeface="PingFang TC"/>
                 <a:cs typeface="PingFang TC"/>
               </a:rPr>
-              <a:t>22 / 22</a:t>
+              <a:t>23 / 23</a:t>
             </a:r>
           </a:p>
         </p:txBody>

--- a/materials/Week4_教學簡報.pptx
+++ b/materials/Week4_教學簡報.pptx
@@ -16527,7 +16527,7 @@
                 <a:ea typeface="PingFang TC"/>
                 <a:cs typeface="PingFang TC"/>
               </a:rPr>
-              <a:t>在研究頁最上面；上課日 13:30–18:00 內存檔才算課中，之後補答算課後</a:t>
+              <a:t>在研究頁最上面；上課日 13:00–17:00 內存檔才算課中，之後補答算課後</a:t>
             </a:r>
           </a:p>
         </p:txBody>
